--- a/프레젠테이션1.pptx
+++ b/프레젠테이션1.pptx
@@ -5,7 +5,7 @@
     <p:sldMasterId id="2147483648" r:id="rId1"/>
   </p:sldMasterIdLst>
   <p:notesMasterIdLst>
-    <p:notesMasterId r:id="rId17"/>
+    <p:notesMasterId r:id="rId34"/>
   </p:notesMasterIdLst>
   <p:sldIdLst>
     <p:sldId id="256" r:id="rId2"/>
@@ -23,6 +23,23 @@
     <p:sldId id="268" r:id="rId14"/>
     <p:sldId id="269" r:id="rId15"/>
     <p:sldId id="270" r:id="rId16"/>
+    <p:sldId id="271" r:id="rId17"/>
+    <p:sldId id="272" r:id="rId18"/>
+    <p:sldId id="273" r:id="rId19"/>
+    <p:sldId id="274" r:id="rId20"/>
+    <p:sldId id="275" r:id="rId21"/>
+    <p:sldId id="276" r:id="rId22"/>
+    <p:sldId id="277" r:id="rId23"/>
+    <p:sldId id="278" r:id="rId24"/>
+    <p:sldId id="279" r:id="rId25"/>
+    <p:sldId id="280" r:id="rId26"/>
+    <p:sldId id="281" r:id="rId27"/>
+    <p:sldId id="282" r:id="rId28"/>
+    <p:sldId id="283" r:id="rId29"/>
+    <p:sldId id="284" r:id="rId30"/>
+    <p:sldId id="285" r:id="rId31"/>
+    <p:sldId id="286" r:id="rId32"/>
+    <p:sldId id="288" r:id="rId33"/>
   </p:sldIdLst>
   <p:sldSz cx="12192000" cy="6858000"/>
   <p:notesSz cx="6858000" cy="9144000"/>
@@ -211,7 +228,7 @@
           <a:p>
             <a:fld id="{0B90C6E2-A683-4B04-A91B-7959DBADE9D0}" type="datetimeFigureOut">
               <a:rPr lang="ko-KR" altLang="en-US" smtClean="0"/>
-              <a:t>2026-07-21</a:t>
+              <a:t>2026-07-28</a:t>
             </a:fld>
             <a:endParaRPr lang="ko-KR" altLang="en-US"/>
           </a:p>
@@ -925,7 +942,7 @@
           <a:p>
             <a:fld id="{CC68E042-BE45-4FF1-A1E6-FDEB5BF44878}" type="datetimeFigureOut">
               <a:rPr lang="ko-KR" altLang="en-US" smtClean="0"/>
-              <a:t>2026-07-21</a:t>
+              <a:t>2026-07-28</a:t>
             </a:fld>
             <a:endParaRPr lang="ko-KR" altLang="en-US"/>
           </a:p>
@@ -1123,7 +1140,7 @@
           <a:p>
             <a:fld id="{CC68E042-BE45-4FF1-A1E6-FDEB5BF44878}" type="datetimeFigureOut">
               <a:rPr lang="ko-KR" altLang="en-US" smtClean="0"/>
-              <a:t>2026-07-21</a:t>
+              <a:t>2026-07-28</a:t>
             </a:fld>
             <a:endParaRPr lang="ko-KR" altLang="en-US"/>
           </a:p>
@@ -1331,7 +1348,7 @@
           <a:p>
             <a:fld id="{CC68E042-BE45-4FF1-A1E6-FDEB5BF44878}" type="datetimeFigureOut">
               <a:rPr lang="ko-KR" altLang="en-US" smtClean="0"/>
-              <a:t>2026-07-21</a:t>
+              <a:t>2026-07-28</a:t>
             </a:fld>
             <a:endParaRPr lang="ko-KR" altLang="en-US"/>
           </a:p>
@@ -1529,7 +1546,7 @@
           <a:p>
             <a:fld id="{CC68E042-BE45-4FF1-A1E6-FDEB5BF44878}" type="datetimeFigureOut">
               <a:rPr lang="ko-KR" altLang="en-US" smtClean="0"/>
-              <a:t>2026-07-21</a:t>
+              <a:t>2026-07-28</a:t>
             </a:fld>
             <a:endParaRPr lang="ko-KR" altLang="en-US"/>
           </a:p>
@@ -1804,7 +1821,7 @@
           <a:p>
             <a:fld id="{CC68E042-BE45-4FF1-A1E6-FDEB5BF44878}" type="datetimeFigureOut">
               <a:rPr lang="ko-KR" altLang="en-US" smtClean="0"/>
-              <a:t>2026-07-21</a:t>
+              <a:t>2026-07-28</a:t>
             </a:fld>
             <a:endParaRPr lang="ko-KR" altLang="en-US"/>
           </a:p>
@@ -2069,7 +2086,7 @@
           <a:p>
             <a:fld id="{CC68E042-BE45-4FF1-A1E6-FDEB5BF44878}" type="datetimeFigureOut">
               <a:rPr lang="ko-KR" altLang="en-US" smtClean="0"/>
-              <a:t>2026-07-21</a:t>
+              <a:t>2026-07-28</a:t>
             </a:fld>
             <a:endParaRPr lang="ko-KR" altLang="en-US"/>
           </a:p>
@@ -2481,7 +2498,7 @@
           <a:p>
             <a:fld id="{CC68E042-BE45-4FF1-A1E6-FDEB5BF44878}" type="datetimeFigureOut">
               <a:rPr lang="ko-KR" altLang="en-US" smtClean="0"/>
-              <a:t>2026-07-21</a:t>
+              <a:t>2026-07-28</a:t>
             </a:fld>
             <a:endParaRPr lang="ko-KR" altLang="en-US"/>
           </a:p>
@@ -2622,7 +2639,7 @@
           <a:p>
             <a:fld id="{CC68E042-BE45-4FF1-A1E6-FDEB5BF44878}" type="datetimeFigureOut">
               <a:rPr lang="ko-KR" altLang="en-US" smtClean="0"/>
-              <a:t>2026-07-21</a:t>
+              <a:t>2026-07-28</a:t>
             </a:fld>
             <a:endParaRPr lang="ko-KR" altLang="en-US"/>
           </a:p>
@@ -2735,7 +2752,7 @@
           <a:p>
             <a:fld id="{CC68E042-BE45-4FF1-A1E6-FDEB5BF44878}" type="datetimeFigureOut">
               <a:rPr lang="ko-KR" altLang="en-US" smtClean="0"/>
-              <a:t>2026-07-21</a:t>
+              <a:t>2026-07-28</a:t>
             </a:fld>
             <a:endParaRPr lang="ko-KR" altLang="en-US"/>
           </a:p>
@@ -3046,7 +3063,7 @@
           <a:p>
             <a:fld id="{CC68E042-BE45-4FF1-A1E6-FDEB5BF44878}" type="datetimeFigureOut">
               <a:rPr lang="ko-KR" altLang="en-US" smtClean="0"/>
-              <a:t>2026-07-21</a:t>
+              <a:t>2026-07-28</a:t>
             </a:fld>
             <a:endParaRPr lang="ko-KR" altLang="en-US"/>
           </a:p>
@@ -3334,7 +3351,7 @@
           <a:p>
             <a:fld id="{CC68E042-BE45-4FF1-A1E6-FDEB5BF44878}" type="datetimeFigureOut">
               <a:rPr lang="ko-KR" altLang="en-US" smtClean="0"/>
-              <a:t>2026-07-21</a:t>
+              <a:t>2026-07-28</a:t>
             </a:fld>
             <a:endParaRPr lang="ko-KR" altLang="en-US"/>
           </a:p>
@@ -3575,7 +3592,7 @@
           <a:p>
             <a:fld id="{CC68E042-BE45-4FF1-A1E6-FDEB5BF44878}" type="datetimeFigureOut">
               <a:rPr lang="ko-KR" altLang="en-US" smtClean="0"/>
-              <a:t>2026-07-21</a:t>
+              <a:t>2026-07-28</a:t>
             </a:fld>
             <a:endParaRPr lang="ko-KR" altLang="en-US"/>
           </a:p>
@@ -8440,6 +8457,1386 @@
 </p:sld>
 </file>
 
+<file path=ppt/slides/slide16.xml><?xml version="1.0" encoding="utf-8"?>
+<p:sld xmlns:a="http://schemas.openxmlformats.org/drawingml/2006/main" xmlns:r="http://schemas.openxmlformats.org/officeDocument/2006/relationships" xmlns:p="http://schemas.openxmlformats.org/presentationml/2006/main">
+  <p:cSld>
+    <p:spTree>
+      <p:nvGrpSpPr>
+        <p:cNvPr id="1" name=""/>
+        <p:cNvGrpSpPr/>
+        <p:nvPr/>
+      </p:nvGrpSpPr>
+      <p:grpSpPr>
+        <a:xfrm>
+          <a:off x="0" y="0"/>
+          <a:ext cx="0" cy="0"/>
+          <a:chOff x="0" y="0"/>
+          <a:chExt cx="0" cy="0"/>
+        </a:xfrm>
+      </p:grpSpPr>
+      <p:sp>
+        <p:nvSpPr>
+          <p:cNvPr id="2" name="직사각형 1">
+            <a:extLst>
+              <a:ext uri="{FF2B5EF4-FFF2-40B4-BE49-F238E27FC236}">
+                <a16:creationId xmlns:a16="http://schemas.microsoft.com/office/drawing/2014/main" id="{BE2CEDA1-B9C7-D493-4E2B-5E765DEC6E5E}"/>
+              </a:ext>
+            </a:extLst>
+          </p:cNvPr>
+          <p:cNvSpPr/>
+          <p:nvPr/>
+        </p:nvSpPr>
+        <p:spPr>
+          <a:xfrm>
+            <a:off x="3043237" y="1266824"/>
+            <a:ext cx="1323964" cy="768701"/>
+          </a:xfrm>
+          <a:prstGeom prst="rect">
+            <a:avLst/>
+          </a:prstGeom>
+          <a:noFill/>
+          <a:ln>
+            <a:solidFill>
+              <a:schemeClr val="tx1"/>
+            </a:solidFill>
+          </a:ln>
+        </p:spPr>
+        <p:style>
+          <a:lnRef idx="2">
+            <a:schemeClr val="accent1">
+              <a:shade val="15000"/>
+            </a:schemeClr>
+          </a:lnRef>
+          <a:fillRef idx="1">
+            <a:schemeClr val="accent1"/>
+          </a:fillRef>
+          <a:effectRef idx="0">
+            <a:schemeClr val="accent1"/>
+          </a:effectRef>
+          <a:fontRef idx="minor">
+            <a:schemeClr val="lt1"/>
+          </a:fontRef>
+        </p:style>
+        <p:txBody>
+          <a:bodyPr rtlCol="0" anchor="ctr"/>
+          <a:lstStyle/>
+          <a:p>
+            <a:pPr algn="ctr"/>
+            <a:endParaRPr lang="ko-KR" altLang="en-US"/>
+          </a:p>
+        </p:txBody>
+      </p:sp>
+      <p:sp>
+        <p:nvSpPr>
+          <p:cNvPr id="3" name="직사각형 2">
+            <a:extLst>
+              <a:ext uri="{FF2B5EF4-FFF2-40B4-BE49-F238E27FC236}">
+                <a16:creationId xmlns:a16="http://schemas.microsoft.com/office/drawing/2014/main" id="{7A28ACF6-B0AD-FA23-2D14-70EBE84BE2A9}"/>
+              </a:ext>
+            </a:extLst>
+          </p:cNvPr>
+          <p:cNvSpPr/>
+          <p:nvPr/>
+        </p:nvSpPr>
+        <p:spPr>
+          <a:xfrm>
+            <a:off x="3614737" y="2035525"/>
+            <a:ext cx="252410" cy="388585"/>
+          </a:xfrm>
+          <a:prstGeom prst="rect">
+            <a:avLst/>
+          </a:prstGeom>
+          <a:solidFill>
+            <a:schemeClr val="tx1"/>
+          </a:solidFill>
+          <a:ln>
+            <a:noFill/>
+          </a:ln>
+        </p:spPr>
+        <p:style>
+          <a:lnRef idx="2">
+            <a:schemeClr val="accent1">
+              <a:shade val="15000"/>
+            </a:schemeClr>
+          </a:lnRef>
+          <a:fillRef idx="1">
+            <a:schemeClr val="accent1"/>
+          </a:fillRef>
+          <a:effectRef idx="0">
+            <a:schemeClr val="accent1"/>
+          </a:effectRef>
+          <a:fontRef idx="minor">
+            <a:schemeClr val="lt1"/>
+          </a:fontRef>
+        </p:style>
+        <p:txBody>
+          <a:bodyPr rtlCol="0" anchor="ctr"/>
+          <a:lstStyle/>
+          <a:p>
+            <a:pPr algn="ctr"/>
+            <a:endParaRPr lang="ko-KR" altLang="en-US"/>
+          </a:p>
+        </p:txBody>
+      </p:sp>
+      <p:cxnSp>
+        <p:nvCxnSpPr>
+          <p:cNvPr id="10" name="직선 화살표 연결선 9">
+            <a:extLst>
+              <a:ext uri="{FF2B5EF4-FFF2-40B4-BE49-F238E27FC236}">
+                <a16:creationId xmlns:a16="http://schemas.microsoft.com/office/drawing/2014/main" id="{E0466E65-725C-C0BF-63EC-8F2BF819E662}"/>
+              </a:ext>
+            </a:extLst>
+          </p:cNvPr>
+          <p:cNvCxnSpPr>
+            <a:cxnSpLocks/>
+          </p:cNvCxnSpPr>
+          <p:nvPr/>
+        </p:nvCxnSpPr>
+        <p:spPr>
+          <a:xfrm>
+            <a:off x="4510087" y="1266824"/>
+            <a:ext cx="0" cy="768701"/>
+          </a:xfrm>
+          <a:prstGeom prst="straightConnector1">
+            <a:avLst/>
+          </a:prstGeom>
+          <a:ln>
+            <a:headEnd type="triangle"/>
+            <a:tailEnd type="triangle"/>
+          </a:ln>
+        </p:spPr>
+        <p:style>
+          <a:lnRef idx="2">
+            <a:schemeClr val="accent1"/>
+          </a:lnRef>
+          <a:fillRef idx="0">
+            <a:schemeClr val="accent1"/>
+          </a:fillRef>
+          <a:effectRef idx="1">
+            <a:schemeClr val="accent1"/>
+          </a:effectRef>
+          <a:fontRef idx="minor">
+            <a:schemeClr val="tx1"/>
+          </a:fontRef>
+        </p:style>
+      </p:cxnSp>
+      <p:cxnSp>
+        <p:nvCxnSpPr>
+          <p:cNvPr id="11" name="직선 화살표 연결선 10">
+            <a:extLst>
+              <a:ext uri="{FF2B5EF4-FFF2-40B4-BE49-F238E27FC236}">
+                <a16:creationId xmlns:a16="http://schemas.microsoft.com/office/drawing/2014/main" id="{ACF26528-BF50-74DE-9369-E31C5C5A550A}"/>
+              </a:ext>
+            </a:extLst>
+          </p:cNvPr>
+          <p:cNvCxnSpPr>
+            <a:cxnSpLocks/>
+          </p:cNvCxnSpPr>
+          <p:nvPr/>
+        </p:nvCxnSpPr>
+        <p:spPr>
+          <a:xfrm>
+            <a:off x="4510087" y="2035525"/>
+            <a:ext cx="0" cy="388585"/>
+          </a:xfrm>
+          <a:prstGeom prst="straightConnector1">
+            <a:avLst/>
+          </a:prstGeom>
+          <a:ln>
+            <a:headEnd type="triangle"/>
+            <a:tailEnd type="triangle"/>
+          </a:ln>
+        </p:spPr>
+        <p:style>
+          <a:lnRef idx="2">
+            <a:schemeClr val="accent1"/>
+          </a:lnRef>
+          <a:fillRef idx="0">
+            <a:schemeClr val="accent1"/>
+          </a:fillRef>
+          <a:effectRef idx="1">
+            <a:schemeClr val="accent1"/>
+          </a:effectRef>
+          <a:fontRef idx="minor">
+            <a:schemeClr val="tx1"/>
+          </a:fontRef>
+        </p:style>
+      </p:cxnSp>
+      <p:sp>
+        <p:nvSpPr>
+          <p:cNvPr id="13" name="TextBox 12">
+            <a:extLst>
+              <a:ext uri="{FF2B5EF4-FFF2-40B4-BE49-F238E27FC236}">
+                <a16:creationId xmlns:a16="http://schemas.microsoft.com/office/drawing/2014/main" id="{024AF6C4-23F9-65D7-E0A8-B823B38BC32E}"/>
+              </a:ext>
+            </a:extLst>
+          </p:cNvPr>
+          <p:cNvSpPr txBox="1"/>
+          <p:nvPr/>
+        </p:nvSpPr>
+        <p:spPr>
+          <a:xfrm>
+            <a:off x="4700587" y="1503876"/>
+            <a:ext cx="361947" cy="369332"/>
+          </a:xfrm>
+          <a:prstGeom prst="rect">
+            <a:avLst/>
+          </a:prstGeom>
+          <a:noFill/>
+        </p:spPr>
+        <p:txBody>
+          <a:bodyPr wrap="square" rtlCol="0">
+            <a:spAutoFit/>
+          </a:bodyPr>
+          <a:lstStyle/>
+          <a:p>
+            <a:r>
+              <a:rPr lang="en-US" altLang="ko-KR"/>
+              <a:t>4</a:t>
+            </a:r>
+            <a:endParaRPr lang="ko-KR" altLang="en-US"/>
+          </a:p>
+        </p:txBody>
+      </p:sp>
+      <p:sp>
+        <p:nvSpPr>
+          <p:cNvPr id="15" name="TextBox 14">
+            <a:extLst>
+              <a:ext uri="{FF2B5EF4-FFF2-40B4-BE49-F238E27FC236}">
+                <a16:creationId xmlns:a16="http://schemas.microsoft.com/office/drawing/2014/main" id="{EBDBD1CC-F073-C8C3-6BA8-E117AB582D32}"/>
+              </a:ext>
+            </a:extLst>
+          </p:cNvPr>
+          <p:cNvSpPr txBox="1"/>
+          <p:nvPr/>
+        </p:nvSpPr>
+        <p:spPr>
+          <a:xfrm>
+            <a:off x="4714876" y="2094307"/>
+            <a:ext cx="361947" cy="369332"/>
+          </a:xfrm>
+          <a:prstGeom prst="rect">
+            <a:avLst/>
+          </a:prstGeom>
+          <a:noFill/>
+        </p:spPr>
+        <p:txBody>
+          <a:bodyPr wrap="square" rtlCol="0">
+            <a:spAutoFit/>
+          </a:bodyPr>
+          <a:lstStyle/>
+          <a:p>
+            <a:r>
+              <a:rPr lang="en-US" altLang="ko-KR"/>
+              <a:t>2</a:t>
+            </a:r>
+            <a:endParaRPr lang="ko-KR" altLang="en-US"/>
+          </a:p>
+        </p:txBody>
+      </p:sp>
+      <p:grpSp>
+        <p:nvGrpSpPr>
+          <p:cNvPr id="22" name="그룹 21">
+            <a:extLst>
+              <a:ext uri="{FF2B5EF4-FFF2-40B4-BE49-F238E27FC236}">
+                <a16:creationId xmlns:a16="http://schemas.microsoft.com/office/drawing/2014/main" id="{4BACC9F1-9869-120E-A5E2-E51C573CEB84}"/>
+              </a:ext>
+            </a:extLst>
+          </p:cNvPr>
+          <p:cNvGrpSpPr/>
+          <p:nvPr/>
+        </p:nvGrpSpPr>
+        <p:grpSpPr>
+          <a:xfrm>
+            <a:off x="3014662" y="2578294"/>
+            <a:ext cx="600075" cy="369332"/>
+            <a:chOff x="3000375" y="2578294"/>
+            <a:chExt cx="600075" cy="369332"/>
+          </a:xfrm>
+        </p:grpSpPr>
+        <p:sp>
+          <p:nvSpPr>
+            <p:cNvPr id="19" name="TextBox 18">
+              <a:extLst>
+                <a:ext uri="{FF2B5EF4-FFF2-40B4-BE49-F238E27FC236}">
+                  <a16:creationId xmlns:a16="http://schemas.microsoft.com/office/drawing/2014/main" id="{EC6C72C9-F006-40DA-94B4-6F7669786C71}"/>
+                </a:ext>
+              </a:extLst>
+            </p:cNvPr>
+            <p:cNvSpPr txBox="1"/>
+            <p:nvPr/>
+          </p:nvSpPr>
+          <p:spPr>
+            <a:xfrm>
+              <a:off x="3071814" y="2578294"/>
+              <a:ext cx="504824" cy="369332"/>
+            </a:xfrm>
+            <a:prstGeom prst="rect">
+              <a:avLst/>
+            </a:prstGeom>
+            <a:noFill/>
+          </p:spPr>
+          <p:txBody>
+            <a:bodyPr wrap="square" rtlCol="0">
+              <a:spAutoFit/>
+            </a:bodyPr>
+            <a:lstStyle/>
+            <a:p>
+              <a:r>
+                <a:rPr lang="en-US" altLang="ko-KR"/>
+                <a:t>2.5</a:t>
+              </a:r>
+              <a:endParaRPr lang="ko-KR" altLang="en-US"/>
+            </a:p>
+          </p:txBody>
+        </p:sp>
+        <p:cxnSp>
+          <p:nvCxnSpPr>
+            <p:cNvPr id="21" name="직선 화살표 연결선 20">
+              <a:extLst>
+                <a:ext uri="{FF2B5EF4-FFF2-40B4-BE49-F238E27FC236}">
+                  <a16:creationId xmlns:a16="http://schemas.microsoft.com/office/drawing/2014/main" id="{AAEAA329-8C8D-B432-2615-9DE60DDBC255}"/>
+                </a:ext>
+              </a:extLst>
+            </p:cNvPr>
+            <p:cNvCxnSpPr>
+              <a:cxnSpLocks/>
+            </p:cNvCxnSpPr>
+            <p:nvPr/>
+          </p:nvCxnSpPr>
+          <p:spPr>
+            <a:xfrm>
+              <a:off x="3000375" y="2578294"/>
+              <a:ext cx="600075" cy="0"/>
+            </a:xfrm>
+            <a:prstGeom prst="straightConnector1">
+              <a:avLst/>
+            </a:prstGeom>
+            <a:ln>
+              <a:headEnd type="triangle"/>
+              <a:tailEnd type="triangle"/>
+            </a:ln>
+          </p:spPr>
+          <p:style>
+            <a:lnRef idx="2">
+              <a:schemeClr val="accent1"/>
+            </a:lnRef>
+            <a:fillRef idx="0">
+              <a:schemeClr val="accent1"/>
+            </a:fillRef>
+            <a:effectRef idx="1">
+              <a:schemeClr val="accent1"/>
+            </a:effectRef>
+            <a:fontRef idx="minor">
+              <a:schemeClr val="tx1"/>
+            </a:fontRef>
+          </p:style>
+        </p:cxnSp>
+      </p:grpSp>
+      <p:grpSp>
+        <p:nvGrpSpPr>
+          <p:cNvPr id="23" name="그룹 22">
+            <a:extLst>
+              <a:ext uri="{FF2B5EF4-FFF2-40B4-BE49-F238E27FC236}">
+                <a16:creationId xmlns:a16="http://schemas.microsoft.com/office/drawing/2014/main" id="{058AC282-41C7-991E-D88A-304D791985B9}"/>
+              </a:ext>
+            </a:extLst>
+          </p:cNvPr>
+          <p:cNvGrpSpPr/>
+          <p:nvPr/>
+        </p:nvGrpSpPr>
+        <p:grpSpPr>
+          <a:xfrm>
+            <a:off x="3543300" y="2578294"/>
+            <a:ext cx="361947" cy="369332"/>
+            <a:chOff x="3071814" y="2578294"/>
+            <a:chExt cx="361947" cy="369332"/>
+          </a:xfrm>
+        </p:grpSpPr>
+        <p:sp>
+          <p:nvSpPr>
+            <p:cNvPr id="24" name="TextBox 23">
+              <a:extLst>
+                <a:ext uri="{FF2B5EF4-FFF2-40B4-BE49-F238E27FC236}">
+                  <a16:creationId xmlns:a16="http://schemas.microsoft.com/office/drawing/2014/main" id="{29A02B33-83AD-D17E-00E2-309E8F1AF315}"/>
+                </a:ext>
+              </a:extLst>
+            </p:cNvPr>
+            <p:cNvSpPr txBox="1"/>
+            <p:nvPr/>
+          </p:nvSpPr>
+          <p:spPr>
+            <a:xfrm>
+              <a:off x="3071814" y="2578294"/>
+              <a:ext cx="361947" cy="369332"/>
+            </a:xfrm>
+            <a:prstGeom prst="rect">
+              <a:avLst/>
+            </a:prstGeom>
+            <a:noFill/>
+          </p:spPr>
+          <p:txBody>
+            <a:bodyPr wrap="square" rtlCol="0">
+              <a:spAutoFit/>
+            </a:bodyPr>
+            <a:lstStyle/>
+            <a:p>
+              <a:r>
+                <a:rPr lang="en-US" altLang="ko-KR"/>
+                <a:t>1</a:t>
+              </a:r>
+              <a:endParaRPr lang="ko-KR" altLang="en-US"/>
+            </a:p>
+          </p:txBody>
+        </p:sp>
+        <p:cxnSp>
+          <p:nvCxnSpPr>
+            <p:cNvPr id="25" name="직선 화살표 연결선 24">
+              <a:extLst>
+                <a:ext uri="{FF2B5EF4-FFF2-40B4-BE49-F238E27FC236}">
+                  <a16:creationId xmlns:a16="http://schemas.microsoft.com/office/drawing/2014/main" id="{6C7BC278-3AEB-C9BA-64B1-A0B0DD344D7B}"/>
+                </a:ext>
+              </a:extLst>
+            </p:cNvPr>
+            <p:cNvCxnSpPr>
+              <a:cxnSpLocks/>
+            </p:cNvCxnSpPr>
+            <p:nvPr/>
+          </p:nvCxnSpPr>
+          <p:spPr>
+            <a:xfrm>
+              <a:off x="3119439" y="2578294"/>
+              <a:ext cx="276222" cy="0"/>
+            </a:xfrm>
+            <a:prstGeom prst="straightConnector1">
+              <a:avLst/>
+            </a:prstGeom>
+            <a:ln>
+              <a:headEnd type="triangle"/>
+              <a:tailEnd type="triangle"/>
+            </a:ln>
+          </p:spPr>
+          <p:style>
+            <a:lnRef idx="2">
+              <a:schemeClr val="accent1"/>
+            </a:lnRef>
+            <a:fillRef idx="0">
+              <a:schemeClr val="accent1"/>
+            </a:fillRef>
+            <a:effectRef idx="1">
+              <a:schemeClr val="accent1"/>
+            </a:effectRef>
+            <a:fontRef idx="minor">
+              <a:schemeClr val="tx1"/>
+            </a:fontRef>
+          </p:style>
+        </p:cxnSp>
+      </p:grpSp>
+      <p:grpSp>
+        <p:nvGrpSpPr>
+          <p:cNvPr id="26" name="그룹 25">
+            <a:extLst>
+              <a:ext uri="{FF2B5EF4-FFF2-40B4-BE49-F238E27FC236}">
+                <a16:creationId xmlns:a16="http://schemas.microsoft.com/office/drawing/2014/main" id="{4F6A9DA6-8FA9-37D9-CA87-DB29820BEB7D}"/>
+              </a:ext>
+            </a:extLst>
+          </p:cNvPr>
+          <p:cNvGrpSpPr/>
+          <p:nvPr/>
+        </p:nvGrpSpPr>
+        <p:grpSpPr>
+          <a:xfrm>
+            <a:off x="3867147" y="2573169"/>
+            <a:ext cx="533403" cy="369332"/>
+            <a:chOff x="2962275" y="2578294"/>
+            <a:chExt cx="533403" cy="369332"/>
+          </a:xfrm>
+        </p:grpSpPr>
+        <p:sp>
+          <p:nvSpPr>
+            <p:cNvPr id="27" name="TextBox 26">
+              <a:extLst>
+                <a:ext uri="{FF2B5EF4-FFF2-40B4-BE49-F238E27FC236}">
+                  <a16:creationId xmlns:a16="http://schemas.microsoft.com/office/drawing/2014/main" id="{D1F7B8E0-8270-7A5B-475A-FFF88CBB89A4}"/>
+                </a:ext>
+              </a:extLst>
+            </p:cNvPr>
+            <p:cNvSpPr txBox="1"/>
+            <p:nvPr/>
+          </p:nvSpPr>
+          <p:spPr>
+            <a:xfrm>
+              <a:off x="2986087" y="2578294"/>
+              <a:ext cx="509591" cy="369332"/>
+            </a:xfrm>
+            <a:prstGeom prst="rect">
+              <a:avLst/>
+            </a:prstGeom>
+            <a:noFill/>
+          </p:spPr>
+          <p:txBody>
+            <a:bodyPr wrap="square" rtlCol="0">
+              <a:spAutoFit/>
+            </a:bodyPr>
+            <a:lstStyle/>
+            <a:p>
+              <a:r>
+                <a:rPr lang="en-US" altLang="ko-KR"/>
+                <a:t>2.5</a:t>
+              </a:r>
+              <a:endParaRPr lang="ko-KR" altLang="en-US"/>
+            </a:p>
+          </p:txBody>
+        </p:sp>
+        <p:cxnSp>
+          <p:nvCxnSpPr>
+            <p:cNvPr id="28" name="직선 화살표 연결선 27">
+              <a:extLst>
+                <a:ext uri="{FF2B5EF4-FFF2-40B4-BE49-F238E27FC236}">
+                  <a16:creationId xmlns:a16="http://schemas.microsoft.com/office/drawing/2014/main" id="{6D362874-5DB2-D100-06BF-A1591A73CF41}"/>
+                </a:ext>
+              </a:extLst>
+            </p:cNvPr>
+            <p:cNvCxnSpPr>
+              <a:cxnSpLocks/>
+            </p:cNvCxnSpPr>
+            <p:nvPr/>
+          </p:nvCxnSpPr>
+          <p:spPr>
+            <a:xfrm>
+              <a:off x="2962275" y="2578294"/>
+              <a:ext cx="533403" cy="0"/>
+            </a:xfrm>
+            <a:prstGeom prst="straightConnector1">
+              <a:avLst/>
+            </a:prstGeom>
+            <a:ln>
+              <a:headEnd type="triangle"/>
+              <a:tailEnd type="triangle"/>
+            </a:ln>
+          </p:spPr>
+          <p:style>
+            <a:lnRef idx="2">
+              <a:schemeClr val="accent1"/>
+            </a:lnRef>
+            <a:fillRef idx="0">
+              <a:schemeClr val="accent1"/>
+            </a:fillRef>
+            <a:effectRef idx="1">
+              <a:schemeClr val="accent1"/>
+            </a:effectRef>
+            <a:fontRef idx="minor">
+              <a:schemeClr val="tx1"/>
+            </a:fontRef>
+          </p:style>
+        </p:cxnSp>
+      </p:grpSp>
+      <p:cxnSp>
+        <p:nvCxnSpPr>
+          <p:cNvPr id="31" name="직선 화살표 연결선 30">
+            <a:extLst>
+              <a:ext uri="{FF2B5EF4-FFF2-40B4-BE49-F238E27FC236}">
+                <a16:creationId xmlns:a16="http://schemas.microsoft.com/office/drawing/2014/main" id="{CF8B31F2-95A9-A596-7591-6101371E4602}"/>
+              </a:ext>
+            </a:extLst>
+          </p:cNvPr>
+          <p:cNvCxnSpPr>
+            <a:cxnSpLocks/>
+            <a:stCxn id="35" idx="2"/>
+            <a:endCxn id="6" idx="1"/>
+          </p:cNvCxnSpPr>
+          <p:nvPr/>
+        </p:nvCxnSpPr>
+        <p:spPr>
+          <a:xfrm>
+            <a:off x="1509714" y="1419224"/>
+            <a:ext cx="1681159" cy="231951"/>
+          </a:xfrm>
+          <a:prstGeom prst="straightConnector1">
+            <a:avLst/>
+          </a:prstGeom>
+          <a:ln>
+            <a:tailEnd type="triangle"/>
+          </a:ln>
+        </p:spPr>
+        <p:style>
+          <a:lnRef idx="2">
+            <a:schemeClr val="accent1"/>
+          </a:lnRef>
+          <a:fillRef idx="0">
+            <a:schemeClr val="accent1"/>
+          </a:fillRef>
+          <a:effectRef idx="1">
+            <a:schemeClr val="accent1"/>
+          </a:effectRef>
+          <a:fontRef idx="minor">
+            <a:schemeClr val="tx1"/>
+          </a:fontRef>
+        </p:style>
+      </p:cxnSp>
+      <p:sp>
+        <p:nvSpPr>
+          <p:cNvPr id="35" name="TextBox 34">
+            <a:extLst>
+              <a:ext uri="{FF2B5EF4-FFF2-40B4-BE49-F238E27FC236}">
+                <a16:creationId xmlns:a16="http://schemas.microsoft.com/office/drawing/2014/main" id="{82E3DD31-7F46-78B7-8959-BCDF068E8FF9}"/>
+              </a:ext>
+            </a:extLst>
+          </p:cNvPr>
+          <p:cNvSpPr txBox="1"/>
+          <p:nvPr/>
+        </p:nvSpPr>
+        <p:spPr>
+          <a:xfrm>
+            <a:off x="1042990" y="1049892"/>
+            <a:ext cx="933447" cy="369332"/>
+          </a:xfrm>
+          <a:prstGeom prst="rect">
+            <a:avLst/>
+          </a:prstGeom>
+          <a:noFill/>
+        </p:spPr>
+        <p:txBody>
+          <a:bodyPr wrap="square" rtlCol="0">
+            <a:spAutoFit/>
+          </a:bodyPr>
+          <a:lstStyle/>
+          <a:p>
+            <a:r>
+              <a:rPr lang="en-US" altLang="ko-KR"/>
+              <a:t>48 pt</a:t>
+            </a:r>
+            <a:endParaRPr lang="ko-KR" altLang="en-US"/>
+          </a:p>
+        </p:txBody>
+      </p:sp>
+      <p:sp>
+        <p:nvSpPr>
+          <p:cNvPr id="6" name="TextBox 5">
+            <a:extLst>
+              <a:ext uri="{FF2B5EF4-FFF2-40B4-BE49-F238E27FC236}">
+                <a16:creationId xmlns:a16="http://schemas.microsoft.com/office/drawing/2014/main" id="{856F9EFA-9A69-EEDD-F241-E398FB7EEA13}"/>
+              </a:ext>
+            </a:extLst>
+          </p:cNvPr>
+          <p:cNvSpPr txBox="1"/>
+          <p:nvPr/>
+        </p:nvSpPr>
+        <p:spPr>
+          <a:xfrm>
+            <a:off x="3190873" y="1466509"/>
+            <a:ext cx="1066800" cy="369332"/>
+          </a:xfrm>
+          <a:prstGeom prst="rect">
+            <a:avLst/>
+          </a:prstGeom>
+          <a:noFill/>
+        </p:spPr>
+        <p:txBody>
+          <a:bodyPr wrap="square" rtlCol="0">
+            <a:spAutoFit/>
+          </a:bodyPr>
+          <a:lstStyle/>
+          <a:p>
+            <a:pPr algn="ctr"/>
+            <a:r>
+              <a:rPr lang="en-US" altLang="ko-KR"/>
+              <a:t>13</a:t>
+            </a:r>
+            <a:endParaRPr lang="ko-KR" altLang="en-US"/>
+          </a:p>
+        </p:txBody>
+      </p:sp>
+      <p:sp>
+        <p:nvSpPr>
+          <p:cNvPr id="82" name="TextBox 81">
+            <a:extLst>
+              <a:ext uri="{FF2B5EF4-FFF2-40B4-BE49-F238E27FC236}">
+                <a16:creationId xmlns:a16="http://schemas.microsoft.com/office/drawing/2014/main" id="{A4964DE4-6665-DB47-30CE-D764B8EBEC14}"/>
+              </a:ext>
+            </a:extLst>
+          </p:cNvPr>
+          <p:cNvSpPr txBox="1"/>
+          <p:nvPr/>
+        </p:nvSpPr>
+        <p:spPr>
+          <a:xfrm>
+            <a:off x="3467097" y="2040649"/>
+            <a:ext cx="1066800" cy="369332"/>
+          </a:xfrm>
+          <a:prstGeom prst="rect">
+            <a:avLst/>
+          </a:prstGeom>
+          <a:noFill/>
+        </p:spPr>
+        <p:txBody>
+          <a:bodyPr wrap="square" rtlCol="0">
+            <a:spAutoFit/>
+          </a:bodyPr>
+          <a:lstStyle/>
+          <a:p>
+            <a:pPr algn="ctr"/>
+            <a:r>
+              <a:rPr lang="en-US" altLang="ko-KR"/>
+              <a:t>4</a:t>
+            </a:r>
+            <a:endParaRPr lang="ko-KR" altLang="en-US"/>
+          </a:p>
+        </p:txBody>
+      </p:sp>
+    </p:spTree>
+    <p:extLst>
+      <p:ext uri="{BB962C8B-B14F-4D97-AF65-F5344CB8AC3E}">
+        <p14:creationId xmlns:p14="http://schemas.microsoft.com/office/powerpoint/2010/main" val="2231948904"/>
+      </p:ext>
+    </p:extLst>
+  </p:cSld>
+  <p:clrMapOvr>
+    <a:masterClrMapping/>
+  </p:clrMapOvr>
+</p:sld>
+</file>
+
+<file path=ppt/slides/slide17.xml><?xml version="1.0" encoding="utf-8"?>
+<p:sld xmlns:a="http://schemas.openxmlformats.org/drawingml/2006/main" xmlns:r="http://schemas.openxmlformats.org/officeDocument/2006/relationships" xmlns:p="http://schemas.openxmlformats.org/presentationml/2006/main">
+  <p:cSld>
+    <p:spTree>
+      <p:nvGrpSpPr>
+        <p:cNvPr id="1" name=""/>
+        <p:cNvGrpSpPr/>
+        <p:nvPr/>
+      </p:nvGrpSpPr>
+      <p:grpSpPr>
+        <a:xfrm>
+          <a:off x="0" y="0"/>
+          <a:ext cx="0" cy="0"/>
+          <a:chOff x="0" y="0"/>
+          <a:chExt cx="0" cy="0"/>
+        </a:xfrm>
+      </p:grpSpPr>
+      <p:pic>
+        <p:nvPicPr>
+          <p:cNvPr id="3" name="그림 2">
+            <a:extLst>
+              <a:ext uri="{FF2B5EF4-FFF2-40B4-BE49-F238E27FC236}">
+                <a16:creationId xmlns:a16="http://schemas.microsoft.com/office/drawing/2014/main" id="{F897458C-4601-8DC7-B8EC-DD8D48DC46CD}"/>
+              </a:ext>
+            </a:extLst>
+          </p:cNvPr>
+          <p:cNvPicPr>
+            <a:picLocks noChangeAspect="1"/>
+          </p:cNvPicPr>
+          <p:nvPr/>
+        </p:nvPicPr>
+        <p:blipFill>
+          <a:blip r:embed="rId2"/>
+          <a:stretch>
+            <a:fillRect/>
+          </a:stretch>
+        </p:blipFill>
+        <p:spPr>
+          <a:xfrm>
+            <a:off x="1601227" y="466567"/>
+            <a:ext cx="2705478" cy="2267266"/>
+          </a:xfrm>
+          <a:prstGeom prst="rect">
+            <a:avLst/>
+          </a:prstGeom>
+        </p:spPr>
+      </p:pic>
+      <p:sp>
+        <p:nvSpPr>
+          <p:cNvPr id="4" name="직사각형 3">
+            <a:extLst>
+              <a:ext uri="{FF2B5EF4-FFF2-40B4-BE49-F238E27FC236}">
+                <a16:creationId xmlns:a16="http://schemas.microsoft.com/office/drawing/2014/main" id="{A020056A-6BEB-1B21-1984-A8664F091436}"/>
+              </a:ext>
+            </a:extLst>
+          </p:cNvPr>
+          <p:cNvSpPr/>
+          <p:nvPr/>
+        </p:nvSpPr>
+        <p:spPr>
+          <a:xfrm>
+            <a:off x="1610752" y="1926077"/>
+            <a:ext cx="1161428" cy="972766"/>
+          </a:xfrm>
+          <a:prstGeom prst="rect">
+            <a:avLst/>
+          </a:prstGeom>
+          <a:solidFill>
+            <a:srgbClr val="FF0000"/>
+          </a:solidFill>
+          <a:ln>
+            <a:noFill/>
+          </a:ln>
+        </p:spPr>
+        <p:style>
+          <a:lnRef idx="2">
+            <a:schemeClr val="accent1">
+              <a:shade val="15000"/>
+            </a:schemeClr>
+          </a:lnRef>
+          <a:fillRef idx="1">
+            <a:schemeClr val="accent1"/>
+          </a:fillRef>
+          <a:effectRef idx="0">
+            <a:schemeClr val="accent1"/>
+          </a:effectRef>
+          <a:fontRef idx="minor">
+            <a:schemeClr val="lt1"/>
+          </a:fontRef>
+        </p:style>
+        <p:txBody>
+          <a:bodyPr rtlCol="0" anchor="ctr"/>
+          <a:lstStyle/>
+          <a:p>
+            <a:pPr algn="ctr"/>
+            <a:endParaRPr lang="ko-KR" altLang="en-US"/>
+          </a:p>
+        </p:txBody>
+      </p:sp>
+      <p:pic>
+        <p:nvPicPr>
+          <p:cNvPr id="6" name="그림 5">
+            <a:extLst>
+              <a:ext uri="{FF2B5EF4-FFF2-40B4-BE49-F238E27FC236}">
+                <a16:creationId xmlns:a16="http://schemas.microsoft.com/office/drawing/2014/main" id="{C7C1EEA7-9CE8-A7CB-48B3-1F4F69E8228D}"/>
+              </a:ext>
+            </a:extLst>
+          </p:cNvPr>
+          <p:cNvPicPr>
+            <a:picLocks noChangeAspect="1"/>
+          </p:cNvPicPr>
+          <p:nvPr/>
+        </p:nvPicPr>
+        <p:blipFill>
+          <a:blip r:embed="rId3"/>
+          <a:stretch>
+            <a:fillRect/>
+          </a:stretch>
+        </p:blipFill>
+        <p:spPr>
+          <a:xfrm>
+            <a:off x="4976656" y="380574"/>
+            <a:ext cx="3172268" cy="3048425"/>
+          </a:xfrm>
+          <a:prstGeom prst="rect">
+            <a:avLst/>
+          </a:prstGeom>
+        </p:spPr>
+      </p:pic>
+      <p:sp>
+        <p:nvSpPr>
+          <p:cNvPr id="8" name="직사각형 7">
+            <a:extLst>
+              <a:ext uri="{FF2B5EF4-FFF2-40B4-BE49-F238E27FC236}">
+                <a16:creationId xmlns:a16="http://schemas.microsoft.com/office/drawing/2014/main" id="{D620FBC1-EF1F-F445-AF89-DFAE4E9F697A}"/>
+              </a:ext>
+            </a:extLst>
+          </p:cNvPr>
+          <p:cNvSpPr/>
+          <p:nvPr/>
+        </p:nvSpPr>
+        <p:spPr>
+          <a:xfrm>
+            <a:off x="5154052" y="706877"/>
+            <a:ext cx="1161428" cy="972766"/>
+          </a:xfrm>
+          <a:prstGeom prst="rect">
+            <a:avLst/>
+          </a:prstGeom>
+          <a:solidFill>
+            <a:srgbClr val="FF0000"/>
+          </a:solidFill>
+          <a:ln>
+            <a:noFill/>
+          </a:ln>
+        </p:spPr>
+        <p:style>
+          <a:lnRef idx="2">
+            <a:schemeClr val="accent1">
+              <a:shade val="15000"/>
+            </a:schemeClr>
+          </a:lnRef>
+          <a:fillRef idx="1">
+            <a:schemeClr val="accent1"/>
+          </a:fillRef>
+          <a:effectRef idx="0">
+            <a:schemeClr val="accent1"/>
+          </a:effectRef>
+          <a:fontRef idx="minor">
+            <a:schemeClr val="lt1"/>
+          </a:fontRef>
+        </p:style>
+        <p:txBody>
+          <a:bodyPr rtlCol="0" anchor="ctr"/>
+          <a:lstStyle/>
+          <a:p>
+            <a:pPr algn="ctr"/>
+            <a:endParaRPr lang="ko-KR" altLang="en-US"/>
+          </a:p>
+        </p:txBody>
+      </p:sp>
+    </p:spTree>
+    <p:extLst>
+      <p:ext uri="{BB962C8B-B14F-4D97-AF65-F5344CB8AC3E}">
+        <p14:creationId xmlns:p14="http://schemas.microsoft.com/office/powerpoint/2010/main" val="4249942212"/>
+      </p:ext>
+    </p:extLst>
+  </p:cSld>
+  <p:clrMapOvr>
+    <a:masterClrMapping/>
+  </p:clrMapOvr>
+</p:sld>
+</file>
+
+<file path=ppt/slides/slide18.xml><?xml version="1.0" encoding="utf-8"?>
+<p:sld xmlns:a="http://schemas.openxmlformats.org/drawingml/2006/main" xmlns:r="http://schemas.openxmlformats.org/officeDocument/2006/relationships" xmlns:p="http://schemas.openxmlformats.org/presentationml/2006/main">
+  <p:cSld>
+    <p:spTree>
+      <p:nvGrpSpPr>
+        <p:cNvPr id="1" name=""/>
+        <p:cNvGrpSpPr/>
+        <p:nvPr/>
+      </p:nvGrpSpPr>
+      <p:grpSpPr>
+        <a:xfrm>
+          <a:off x="0" y="0"/>
+          <a:ext cx="0" cy="0"/>
+          <a:chOff x="0" y="0"/>
+          <a:chExt cx="0" cy="0"/>
+        </a:xfrm>
+      </p:grpSpPr>
+      <p:pic>
+        <p:nvPicPr>
+          <p:cNvPr id="3" name="그림 2">
+            <a:extLst>
+              <a:ext uri="{FF2B5EF4-FFF2-40B4-BE49-F238E27FC236}">
+                <a16:creationId xmlns:a16="http://schemas.microsoft.com/office/drawing/2014/main" id="{FD212504-EC9D-8B8D-7448-3C6E0FB1DAAA}"/>
+              </a:ext>
+            </a:extLst>
+          </p:cNvPr>
+          <p:cNvPicPr>
+            <a:picLocks noChangeAspect="1"/>
+          </p:cNvPicPr>
+          <p:nvPr/>
+        </p:nvPicPr>
+        <p:blipFill>
+          <a:blip r:embed="rId2"/>
+          <a:stretch>
+            <a:fillRect/>
+          </a:stretch>
+        </p:blipFill>
+        <p:spPr>
+          <a:xfrm>
+            <a:off x="704521" y="899894"/>
+            <a:ext cx="4706007" cy="3134162"/>
+          </a:xfrm>
+          <a:prstGeom prst="rect">
+            <a:avLst/>
+          </a:prstGeom>
+        </p:spPr>
+      </p:pic>
+      <p:cxnSp>
+        <p:nvCxnSpPr>
+          <p:cNvPr id="5" name="직선 화살표 연결선 4">
+            <a:extLst>
+              <a:ext uri="{FF2B5EF4-FFF2-40B4-BE49-F238E27FC236}">
+                <a16:creationId xmlns:a16="http://schemas.microsoft.com/office/drawing/2014/main" id="{C7C74DA4-4C2E-D550-8BCD-3E633EF2F95E}"/>
+              </a:ext>
+            </a:extLst>
+          </p:cNvPr>
+          <p:cNvCxnSpPr>
+            <a:cxnSpLocks/>
+          </p:cNvCxnSpPr>
+          <p:nvPr/>
+        </p:nvCxnSpPr>
+        <p:spPr>
+          <a:xfrm flipH="1">
+            <a:off x="1581150" y="1060450"/>
+            <a:ext cx="2806700" cy="0"/>
+          </a:xfrm>
+          <a:prstGeom prst="straightConnector1">
+            <a:avLst/>
+          </a:prstGeom>
+          <a:ln>
+            <a:tailEnd type="triangle"/>
+          </a:ln>
+        </p:spPr>
+        <p:style>
+          <a:lnRef idx="2">
+            <a:schemeClr val="accent1"/>
+          </a:lnRef>
+          <a:fillRef idx="0">
+            <a:schemeClr val="accent1"/>
+          </a:fillRef>
+          <a:effectRef idx="1">
+            <a:schemeClr val="accent1"/>
+          </a:effectRef>
+          <a:fontRef idx="minor">
+            <a:schemeClr val="tx1"/>
+          </a:fontRef>
+        </p:style>
+      </p:cxnSp>
+    </p:spTree>
+    <p:extLst>
+      <p:ext uri="{BB962C8B-B14F-4D97-AF65-F5344CB8AC3E}">
+        <p14:creationId xmlns:p14="http://schemas.microsoft.com/office/powerpoint/2010/main" val="1878356720"/>
+      </p:ext>
+    </p:extLst>
+  </p:cSld>
+  <p:clrMapOvr>
+    <a:masterClrMapping/>
+  </p:clrMapOvr>
+</p:sld>
+</file>
+
+<file path=ppt/slides/slide19.xml><?xml version="1.0" encoding="utf-8"?>
+<p:sld xmlns:a="http://schemas.openxmlformats.org/drawingml/2006/main" xmlns:r="http://schemas.openxmlformats.org/officeDocument/2006/relationships" xmlns:p="http://schemas.openxmlformats.org/presentationml/2006/main">
+  <p:cSld>
+    <p:spTree>
+      <p:nvGrpSpPr>
+        <p:cNvPr id="1" name=""/>
+        <p:cNvGrpSpPr/>
+        <p:nvPr/>
+      </p:nvGrpSpPr>
+      <p:grpSpPr>
+        <a:xfrm>
+          <a:off x="0" y="0"/>
+          <a:ext cx="0" cy="0"/>
+          <a:chOff x="0" y="0"/>
+          <a:chExt cx="0" cy="0"/>
+        </a:xfrm>
+      </p:grpSpPr>
+      <p:sp>
+        <p:nvSpPr>
+          <p:cNvPr id="2" name="직사각형 1">
+            <a:extLst>
+              <a:ext uri="{FF2B5EF4-FFF2-40B4-BE49-F238E27FC236}">
+                <a16:creationId xmlns:a16="http://schemas.microsoft.com/office/drawing/2014/main" id="{6827C688-FD14-8D1D-6D1F-858ED926560B}"/>
+              </a:ext>
+            </a:extLst>
+          </p:cNvPr>
+          <p:cNvSpPr/>
+          <p:nvPr/>
+        </p:nvSpPr>
+        <p:spPr>
+          <a:xfrm>
+            <a:off x="6515100" y="4025900"/>
+            <a:ext cx="2254250" cy="2165350"/>
+          </a:xfrm>
+          <a:prstGeom prst="rect">
+            <a:avLst/>
+          </a:prstGeom>
+          <a:noFill/>
+          <a:ln>
+            <a:solidFill>
+              <a:schemeClr val="tx1"/>
+            </a:solidFill>
+          </a:ln>
+        </p:spPr>
+        <p:style>
+          <a:lnRef idx="2">
+            <a:schemeClr val="accent1">
+              <a:shade val="15000"/>
+            </a:schemeClr>
+          </a:lnRef>
+          <a:fillRef idx="1">
+            <a:schemeClr val="accent1"/>
+          </a:fillRef>
+          <a:effectRef idx="0">
+            <a:schemeClr val="accent1"/>
+          </a:effectRef>
+          <a:fontRef idx="minor">
+            <a:schemeClr val="lt1"/>
+          </a:fontRef>
+        </p:style>
+        <p:txBody>
+          <a:bodyPr rtlCol="0" anchor="ctr"/>
+          <a:lstStyle/>
+          <a:p>
+            <a:pPr algn="ctr"/>
+            <a:endParaRPr lang="ko-KR" altLang="en-US"/>
+          </a:p>
+        </p:txBody>
+      </p:sp>
+      <p:sp>
+        <p:nvSpPr>
+          <p:cNvPr id="3" name="타원 2">
+            <a:extLst>
+              <a:ext uri="{FF2B5EF4-FFF2-40B4-BE49-F238E27FC236}">
+                <a16:creationId xmlns:a16="http://schemas.microsoft.com/office/drawing/2014/main" id="{9C57248D-04E3-F538-F7C6-3C39DC9A0209}"/>
+              </a:ext>
+            </a:extLst>
+          </p:cNvPr>
+          <p:cNvSpPr/>
+          <p:nvPr/>
+        </p:nvSpPr>
+        <p:spPr>
+          <a:xfrm>
+            <a:off x="7277100" y="4752975"/>
+            <a:ext cx="730250" cy="711200"/>
+          </a:xfrm>
+          <a:prstGeom prst="ellipse">
+            <a:avLst/>
+          </a:prstGeom>
+          <a:solidFill>
+            <a:schemeClr val="tx1"/>
+          </a:solidFill>
+          <a:ln>
+            <a:solidFill>
+              <a:schemeClr val="tx1"/>
+            </a:solidFill>
+          </a:ln>
+        </p:spPr>
+        <p:style>
+          <a:lnRef idx="2">
+            <a:schemeClr val="accent1">
+              <a:shade val="15000"/>
+            </a:schemeClr>
+          </a:lnRef>
+          <a:fillRef idx="1">
+            <a:schemeClr val="accent1"/>
+          </a:fillRef>
+          <a:effectRef idx="0">
+            <a:schemeClr val="accent1"/>
+          </a:effectRef>
+          <a:fontRef idx="minor">
+            <a:schemeClr val="lt1"/>
+          </a:fontRef>
+        </p:style>
+        <p:txBody>
+          <a:bodyPr rtlCol="0" anchor="ctr"/>
+          <a:lstStyle/>
+          <a:p>
+            <a:pPr algn="ctr"/>
+            <a:endParaRPr lang="ko-KR" altLang="en-US"/>
+          </a:p>
+        </p:txBody>
+      </p:sp>
+      <p:cxnSp>
+        <p:nvCxnSpPr>
+          <p:cNvPr id="6" name="직선 화살표 연결선 5">
+            <a:extLst>
+              <a:ext uri="{FF2B5EF4-FFF2-40B4-BE49-F238E27FC236}">
+                <a16:creationId xmlns:a16="http://schemas.microsoft.com/office/drawing/2014/main" id="{1326901E-5FBE-1868-3DEE-D8C7F917888F}"/>
+              </a:ext>
+            </a:extLst>
+          </p:cNvPr>
+          <p:cNvCxnSpPr/>
+          <p:nvPr/>
+        </p:nvCxnSpPr>
+        <p:spPr>
+          <a:xfrm>
+            <a:off x="6515100" y="2184915"/>
+            <a:ext cx="2254250" cy="0"/>
+          </a:xfrm>
+          <a:prstGeom prst="straightConnector1">
+            <a:avLst/>
+          </a:prstGeom>
+          <a:ln>
+            <a:headEnd type="triangle"/>
+            <a:tailEnd type="triangle"/>
+          </a:ln>
+        </p:spPr>
+        <p:style>
+          <a:lnRef idx="2">
+            <a:schemeClr val="accent1"/>
+          </a:lnRef>
+          <a:fillRef idx="0">
+            <a:schemeClr val="accent1"/>
+          </a:fillRef>
+          <a:effectRef idx="1">
+            <a:schemeClr val="accent1"/>
+          </a:effectRef>
+          <a:fontRef idx="minor">
+            <a:schemeClr val="tx1"/>
+          </a:fontRef>
+        </p:style>
+      </p:cxnSp>
+      <p:cxnSp>
+        <p:nvCxnSpPr>
+          <p:cNvPr id="7" name="직선 화살표 연결선 6">
+            <a:extLst>
+              <a:ext uri="{FF2B5EF4-FFF2-40B4-BE49-F238E27FC236}">
+                <a16:creationId xmlns:a16="http://schemas.microsoft.com/office/drawing/2014/main" id="{7E327F1E-2041-CC52-8A28-CB5DCE5BC9B5}"/>
+              </a:ext>
+            </a:extLst>
+          </p:cNvPr>
+          <p:cNvCxnSpPr>
+            <a:cxnSpLocks/>
+          </p:cNvCxnSpPr>
+          <p:nvPr/>
+        </p:nvCxnSpPr>
+        <p:spPr>
+          <a:xfrm>
+            <a:off x="4238625" y="4098925"/>
+            <a:ext cx="0" cy="2165350"/>
+          </a:xfrm>
+          <a:prstGeom prst="straightConnector1">
+            <a:avLst/>
+          </a:prstGeom>
+          <a:ln>
+            <a:headEnd type="triangle"/>
+            <a:tailEnd type="triangle"/>
+          </a:ln>
+        </p:spPr>
+        <p:style>
+          <a:lnRef idx="2">
+            <a:schemeClr val="accent1"/>
+          </a:lnRef>
+          <a:fillRef idx="0">
+            <a:schemeClr val="accent1"/>
+          </a:fillRef>
+          <a:effectRef idx="1">
+            <a:schemeClr val="accent1"/>
+          </a:effectRef>
+          <a:fontRef idx="minor">
+            <a:schemeClr val="tx1"/>
+          </a:fontRef>
+        </p:style>
+      </p:cxnSp>
+      <p:sp>
+        <p:nvSpPr>
+          <p:cNvPr id="10" name="TextBox 9">
+            <a:extLst>
+              <a:ext uri="{FF2B5EF4-FFF2-40B4-BE49-F238E27FC236}">
+                <a16:creationId xmlns:a16="http://schemas.microsoft.com/office/drawing/2014/main" id="{8B7A4E64-7743-4616-7C7C-EA5489A16A9F}"/>
+              </a:ext>
+            </a:extLst>
+          </p:cNvPr>
+          <p:cNvSpPr txBox="1"/>
+          <p:nvPr/>
+        </p:nvSpPr>
+        <p:spPr>
+          <a:xfrm>
+            <a:off x="7454900" y="1752600"/>
+            <a:ext cx="552450" cy="369332"/>
+          </a:xfrm>
+          <a:prstGeom prst="rect">
+            <a:avLst/>
+          </a:prstGeom>
+          <a:noFill/>
+        </p:spPr>
+        <p:txBody>
+          <a:bodyPr wrap="square" rtlCol="0">
+            <a:spAutoFit/>
+          </a:bodyPr>
+          <a:lstStyle/>
+          <a:p>
+            <a:r>
+              <a:rPr lang="en-US" altLang="ko-KR"/>
+              <a:t>4</a:t>
+            </a:r>
+            <a:endParaRPr lang="ko-KR" altLang="en-US"/>
+          </a:p>
+        </p:txBody>
+      </p:sp>
+      <p:sp>
+        <p:nvSpPr>
+          <p:cNvPr id="12" name="TextBox 11">
+            <a:extLst>
+              <a:ext uri="{FF2B5EF4-FFF2-40B4-BE49-F238E27FC236}">
+                <a16:creationId xmlns:a16="http://schemas.microsoft.com/office/drawing/2014/main" id="{6DA78A63-764F-1F80-D73C-4015F3BD1F0D}"/>
+              </a:ext>
+            </a:extLst>
+          </p:cNvPr>
+          <p:cNvSpPr txBox="1"/>
+          <p:nvPr/>
+        </p:nvSpPr>
+        <p:spPr>
+          <a:xfrm>
+            <a:off x="3714750" y="4885293"/>
+            <a:ext cx="552450" cy="369332"/>
+          </a:xfrm>
+          <a:prstGeom prst="rect">
+            <a:avLst/>
+          </a:prstGeom>
+          <a:noFill/>
+        </p:spPr>
+        <p:txBody>
+          <a:bodyPr wrap="square" rtlCol="0">
+            <a:spAutoFit/>
+          </a:bodyPr>
+          <a:lstStyle/>
+          <a:p>
+            <a:r>
+              <a:rPr lang="en-US" altLang="ko-KR"/>
+              <a:t>4</a:t>
+            </a:r>
+            <a:endParaRPr lang="ko-KR" altLang="en-US"/>
+          </a:p>
+        </p:txBody>
+      </p:sp>
+      <p:sp>
+        <p:nvSpPr>
+          <p:cNvPr id="13" name="직사각형 12">
+            <a:extLst>
+              <a:ext uri="{FF2B5EF4-FFF2-40B4-BE49-F238E27FC236}">
+                <a16:creationId xmlns:a16="http://schemas.microsoft.com/office/drawing/2014/main" id="{89E1D33E-28EC-34B3-6EAD-1777E8885D6B}"/>
+              </a:ext>
+            </a:extLst>
+          </p:cNvPr>
+          <p:cNvSpPr/>
+          <p:nvPr/>
+        </p:nvSpPr>
+        <p:spPr>
+          <a:xfrm>
+            <a:off x="3638551" y="1457325"/>
+            <a:ext cx="2876549" cy="2568575"/>
+          </a:xfrm>
+          <a:prstGeom prst="rect">
+            <a:avLst/>
+          </a:prstGeom>
+          <a:solidFill>
+            <a:srgbClr val="FF0000"/>
+          </a:solidFill>
+          <a:ln>
+            <a:noFill/>
+          </a:ln>
+        </p:spPr>
+        <p:style>
+          <a:lnRef idx="2">
+            <a:schemeClr val="accent1">
+              <a:shade val="15000"/>
+            </a:schemeClr>
+          </a:lnRef>
+          <a:fillRef idx="1">
+            <a:schemeClr val="accent1"/>
+          </a:fillRef>
+          <a:effectRef idx="0">
+            <a:schemeClr val="accent1"/>
+          </a:effectRef>
+          <a:fontRef idx="minor">
+            <a:schemeClr val="lt1"/>
+          </a:fontRef>
+        </p:style>
+        <p:txBody>
+          <a:bodyPr rtlCol="0" anchor="ctr"/>
+          <a:lstStyle/>
+          <a:p>
+            <a:pPr algn="ctr"/>
+            <a:r>
+              <a:rPr lang="ko-KR" altLang="en-US"/>
+              <a:t>텍스트 박스 위치</a:t>
+            </a:r>
+          </a:p>
+        </p:txBody>
+      </p:sp>
+    </p:spTree>
+    <p:extLst>
+      <p:ext uri="{BB962C8B-B14F-4D97-AF65-F5344CB8AC3E}">
+        <p14:creationId xmlns:p14="http://schemas.microsoft.com/office/powerpoint/2010/main" val="495332141"/>
+      </p:ext>
+    </p:extLst>
+  </p:cSld>
+  <p:clrMapOvr>
+    <a:masterClrMapping/>
+  </p:clrMapOvr>
+</p:sld>
+</file>
+
 <file path=ppt/slides/slide2.xml><?xml version="1.0" encoding="utf-8"?>
 <p:sld xmlns:a="http://schemas.openxmlformats.org/drawingml/2006/main" xmlns:r="http://schemas.openxmlformats.org/officeDocument/2006/relationships" xmlns:p="http://schemas.openxmlformats.org/presentationml/2006/main">
   <p:cSld>
@@ -9869,6 +11266,5359 @@
 </p:sld>
 </file>
 
+<file path=ppt/slides/slide20.xml><?xml version="1.0" encoding="utf-8"?>
+<p:sld xmlns:a="http://schemas.openxmlformats.org/drawingml/2006/main" xmlns:r="http://schemas.openxmlformats.org/officeDocument/2006/relationships" xmlns:p="http://schemas.openxmlformats.org/presentationml/2006/main">
+  <p:cSld>
+    <p:spTree>
+      <p:nvGrpSpPr>
+        <p:cNvPr id="1" name=""/>
+        <p:cNvGrpSpPr/>
+        <p:nvPr/>
+      </p:nvGrpSpPr>
+      <p:grpSpPr>
+        <a:xfrm>
+          <a:off x="0" y="0"/>
+          <a:ext cx="0" cy="0"/>
+          <a:chOff x="0" y="0"/>
+          <a:chExt cx="0" cy="0"/>
+        </a:xfrm>
+      </p:grpSpPr>
+      <p:pic>
+        <p:nvPicPr>
+          <p:cNvPr id="3" name="그림 2">
+            <a:extLst>
+              <a:ext uri="{FF2B5EF4-FFF2-40B4-BE49-F238E27FC236}">
+                <a16:creationId xmlns:a16="http://schemas.microsoft.com/office/drawing/2014/main" id="{A3484180-163C-6CB1-1C68-239AA6F3633D}"/>
+              </a:ext>
+            </a:extLst>
+          </p:cNvPr>
+          <p:cNvPicPr>
+            <a:picLocks noChangeAspect="1"/>
+          </p:cNvPicPr>
+          <p:nvPr/>
+        </p:nvPicPr>
+        <p:blipFill>
+          <a:blip r:embed="rId2"/>
+          <a:stretch>
+            <a:fillRect/>
+          </a:stretch>
+        </p:blipFill>
+        <p:spPr>
+          <a:xfrm>
+            <a:off x="1961573" y="966444"/>
+            <a:ext cx="8268854" cy="4925112"/>
+          </a:xfrm>
+          <a:prstGeom prst="rect">
+            <a:avLst/>
+          </a:prstGeom>
+        </p:spPr>
+      </p:pic>
+      <p:sp>
+        <p:nvSpPr>
+          <p:cNvPr id="4" name="직사각형 3">
+            <a:extLst>
+              <a:ext uri="{FF2B5EF4-FFF2-40B4-BE49-F238E27FC236}">
+                <a16:creationId xmlns:a16="http://schemas.microsoft.com/office/drawing/2014/main" id="{BB5EBDC9-A12B-0518-4BB5-F3624F735A3A}"/>
+              </a:ext>
+            </a:extLst>
+          </p:cNvPr>
+          <p:cNvSpPr/>
+          <p:nvPr/>
+        </p:nvSpPr>
+        <p:spPr>
+          <a:xfrm>
+            <a:off x="2609850" y="2305049"/>
+            <a:ext cx="476250" cy="409575"/>
+          </a:xfrm>
+          <a:prstGeom prst="rect">
+            <a:avLst/>
+          </a:prstGeom>
+          <a:solidFill>
+            <a:srgbClr val="FF0000"/>
+          </a:solidFill>
+          <a:ln>
+            <a:noFill/>
+          </a:ln>
+        </p:spPr>
+        <p:style>
+          <a:lnRef idx="2">
+            <a:schemeClr val="accent1">
+              <a:shade val="15000"/>
+            </a:schemeClr>
+          </a:lnRef>
+          <a:fillRef idx="1">
+            <a:schemeClr val="accent1"/>
+          </a:fillRef>
+          <a:effectRef idx="0">
+            <a:schemeClr val="accent1"/>
+          </a:effectRef>
+          <a:fontRef idx="minor">
+            <a:schemeClr val="lt1"/>
+          </a:fontRef>
+        </p:style>
+        <p:txBody>
+          <a:bodyPr rtlCol="0" anchor="ctr"/>
+          <a:lstStyle/>
+          <a:p>
+            <a:pPr algn="ctr"/>
+            <a:endParaRPr lang="ko-KR" altLang="en-US"/>
+          </a:p>
+        </p:txBody>
+      </p:sp>
+      <p:sp>
+        <p:nvSpPr>
+          <p:cNvPr id="6" name="직사각형 5">
+            <a:extLst>
+              <a:ext uri="{FF2B5EF4-FFF2-40B4-BE49-F238E27FC236}">
+                <a16:creationId xmlns:a16="http://schemas.microsoft.com/office/drawing/2014/main" id="{FB46DB5F-3FB5-7ADC-21F4-C4783E1A96BA}"/>
+              </a:ext>
+            </a:extLst>
+          </p:cNvPr>
+          <p:cNvSpPr/>
+          <p:nvPr/>
+        </p:nvSpPr>
+        <p:spPr>
+          <a:xfrm>
+            <a:off x="5353050" y="2305048"/>
+            <a:ext cx="476250" cy="409575"/>
+          </a:xfrm>
+          <a:prstGeom prst="rect">
+            <a:avLst/>
+          </a:prstGeom>
+          <a:solidFill>
+            <a:srgbClr val="FF0000"/>
+          </a:solidFill>
+          <a:ln>
+            <a:noFill/>
+          </a:ln>
+        </p:spPr>
+        <p:style>
+          <a:lnRef idx="2">
+            <a:schemeClr val="accent1">
+              <a:shade val="15000"/>
+            </a:schemeClr>
+          </a:lnRef>
+          <a:fillRef idx="1">
+            <a:schemeClr val="accent1"/>
+          </a:fillRef>
+          <a:effectRef idx="0">
+            <a:schemeClr val="accent1"/>
+          </a:effectRef>
+          <a:fontRef idx="minor">
+            <a:schemeClr val="lt1"/>
+          </a:fontRef>
+        </p:style>
+        <p:txBody>
+          <a:bodyPr rtlCol="0" anchor="ctr"/>
+          <a:lstStyle/>
+          <a:p>
+            <a:pPr algn="ctr"/>
+            <a:endParaRPr lang="ko-KR" altLang="en-US"/>
+          </a:p>
+        </p:txBody>
+      </p:sp>
+      <p:sp>
+        <p:nvSpPr>
+          <p:cNvPr id="8" name="직사각형 7">
+            <a:extLst>
+              <a:ext uri="{FF2B5EF4-FFF2-40B4-BE49-F238E27FC236}">
+                <a16:creationId xmlns:a16="http://schemas.microsoft.com/office/drawing/2014/main" id="{F74D3F46-6D0E-C49F-B7E8-FC2749712AEB}"/>
+              </a:ext>
+            </a:extLst>
+          </p:cNvPr>
+          <p:cNvSpPr/>
+          <p:nvPr/>
+        </p:nvSpPr>
+        <p:spPr>
+          <a:xfrm>
+            <a:off x="5924550" y="4057649"/>
+            <a:ext cx="476250" cy="409575"/>
+          </a:xfrm>
+          <a:prstGeom prst="rect">
+            <a:avLst/>
+          </a:prstGeom>
+          <a:solidFill>
+            <a:srgbClr val="FF0000"/>
+          </a:solidFill>
+          <a:ln>
+            <a:noFill/>
+          </a:ln>
+        </p:spPr>
+        <p:style>
+          <a:lnRef idx="2">
+            <a:schemeClr val="accent1">
+              <a:shade val="15000"/>
+            </a:schemeClr>
+          </a:lnRef>
+          <a:fillRef idx="1">
+            <a:schemeClr val="accent1"/>
+          </a:fillRef>
+          <a:effectRef idx="0">
+            <a:schemeClr val="accent1"/>
+          </a:effectRef>
+          <a:fontRef idx="minor">
+            <a:schemeClr val="lt1"/>
+          </a:fontRef>
+        </p:style>
+        <p:txBody>
+          <a:bodyPr rtlCol="0" anchor="ctr"/>
+          <a:lstStyle/>
+          <a:p>
+            <a:pPr algn="ctr"/>
+            <a:endParaRPr lang="ko-KR" altLang="en-US"/>
+          </a:p>
+        </p:txBody>
+      </p:sp>
+      <p:sp>
+        <p:nvSpPr>
+          <p:cNvPr id="10" name="직사각형 9">
+            <a:extLst>
+              <a:ext uri="{FF2B5EF4-FFF2-40B4-BE49-F238E27FC236}">
+                <a16:creationId xmlns:a16="http://schemas.microsoft.com/office/drawing/2014/main" id="{2AEA7E25-2843-F196-4C38-1339F0733EAD}"/>
+              </a:ext>
+            </a:extLst>
+          </p:cNvPr>
+          <p:cNvSpPr/>
+          <p:nvPr/>
+        </p:nvSpPr>
+        <p:spPr>
+          <a:xfrm>
+            <a:off x="8210550" y="3714749"/>
+            <a:ext cx="476250" cy="409575"/>
+          </a:xfrm>
+          <a:prstGeom prst="rect">
+            <a:avLst/>
+          </a:prstGeom>
+          <a:solidFill>
+            <a:srgbClr val="FF0000"/>
+          </a:solidFill>
+          <a:ln>
+            <a:noFill/>
+          </a:ln>
+        </p:spPr>
+        <p:style>
+          <a:lnRef idx="2">
+            <a:schemeClr val="accent1">
+              <a:shade val="15000"/>
+            </a:schemeClr>
+          </a:lnRef>
+          <a:fillRef idx="1">
+            <a:schemeClr val="accent1"/>
+          </a:fillRef>
+          <a:effectRef idx="0">
+            <a:schemeClr val="accent1"/>
+          </a:effectRef>
+          <a:fontRef idx="minor">
+            <a:schemeClr val="lt1"/>
+          </a:fontRef>
+        </p:style>
+        <p:txBody>
+          <a:bodyPr rtlCol="0" anchor="ctr"/>
+          <a:lstStyle/>
+          <a:p>
+            <a:pPr algn="ctr"/>
+            <a:endParaRPr lang="ko-KR" altLang="en-US"/>
+          </a:p>
+        </p:txBody>
+      </p:sp>
+    </p:spTree>
+    <p:extLst>
+      <p:ext uri="{BB962C8B-B14F-4D97-AF65-F5344CB8AC3E}">
+        <p14:creationId xmlns:p14="http://schemas.microsoft.com/office/powerpoint/2010/main" val="4108450692"/>
+      </p:ext>
+    </p:extLst>
+  </p:cSld>
+  <p:clrMapOvr>
+    <a:masterClrMapping/>
+  </p:clrMapOvr>
+</p:sld>
+</file>
+
+<file path=ppt/slides/slide21.xml><?xml version="1.0" encoding="utf-8"?>
+<p:sld xmlns:a="http://schemas.openxmlformats.org/drawingml/2006/main" xmlns:r="http://schemas.openxmlformats.org/officeDocument/2006/relationships" xmlns:p="http://schemas.openxmlformats.org/presentationml/2006/main">
+  <p:cSld>
+    <p:spTree>
+      <p:nvGrpSpPr>
+        <p:cNvPr id="1" name=""/>
+        <p:cNvGrpSpPr/>
+        <p:nvPr/>
+      </p:nvGrpSpPr>
+      <p:grpSpPr>
+        <a:xfrm>
+          <a:off x="0" y="0"/>
+          <a:ext cx="0" cy="0"/>
+          <a:chOff x="0" y="0"/>
+          <a:chExt cx="0" cy="0"/>
+        </a:xfrm>
+      </p:grpSpPr>
+      <p:pic>
+        <p:nvPicPr>
+          <p:cNvPr id="3" name="그림 2">
+            <a:extLst>
+              <a:ext uri="{FF2B5EF4-FFF2-40B4-BE49-F238E27FC236}">
+                <a16:creationId xmlns:a16="http://schemas.microsoft.com/office/drawing/2014/main" id="{92503844-31E7-D433-C565-70992C3A539C}"/>
+              </a:ext>
+            </a:extLst>
+          </p:cNvPr>
+          <p:cNvPicPr>
+            <a:picLocks noChangeAspect="1"/>
+          </p:cNvPicPr>
+          <p:nvPr/>
+        </p:nvPicPr>
+        <p:blipFill>
+          <a:blip r:embed="rId2"/>
+          <a:stretch>
+            <a:fillRect/>
+          </a:stretch>
+        </p:blipFill>
+        <p:spPr>
+          <a:xfrm>
+            <a:off x="3323838" y="2142945"/>
+            <a:ext cx="5544324" cy="2572109"/>
+          </a:xfrm>
+          <a:prstGeom prst="rect">
+            <a:avLst/>
+          </a:prstGeom>
+        </p:spPr>
+      </p:pic>
+      <p:cxnSp>
+        <p:nvCxnSpPr>
+          <p:cNvPr id="5" name="직선 연결선 4">
+            <a:extLst>
+              <a:ext uri="{FF2B5EF4-FFF2-40B4-BE49-F238E27FC236}">
+                <a16:creationId xmlns:a16="http://schemas.microsoft.com/office/drawing/2014/main" id="{11645A57-4AE8-6016-8A4C-633893E091FE}"/>
+              </a:ext>
+            </a:extLst>
+          </p:cNvPr>
+          <p:cNvCxnSpPr>
+            <a:cxnSpLocks/>
+          </p:cNvCxnSpPr>
+          <p:nvPr/>
+        </p:nvCxnSpPr>
+        <p:spPr>
+          <a:xfrm>
+            <a:off x="3842426" y="2714017"/>
+            <a:ext cx="1243924" cy="603858"/>
+          </a:xfrm>
+          <a:prstGeom prst="line">
+            <a:avLst/>
+          </a:prstGeom>
+          <a:ln>
+            <a:solidFill>
+              <a:srgbClr val="FF0000"/>
+            </a:solidFill>
+          </a:ln>
+        </p:spPr>
+        <p:style>
+          <a:lnRef idx="2">
+            <a:schemeClr val="accent1"/>
+          </a:lnRef>
+          <a:fillRef idx="0">
+            <a:schemeClr val="accent1"/>
+          </a:fillRef>
+          <a:effectRef idx="1">
+            <a:schemeClr val="accent1"/>
+          </a:effectRef>
+          <a:fontRef idx="minor">
+            <a:schemeClr val="tx1"/>
+          </a:fontRef>
+        </p:style>
+      </p:cxnSp>
+      <p:cxnSp>
+        <p:nvCxnSpPr>
+          <p:cNvPr id="6" name="직선 연결선 5">
+            <a:extLst>
+              <a:ext uri="{FF2B5EF4-FFF2-40B4-BE49-F238E27FC236}">
+                <a16:creationId xmlns:a16="http://schemas.microsoft.com/office/drawing/2014/main" id="{04E22D61-891F-186A-0401-40E1ADA6D14C}"/>
+              </a:ext>
+            </a:extLst>
+          </p:cNvPr>
+          <p:cNvCxnSpPr>
+            <a:cxnSpLocks/>
+          </p:cNvCxnSpPr>
+          <p:nvPr/>
+        </p:nvCxnSpPr>
+        <p:spPr>
+          <a:xfrm flipV="1">
+            <a:off x="5086350" y="2714017"/>
+            <a:ext cx="2625725" cy="603858"/>
+          </a:xfrm>
+          <a:prstGeom prst="line">
+            <a:avLst/>
+          </a:prstGeom>
+          <a:ln>
+            <a:solidFill>
+              <a:srgbClr val="FF0000"/>
+            </a:solidFill>
+          </a:ln>
+        </p:spPr>
+        <p:style>
+          <a:lnRef idx="2">
+            <a:schemeClr val="accent1"/>
+          </a:lnRef>
+          <a:fillRef idx="0">
+            <a:schemeClr val="accent1"/>
+          </a:fillRef>
+          <a:effectRef idx="1">
+            <a:schemeClr val="accent1"/>
+          </a:effectRef>
+          <a:fontRef idx="minor">
+            <a:schemeClr val="tx1"/>
+          </a:fontRef>
+        </p:style>
+      </p:cxnSp>
+      <p:cxnSp>
+        <p:nvCxnSpPr>
+          <p:cNvPr id="10" name="직선 연결선 9">
+            <a:extLst>
+              <a:ext uri="{FF2B5EF4-FFF2-40B4-BE49-F238E27FC236}">
+                <a16:creationId xmlns:a16="http://schemas.microsoft.com/office/drawing/2014/main" id="{B4BA1E34-7D80-143F-065E-4E9E89D05716}"/>
+              </a:ext>
+            </a:extLst>
+          </p:cNvPr>
+          <p:cNvCxnSpPr>
+            <a:cxnSpLocks/>
+          </p:cNvCxnSpPr>
+          <p:nvPr/>
+        </p:nvCxnSpPr>
+        <p:spPr>
+          <a:xfrm>
+            <a:off x="5086350" y="3317875"/>
+            <a:ext cx="739775" cy="368300"/>
+          </a:xfrm>
+          <a:prstGeom prst="line">
+            <a:avLst/>
+          </a:prstGeom>
+          <a:ln>
+            <a:solidFill>
+              <a:srgbClr val="FF0000"/>
+            </a:solidFill>
+          </a:ln>
+        </p:spPr>
+        <p:style>
+          <a:lnRef idx="2">
+            <a:schemeClr val="accent1"/>
+          </a:lnRef>
+          <a:fillRef idx="0">
+            <a:schemeClr val="accent1"/>
+          </a:fillRef>
+          <a:effectRef idx="1">
+            <a:schemeClr val="accent1"/>
+          </a:effectRef>
+          <a:fontRef idx="minor">
+            <a:schemeClr val="tx1"/>
+          </a:fontRef>
+        </p:style>
+      </p:cxnSp>
+    </p:spTree>
+    <p:extLst>
+      <p:ext uri="{BB962C8B-B14F-4D97-AF65-F5344CB8AC3E}">
+        <p14:creationId xmlns:p14="http://schemas.microsoft.com/office/powerpoint/2010/main" val="3580179003"/>
+      </p:ext>
+    </p:extLst>
+  </p:cSld>
+  <p:clrMapOvr>
+    <a:masterClrMapping/>
+  </p:clrMapOvr>
+</p:sld>
+</file>
+
+<file path=ppt/slides/slide22.xml><?xml version="1.0" encoding="utf-8"?>
+<p:sld xmlns:a="http://schemas.openxmlformats.org/drawingml/2006/main" xmlns:r="http://schemas.openxmlformats.org/officeDocument/2006/relationships" xmlns:p="http://schemas.openxmlformats.org/presentationml/2006/main">
+  <p:cSld>
+    <p:spTree>
+      <p:nvGrpSpPr>
+        <p:cNvPr id="1" name=""/>
+        <p:cNvGrpSpPr/>
+        <p:nvPr/>
+      </p:nvGrpSpPr>
+      <p:grpSpPr>
+        <a:xfrm>
+          <a:off x="0" y="0"/>
+          <a:ext cx="0" cy="0"/>
+          <a:chOff x="0" y="0"/>
+          <a:chExt cx="0" cy="0"/>
+        </a:xfrm>
+      </p:grpSpPr>
+    </p:spTree>
+    <p:extLst>
+      <p:ext uri="{BB962C8B-B14F-4D97-AF65-F5344CB8AC3E}">
+        <p14:creationId xmlns:p14="http://schemas.microsoft.com/office/powerpoint/2010/main" val="189994632"/>
+      </p:ext>
+    </p:extLst>
+  </p:cSld>
+  <p:clrMapOvr>
+    <a:masterClrMapping/>
+  </p:clrMapOvr>
+</p:sld>
+</file>
+
+<file path=ppt/slides/slide23.xml><?xml version="1.0" encoding="utf-8"?>
+<p:sld xmlns:a="http://schemas.openxmlformats.org/drawingml/2006/main" xmlns:r="http://schemas.openxmlformats.org/officeDocument/2006/relationships" xmlns:p="http://schemas.openxmlformats.org/presentationml/2006/main">
+  <p:cSld>
+    <p:spTree>
+      <p:nvGrpSpPr>
+        <p:cNvPr id="1" name=""/>
+        <p:cNvGrpSpPr/>
+        <p:nvPr/>
+      </p:nvGrpSpPr>
+      <p:grpSpPr>
+        <a:xfrm>
+          <a:off x="0" y="0"/>
+          <a:ext cx="0" cy="0"/>
+          <a:chOff x="0" y="0"/>
+          <a:chExt cx="0" cy="0"/>
+        </a:xfrm>
+      </p:grpSpPr>
+      <p:pic>
+        <p:nvPicPr>
+          <p:cNvPr id="2" name="그림 1" descr="사용자 첨부 파일">
+            <a:extLst>
+              <a:ext uri="{FF2B5EF4-FFF2-40B4-BE49-F238E27FC236}">
+                <a16:creationId xmlns:a16="http://schemas.microsoft.com/office/drawing/2014/main" id="{B8BDC3B5-5791-05D5-330D-BF4731C7B4DB}"/>
+              </a:ext>
+            </a:extLst>
+          </p:cNvPr>
+          <p:cNvPicPr>
+            <a:picLocks noChangeAspect="1"/>
+          </p:cNvPicPr>
+          <p:nvPr/>
+        </p:nvPicPr>
+        <p:blipFill>
+          <a:blip r:embed="rId2"/>
+          <a:stretch>
+            <a:fillRect/>
+          </a:stretch>
+        </p:blipFill>
+        <p:spPr>
+          <a:xfrm>
+            <a:off x="3066627" y="1523734"/>
+            <a:ext cx="6058746" cy="3810532"/>
+          </a:xfrm>
+          <a:prstGeom prst="rect">
+            <a:avLst/>
+          </a:prstGeom>
+        </p:spPr>
+      </p:pic>
+    </p:spTree>
+    <p:extLst>
+      <p:ext uri="{BB962C8B-B14F-4D97-AF65-F5344CB8AC3E}">
+        <p14:creationId xmlns:p14="http://schemas.microsoft.com/office/powerpoint/2010/main" val="1003784681"/>
+      </p:ext>
+    </p:extLst>
+  </p:cSld>
+  <p:clrMapOvr>
+    <a:masterClrMapping/>
+  </p:clrMapOvr>
+</p:sld>
+</file>
+
+<file path=ppt/slides/slide24.xml><?xml version="1.0" encoding="utf-8"?>
+<p:sld xmlns:a="http://schemas.openxmlformats.org/drawingml/2006/main" xmlns:r="http://schemas.openxmlformats.org/officeDocument/2006/relationships" xmlns:p="http://schemas.openxmlformats.org/presentationml/2006/main">
+  <p:cSld>
+    <p:spTree>
+      <p:nvGrpSpPr>
+        <p:cNvPr id="1" name="">
+          <a:extLst>
+            <a:ext uri="{FF2B5EF4-FFF2-40B4-BE49-F238E27FC236}">
+              <a16:creationId xmlns:a16="http://schemas.microsoft.com/office/drawing/2014/main" id="{F1E86B48-9D3E-DECD-BCA9-E7BE0D16E808}"/>
+            </a:ext>
+          </a:extLst>
+        </p:cNvPr>
+        <p:cNvGrpSpPr/>
+        <p:nvPr/>
+      </p:nvGrpSpPr>
+      <p:grpSpPr>
+        <a:xfrm>
+          <a:off x="0" y="0"/>
+          <a:ext cx="0" cy="0"/>
+          <a:chOff x="0" y="0"/>
+          <a:chExt cx="0" cy="0"/>
+        </a:xfrm>
+      </p:grpSpPr>
+      <p:sp>
+        <p:nvSpPr>
+          <p:cNvPr id="10" name="직사각형 9">
+            <a:extLst>
+              <a:ext uri="{FF2B5EF4-FFF2-40B4-BE49-F238E27FC236}">
+                <a16:creationId xmlns:a16="http://schemas.microsoft.com/office/drawing/2014/main" id="{7EBA577D-FDC9-0ED2-84E3-310061CBAB43}"/>
+              </a:ext>
+            </a:extLst>
+          </p:cNvPr>
+          <p:cNvSpPr/>
+          <p:nvPr/>
+        </p:nvSpPr>
+        <p:spPr>
+          <a:xfrm>
+            <a:off x="6096000" y="352425"/>
+            <a:ext cx="1504950" cy="5962650"/>
+          </a:xfrm>
+          <a:prstGeom prst="rect">
+            <a:avLst/>
+          </a:prstGeom>
+          <a:solidFill>
+            <a:schemeClr val="bg1"/>
+          </a:solidFill>
+          <a:ln w="28575">
+            <a:solidFill>
+              <a:schemeClr val="tx1"/>
+            </a:solidFill>
+          </a:ln>
+        </p:spPr>
+        <p:style>
+          <a:lnRef idx="2">
+            <a:schemeClr val="accent1">
+              <a:shade val="15000"/>
+            </a:schemeClr>
+          </a:lnRef>
+          <a:fillRef idx="1">
+            <a:schemeClr val="accent1"/>
+          </a:fillRef>
+          <a:effectRef idx="0">
+            <a:schemeClr val="accent1"/>
+          </a:effectRef>
+          <a:fontRef idx="minor">
+            <a:schemeClr val="lt1"/>
+          </a:fontRef>
+        </p:style>
+        <p:txBody>
+          <a:bodyPr rtlCol="0" anchor="ctr"/>
+          <a:lstStyle/>
+          <a:p>
+            <a:pPr algn="ctr"/>
+            <a:r>
+              <a:rPr lang="en-US" altLang="ko-KR" sz="1500">
+                <a:solidFill>
+                  <a:schemeClr val="tx1"/>
+                </a:solidFill>
+              </a:rPr>
+              <a:t>J : 1</a:t>
+            </a:r>
+          </a:p>
+          <a:p>
+            <a:pPr algn="ctr"/>
+            <a:r>
+              <a:rPr lang="en-US" altLang="ko-KR" sz="1500">
+                <a:solidFill>
+                  <a:schemeClr val="tx1"/>
+                </a:solidFill>
+              </a:rPr>
+              <a:t>en : 0</a:t>
+            </a:r>
+          </a:p>
+          <a:p>
+            <a:pPr algn="ctr"/>
+            <a:r>
+              <a:rPr lang="en-US" altLang="ko-KR" sz="1500">
+                <a:solidFill>
+                  <a:schemeClr val="tx1"/>
+                </a:solidFill>
+              </a:rPr>
+              <a:t>K : 1</a:t>
+            </a:r>
+          </a:p>
+          <a:p>
+            <a:pPr algn="ctr"/>
+            <a:endParaRPr lang="en-US" altLang="ko-KR" sz="1500">
+              <a:solidFill>
+                <a:schemeClr val="tx1"/>
+              </a:solidFill>
+            </a:endParaRPr>
+          </a:p>
+          <a:p>
+            <a:pPr algn="ctr"/>
+            <a:r>
+              <a:rPr lang="en-US" altLang="ko-KR" sz="1500">
+                <a:solidFill>
+                  <a:schemeClr val="tx1"/>
+                </a:solidFill>
+              </a:rPr>
+              <a:t>G1_in_1 : 0</a:t>
+            </a:r>
+          </a:p>
+          <a:p>
+            <a:pPr algn="ctr"/>
+            <a:r>
+              <a:rPr lang="en-US" altLang="ko-KR" sz="1500">
+                <a:solidFill>
+                  <a:schemeClr val="tx1"/>
+                </a:solidFill>
+              </a:rPr>
+              <a:t>G1_in_2 : 1</a:t>
+            </a:r>
+          </a:p>
+          <a:p>
+            <a:pPr algn="ctr"/>
+            <a:r>
+              <a:rPr lang="en-US" altLang="ko-KR" sz="1500">
+                <a:solidFill>
+                  <a:schemeClr val="tx1"/>
+                </a:solidFill>
+              </a:rPr>
+              <a:t>G1_in_3 : 0</a:t>
+            </a:r>
+          </a:p>
+          <a:p>
+            <a:pPr algn="ctr"/>
+            <a:r>
+              <a:rPr lang="en-US" altLang="ko-KR" sz="1500">
+                <a:solidFill>
+                  <a:schemeClr val="tx1"/>
+                </a:solidFill>
+              </a:rPr>
+              <a:t>G1_out</a:t>
+            </a:r>
+            <a:r>
+              <a:rPr lang="ko-KR" altLang="en-US" sz="1500">
+                <a:solidFill>
+                  <a:schemeClr val="tx1"/>
+                </a:solidFill>
+              </a:rPr>
+              <a:t> </a:t>
+            </a:r>
+            <a:r>
+              <a:rPr lang="en-US" altLang="ko-KR" sz="1500">
+                <a:solidFill>
+                  <a:schemeClr val="tx1"/>
+                </a:solidFill>
+              </a:rPr>
+              <a:t>:</a:t>
+            </a:r>
+            <a:r>
+              <a:rPr lang="ko-KR" altLang="en-US" sz="1500">
+                <a:solidFill>
+                  <a:schemeClr val="tx1"/>
+                </a:solidFill>
+              </a:rPr>
+              <a:t> </a:t>
+            </a:r>
+            <a:r>
+              <a:rPr lang="en-US" altLang="ko-KR" sz="1500">
+                <a:solidFill>
+                  <a:schemeClr val="tx1"/>
+                </a:solidFill>
+              </a:rPr>
+              <a:t>1</a:t>
+            </a:r>
+          </a:p>
+          <a:p>
+            <a:pPr algn="ctr"/>
+            <a:endParaRPr lang="en-US" altLang="ko-KR" sz="1500">
+              <a:solidFill>
+                <a:schemeClr val="tx1"/>
+              </a:solidFill>
+            </a:endParaRPr>
+          </a:p>
+          <a:p>
+            <a:pPr algn="ctr"/>
+            <a:r>
+              <a:rPr lang="en-US" altLang="ko-KR" sz="1500">
+                <a:solidFill>
+                  <a:schemeClr val="tx1"/>
+                </a:solidFill>
+              </a:rPr>
+              <a:t>G2_in_1 : 0</a:t>
+            </a:r>
+          </a:p>
+          <a:p>
+            <a:pPr algn="ctr"/>
+            <a:r>
+              <a:rPr lang="en-US" altLang="ko-KR" sz="1500">
+                <a:solidFill>
+                  <a:schemeClr val="tx1"/>
+                </a:solidFill>
+              </a:rPr>
+              <a:t>G2_in_2 : 1</a:t>
+            </a:r>
+          </a:p>
+          <a:p>
+            <a:pPr algn="ctr"/>
+            <a:r>
+              <a:rPr lang="en-US" altLang="ko-KR" sz="1500">
+                <a:solidFill>
+                  <a:schemeClr val="tx1"/>
+                </a:solidFill>
+              </a:rPr>
+              <a:t>G2_in_3 : 1</a:t>
+            </a:r>
+          </a:p>
+          <a:p>
+            <a:pPr algn="ctr"/>
+            <a:r>
+              <a:rPr lang="en-US" altLang="ko-KR" sz="1500">
+                <a:solidFill>
+                  <a:schemeClr val="tx1"/>
+                </a:solidFill>
+              </a:rPr>
+              <a:t>G2_out : 1</a:t>
+            </a:r>
+          </a:p>
+          <a:p>
+            <a:pPr algn="ctr"/>
+            <a:endParaRPr lang="en-US" altLang="ko-KR" sz="1500">
+              <a:solidFill>
+                <a:schemeClr val="tx1"/>
+              </a:solidFill>
+            </a:endParaRPr>
+          </a:p>
+          <a:p>
+            <a:pPr algn="ctr"/>
+            <a:r>
+              <a:rPr lang="en-US" altLang="ko-KR" sz="1500">
+                <a:solidFill>
+                  <a:schemeClr val="tx1"/>
+                </a:solidFill>
+              </a:rPr>
+              <a:t>G3_in_1 : 1</a:t>
+            </a:r>
+          </a:p>
+          <a:p>
+            <a:pPr algn="ctr"/>
+            <a:r>
+              <a:rPr lang="en-US" altLang="ko-KR" sz="1500">
+                <a:solidFill>
+                  <a:schemeClr val="tx1"/>
+                </a:solidFill>
+              </a:rPr>
+              <a:t>G3_in_2 : 0</a:t>
+            </a:r>
+          </a:p>
+          <a:p>
+            <a:pPr algn="ctr"/>
+            <a:r>
+              <a:rPr lang="en-US" altLang="ko-KR" sz="1500">
+                <a:solidFill>
+                  <a:schemeClr val="tx1"/>
+                </a:solidFill>
+              </a:rPr>
+              <a:t>G3_out : 1</a:t>
+            </a:r>
+          </a:p>
+          <a:p>
+            <a:pPr algn="ctr"/>
+            <a:endParaRPr lang="en-US" altLang="ko-KR" sz="1500">
+              <a:solidFill>
+                <a:schemeClr val="tx1"/>
+              </a:solidFill>
+            </a:endParaRPr>
+          </a:p>
+          <a:p>
+            <a:pPr algn="ctr"/>
+            <a:r>
+              <a:rPr lang="en-US" altLang="ko-KR" sz="1500">
+                <a:solidFill>
+                  <a:schemeClr val="tx1"/>
+                </a:solidFill>
+              </a:rPr>
+              <a:t>G4_in_1 : 1</a:t>
+            </a:r>
+          </a:p>
+          <a:p>
+            <a:pPr algn="ctr"/>
+            <a:r>
+              <a:rPr lang="en-US" altLang="ko-KR" sz="1500">
+                <a:solidFill>
+                  <a:schemeClr val="tx1"/>
+                </a:solidFill>
+              </a:rPr>
+              <a:t>G4_in_2 : 1</a:t>
+            </a:r>
+          </a:p>
+          <a:p>
+            <a:pPr algn="ctr"/>
+            <a:r>
+              <a:rPr lang="en-US" altLang="ko-KR" sz="1500">
+                <a:solidFill>
+                  <a:schemeClr val="tx1"/>
+                </a:solidFill>
+              </a:rPr>
+              <a:t>G4_out : 0</a:t>
+            </a:r>
+          </a:p>
+          <a:p>
+            <a:pPr algn="ctr"/>
+            <a:endParaRPr lang="en-US" altLang="ko-KR" sz="1500">
+              <a:solidFill>
+                <a:schemeClr val="tx1"/>
+              </a:solidFill>
+            </a:endParaRPr>
+          </a:p>
+          <a:p>
+            <a:pPr algn="ctr"/>
+            <a:r>
+              <a:rPr lang="en-US" altLang="ko-KR" sz="1500">
+                <a:solidFill>
+                  <a:schemeClr val="tx1"/>
+                </a:solidFill>
+              </a:rPr>
+              <a:t>Q : 1</a:t>
+            </a:r>
+          </a:p>
+          <a:p>
+            <a:pPr algn="ctr"/>
+            <a:r>
+              <a:rPr lang="en-US" altLang="ko-KR" sz="1500">
+                <a:solidFill>
+                  <a:schemeClr val="tx1"/>
+                </a:solidFill>
+              </a:rPr>
+              <a:t>Q’ : 0</a:t>
+            </a:r>
+          </a:p>
+        </p:txBody>
+      </p:sp>
+      <p:sp>
+        <p:nvSpPr>
+          <p:cNvPr id="3" name="TextBox 2">
+            <a:extLst>
+              <a:ext uri="{FF2B5EF4-FFF2-40B4-BE49-F238E27FC236}">
+                <a16:creationId xmlns:a16="http://schemas.microsoft.com/office/drawing/2014/main" id="{32C83820-DC41-F543-3E0B-557CD5258730}"/>
+              </a:ext>
+            </a:extLst>
+          </p:cNvPr>
+          <p:cNvSpPr txBox="1"/>
+          <p:nvPr/>
+        </p:nvSpPr>
+        <p:spPr>
+          <a:xfrm>
+            <a:off x="4248150" y="3149084"/>
+            <a:ext cx="1404552" cy="369332"/>
+          </a:xfrm>
+          <a:prstGeom prst="rect">
+            <a:avLst/>
+          </a:prstGeom>
+          <a:noFill/>
+        </p:spPr>
+        <p:txBody>
+          <a:bodyPr wrap="none" rtlCol="0">
+            <a:spAutoFit/>
+          </a:bodyPr>
+          <a:lstStyle/>
+          <a:p>
+            <a:r>
+              <a:rPr lang="ko-KR" altLang="en-US"/>
+              <a:t>초기 상태 </a:t>
+            </a:r>
+            <a:r>
+              <a:rPr lang="en-US" altLang="ko-KR"/>
+              <a:t>: </a:t>
+            </a:r>
+            <a:endParaRPr lang="ko-KR" altLang="en-US"/>
+          </a:p>
+        </p:txBody>
+      </p:sp>
+    </p:spTree>
+    <p:extLst>
+      <p:ext uri="{BB962C8B-B14F-4D97-AF65-F5344CB8AC3E}">
+        <p14:creationId xmlns:p14="http://schemas.microsoft.com/office/powerpoint/2010/main" val="964481471"/>
+      </p:ext>
+    </p:extLst>
+  </p:cSld>
+  <p:clrMapOvr>
+    <a:masterClrMapping/>
+  </p:clrMapOvr>
+</p:sld>
+</file>
+
+<file path=ppt/slides/slide25.xml><?xml version="1.0" encoding="utf-8"?>
+<p:sld xmlns:a="http://schemas.openxmlformats.org/drawingml/2006/main" xmlns:r="http://schemas.openxmlformats.org/officeDocument/2006/relationships" xmlns:p="http://schemas.openxmlformats.org/presentationml/2006/main">
+  <p:cSld>
+    <p:spTree>
+      <p:nvGrpSpPr>
+        <p:cNvPr id="1" name=""/>
+        <p:cNvGrpSpPr/>
+        <p:nvPr/>
+      </p:nvGrpSpPr>
+      <p:grpSpPr>
+        <a:xfrm>
+          <a:off x="0" y="0"/>
+          <a:ext cx="0" cy="0"/>
+          <a:chOff x="0" y="0"/>
+          <a:chExt cx="0" cy="0"/>
+        </a:xfrm>
+      </p:grpSpPr>
+      <p:sp>
+        <p:nvSpPr>
+          <p:cNvPr id="10" name="직사각형 9">
+            <a:extLst>
+              <a:ext uri="{FF2B5EF4-FFF2-40B4-BE49-F238E27FC236}">
+                <a16:creationId xmlns:a16="http://schemas.microsoft.com/office/drawing/2014/main" id="{7431290F-EAF5-F0EE-C284-E5DC15D83AD2}"/>
+              </a:ext>
+            </a:extLst>
+          </p:cNvPr>
+          <p:cNvSpPr/>
+          <p:nvPr/>
+        </p:nvSpPr>
+        <p:spPr>
+          <a:xfrm>
+            <a:off x="1676400" y="447675"/>
+            <a:ext cx="1504950" cy="5962650"/>
+          </a:xfrm>
+          <a:prstGeom prst="rect">
+            <a:avLst/>
+          </a:prstGeom>
+          <a:solidFill>
+            <a:schemeClr val="bg1"/>
+          </a:solidFill>
+          <a:ln w="28575">
+            <a:solidFill>
+              <a:schemeClr val="tx1"/>
+            </a:solidFill>
+          </a:ln>
+        </p:spPr>
+        <p:style>
+          <a:lnRef idx="2">
+            <a:schemeClr val="accent1">
+              <a:shade val="15000"/>
+            </a:schemeClr>
+          </a:lnRef>
+          <a:fillRef idx="1">
+            <a:schemeClr val="accent1"/>
+          </a:fillRef>
+          <a:effectRef idx="0">
+            <a:schemeClr val="accent1"/>
+          </a:effectRef>
+          <a:fontRef idx="minor">
+            <a:schemeClr val="lt1"/>
+          </a:fontRef>
+        </p:style>
+        <p:txBody>
+          <a:bodyPr rtlCol="0" anchor="ctr"/>
+          <a:lstStyle/>
+          <a:p>
+            <a:pPr algn="ctr"/>
+            <a:r>
+              <a:rPr lang="en-US" altLang="ko-KR" sz="1500">
+                <a:solidFill>
+                  <a:schemeClr val="tx1"/>
+                </a:solidFill>
+              </a:rPr>
+              <a:t>J : 1</a:t>
+            </a:r>
+          </a:p>
+          <a:p>
+            <a:pPr algn="ctr"/>
+            <a:r>
+              <a:rPr lang="en-US" altLang="ko-KR" sz="1500">
+                <a:solidFill>
+                  <a:srgbClr val="FF0000"/>
+                </a:solidFill>
+              </a:rPr>
+              <a:t>en : 1</a:t>
+            </a:r>
+          </a:p>
+          <a:p>
+            <a:pPr algn="ctr"/>
+            <a:r>
+              <a:rPr lang="en-US" altLang="ko-KR" sz="1500">
+                <a:solidFill>
+                  <a:schemeClr val="tx1"/>
+                </a:solidFill>
+              </a:rPr>
+              <a:t>K : 1</a:t>
+            </a:r>
+          </a:p>
+          <a:p>
+            <a:pPr algn="ctr"/>
+            <a:endParaRPr lang="en-US" altLang="ko-KR" sz="1500">
+              <a:solidFill>
+                <a:schemeClr val="tx1"/>
+              </a:solidFill>
+            </a:endParaRPr>
+          </a:p>
+          <a:p>
+            <a:pPr algn="ctr"/>
+            <a:r>
+              <a:rPr lang="en-US" altLang="ko-KR" sz="1500">
+                <a:solidFill>
+                  <a:schemeClr val="tx1"/>
+                </a:solidFill>
+              </a:rPr>
+              <a:t>G1_in_1 : 0</a:t>
+            </a:r>
+          </a:p>
+          <a:p>
+            <a:pPr algn="ctr"/>
+            <a:r>
+              <a:rPr lang="en-US" altLang="ko-KR" sz="1500">
+                <a:solidFill>
+                  <a:schemeClr val="tx1"/>
+                </a:solidFill>
+              </a:rPr>
+              <a:t>G1_in_2 : 1</a:t>
+            </a:r>
+          </a:p>
+          <a:p>
+            <a:pPr algn="ctr"/>
+            <a:r>
+              <a:rPr lang="en-US" altLang="ko-KR" sz="1500">
+                <a:solidFill>
+                  <a:schemeClr val="tx1"/>
+                </a:solidFill>
+              </a:rPr>
+              <a:t>G1_in_3 : 0</a:t>
+            </a:r>
+          </a:p>
+          <a:p>
+            <a:pPr algn="ctr"/>
+            <a:r>
+              <a:rPr lang="en-US" altLang="ko-KR" sz="1500">
+                <a:solidFill>
+                  <a:schemeClr val="tx1"/>
+                </a:solidFill>
+              </a:rPr>
+              <a:t>G1_out</a:t>
+            </a:r>
+            <a:r>
+              <a:rPr lang="ko-KR" altLang="en-US" sz="1500">
+                <a:solidFill>
+                  <a:schemeClr val="tx1"/>
+                </a:solidFill>
+              </a:rPr>
+              <a:t> </a:t>
+            </a:r>
+            <a:r>
+              <a:rPr lang="en-US" altLang="ko-KR" sz="1500">
+                <a:solidFill>
+                  <a:schemeClr val="tx1"/>
+                </a:solidFill>
+              </a:rPr>
+              <a:t>:</a:t>
+            </a:r>
+            <a:r>
+              <a:rPr lang="ko-KR" altLang="en-US" sz="1500">
+                <a:solidFill>
+                  <a:schemeClr val="tx1"/>
+                </a:solidFill>
+              </a:rPr>
+              <a:t> </a:t>
+            </a:r>
+            <a:r>
+              <a:rPr lang="en-US" altLang="ko-KR" sz="1500">
+                <a:solidFill>
+                  <a:schemeClr val="tx1"/>
+                </a:solidFill>
+              </a:rPr>
+              <a:t>1</a:t>
+            </a:r>
+          </a:p>
+          <a:p>
+            <a:pPr algn="ctr"/>
+            <a:endParaRPr lang="en-US" altLang="ko-KR" sz="1500">
+              <a:solidFill>
+                <a:schemeClr val="tx1"/>
+              </a:solidFill>
+            </a:endParaRPr>
+          </a:p>
+          <a:p>
+            <a:pPr algn="ctr"/>
+            <a:r>
+              <a:rPr lang="en-US" altLang="ko-KR" sz="1500">
+                <a:solidFill>
+                  <a:schemeClr val="tx1"/>
+                </a:solidFill>
+              </a:rPr>
+              <a:t>G2_in_1 : 0</a:t>
+            </a:r>
+          </a:p>
+          <a:p>
+            <a:pPr algn="ctr"/>
+            <a:r>
+              <a:rPr lang="en-US" altLang="ko-KR" sz="1500">
+                <a:solidFill>
+                  <a:schemeClr val="tx1"/>
+                </a:solidFill>
+              </a:rPr>
+              <a:t>G2_in_2 : 1</a:t>
+            </a:r>
+          </a:p>
+          <a:p>
+            <a:pPr algn="ctr"/>
+            <a:r>
+              <a:rPr lang="en-US" altLang="ko-KR" sz="1500">
+                <a:solidFill>
+                  <a:schemeClr val="tx1"/>
+                </a:solidFill>
+              </a:rPr>
+              <a:t>G2_in_3 : 1</a:t>
+            </a:r>
+          </a:p>
+          <a:p>
+            <a:pPr algn="ctr"/>
+            <a:r>
+              <a:rPr lang="en-US" altLang="ko-KR" sz="1500">
+                <a:solidFill>
+                  <a:schemeClr val="tx1"/>
+                </a:solidFill>
+              </a:rPr>
+              <a:t>G2_out : 1</a:t>
+            </a:r>
+          </a:p>
+          <a:p>
+            <a:pPr algn="ctr"/>
+            <a:endParaRPr lang="en-US" altLang="ko-KR" sz="1500">
+              <a:solidFill>
+                <a:schemeClr val="tx1"/>
+              </a:solidFill>
+            </a:endParaRPr>
+          </a:p>
+          <a:p>
+            <a:pPr algn="ctr"/>
+            <a:r>
+              <a:rPr lang="en-US" altLang="ko-KR" sz="1500">
+                <a:solidFill>
+                  <a:schemeClr val="tx1"/>
+                </a:solidFill>
+              </a:rPr>
+              <a:t>G3_in_1 : 1</a:t>
+            </a:r>
+          </a:p>
+          <a:p>
+            <a:pPr algn="ctr"/>
+            <a:r>
+              <a:rPr lang="en-US" altLang="ko-KR" sz="1500">
+                <a:solidFill>
+                  <a:schemeClr val="tx1"/>
+                </a:solidFill>
+              </a:rPr>
+              <a:t>G3_in_2 : 0</a:t>
+            </a:r>
+          </a:p>
+          <a:p>
+            <a:pPr algn="ctr"/>
+            <a:r>
+              <a:rPr lang="en-US" altLang="ko-KR" sz="1500">
+                <a:solidFill>
+                  <a:schemeClr val="tx1"/>
+                </a:solidFill>
+              </a:rPr>
+              <a:t>G3_out : 1</a:t>
+            </a:r>
+          </a:p>
+          <a:p>
+            <a:pPr algn="ctr"/>
+            <a:endParaRPr lang="en-US" altLang="ko-KR" sz="1500">
+              <a:solidFill>
+                <a:schemeClr val="tx1"/>
+              </a:solidFill>
+            </a:endParaRPr>
+          </a:p>
+          <a:p>
+            <a:pPr algn="ctr"/>
+            <a:r>
+              <a:rPr lang="en-US" altLang="ko-KR" sz="1500">
+                <a:solidFill>
+                  <a:schemeClr val="tx1"/>
+                </a:solidFill>
+              </a:rPr>
+              <a:t>G4_in_1 : 1</a:t>
+            </a:r>
+          </a:p>
+          <a:p>
+            <a:pPr algn="ctr"/>
+            <a:r>
+              <a:rPr lang="en-US" altLang="ko-KR" sz="1500">
+                <a:solidFill>
+                  <a:schemeClr val="tx1"/>
+                </a:solidFill>
+              </a:rPr>
+              <a:t>G4_in_2 : 1</a:t>
+            </a:r>
+          </a:p>
+          <a:p>
+            <a:pPr algn="ctr"/>
+            <a:r>
+              <a:rPr lang="en-US" altLang="ko-KR" sz="1500">
+                <a:solidFill>
+                  <a:schemeClr val="tx1"/>
+                </a:solidFill>
+              </a:rPr>
+              <a:t>G4_out : 0</a:t>
+            </a:r>
+          </a:p>
+          <a:p>
+            <a:pPr algn="ctr"/>
+            <a:endParaRPr lang="en-US" altLang="ko-KR" sz="1500">
+              <a:solidFill>
+                <a:schemeClr val="tx1"/>
+              </a:solidFill>
+            </a:endParaRPr>
+          </a:p>
+          <a:p>
+            <a:pPr algn="ctr"/>
+            <a:r>
+              <a:rPr lang="en-US" altLang="ko-KR" sz="1500">
+                <a:solidFill>
+                  <a:schemeClr val="tx1"/>
+                </a:solidFill>
+              </a:rPr>
+              <a:t>Q : 1</a:t>
+            </a:r>
+          </a:p>
+          <a:p>
+            <a:pPr algn="ctr"/>
+            <a:r>
+              <a:rPr lang="en-US" altLang="ko-KR" sz="1500">
+                <a:solidFill>
+                  <a:schemeClr val="tx1"/>
+                </a:solidFill>
+              </a:rPr>
+              <a:t>Q’ : 0</a:t>
+            </a:r>
+          </a:p>
+        </p:txBody>
+      </p:sp>
+      <p:sp>
+        <p:nvSpPr>
+          <p:cNvPr id="47" name="직사각형 46">
+            <a:extLst>
+              <a:ext uri="{FF2B5EF4-FFF2-40B4-BE49-F238E27FC236}">
+                <a16:creationId xmlns:a16="http://schemas.microsoft.com/office/drawing/2014/main" id="{1073EF75-9653-2E7D-26C2-2B4943254C84}"/>
+              </a:ext>
+            </a:extLst>
+          </p:cNvPr>
+          <p:cNvSpPr/>
+          <p:nvPr/>
+        </p:nvSpPr>
+        <p:spPr>
+          <a:xfrm>
+            <a:off x="6572250" y="447675"/>
+            <a:ext cx="1504950" cy="5962650"/>
+          </a:xfrm>
+          <a:prstGeom prst="rect">
+            <a:avLst/>
+          </a:prstGeom>
+          <a:solidFill>
+            <a:schemeClr val="bg1"/>
+          </a:solidFill>
+          <a:ln w="28575">
+            <a:solidFill>
+              <a:schemeClr val="tx1"/>
+            </a:solidFill>
+          </a:ln>
+        </p:spPr>
+        <p:style>
+          <a:lnRef idx="2">
+            <a:schemeClr val="accent1">
+              <a:shade val="15000"/>
+            </a:schemeClr>
+          </a:lnRef>
+          <a:fillRef idx="1">
+            <a:schemeClr val="accent1"/>
+          </a:fillRef>
+          <a:effectRef idx="0">
+            <a:schemeClr val="accent1"/>
+          </a:effectRef>
+          <a:fontRef idx="minor">
+            <a:schemeClr val="lt1"/>
+          </a:fontRef>
+        </p:style>
+        <p:txBody>
+          <a:bodyPr rtlCol="0" anchor="ctr"/>
+          <a:lstStyle/>
+          <a:p>
+            <a:pPr algn="ctr"/>
+            <a:r>
+              <a:rPr lang="en-US" altLang="ko-KR" sz="1500">
+                <a:solidFill>
+                  <a:schemeClr val="tx1"/>
+                </a:solidFill>
+              </a:rPr>
+              <a:t>J : 1</a:t>
+            </a:r>
+          </a:p>
+          <a:p>
+            <a:pPr algn="ctr"/>
+            <a:r>
+              <a:rPr lang="en-US" altLang="ko-KR" sz="1500">
+                <a:solidFill>
+                  <a:srgbClr val="0000FF"/>
+                </a:solidFill>
+              </a:rPr>
+              <a:t>en : 1</a:t>
+            </a:r>
+          </a:p>
+          <a:p>
+            <a:pPr algn="ctr"/>
+            <a:r>
+              <a:rPr lang="en-US" altLang="ko-KR" sz="1500">
+                <a:solidFill>
+                  <a:schemeClr val="tx1"/>
+                </a:solidFill>
+              </a:rPr>
+              <a:t>K : 1</a:t>
+            </a:r>
+          </a:p>
+          <a:p>
+            <a:pPr algn="ctr"/>
+            <a:endParaRPr lang="en-US" altLang="ko-KR" sz="1500">
+              <a:solidFill>
+                <a:schemeClr val="tx1"/>
+              </a:solidFill>
+            </a:endParaRPr>
+          </a:p>
+          <a:p>
+            <a:pPr algn="ctr"/>
+            <a:r>
+              <a:rPr lang="en-US" altLang="ko-KR" sz="1500">
+                <a:solidFill>
+                  <a:schemeClr val="tx1"/>
+                </a:solidFill>
+              </a:rPr>
+              <a:t>G1_in_1 : 0</a:t>
+            </a:r>
+          </a:p>
+          <a:p>
+            <a:pPr algn="ctr"/>
+            <a:r>
+              <a:rPr lang="en-US" altLang="ko-KR" sz="1500">
+                <a:solidFill>
+                  <a:schemeClr val="tx1"/>
+                </a:solidFill>
+              </a:rPr>
+              <a:t>G1_in_2 : 1</a:t>
+            </a:r>
+          </a:p>
+          <a:p>
+            <a:pPr algn="ctr"/>
+            <a:r>
+              <a:rPr lang="en-US" altLang="ko-KR" sz="1500">
+                <a:solidFill>
+                  <a:srgbClr val="FF0000"/>
+                </a:solidFill>
+              </a:rPr>
+              <a:t>G1_in_3 : 1</a:t>
+            </a:r>
+          </a:p>
+          <a:p>
+            <a:pPr algn="ctr"/>
+            <a:r>
+              <a:rPr lang="en-US" altLang="ko-KR" sz="1500">
+                <a:solidFill>
+                  <a:schemeClr val="tx1"/>
+                </a:solidFill>
+              </a:rPr>
+              <a:t>G1_out</a:t>
+            </a:r>
+            <a:r>
+              <a:rPr lang="ko-KR" altLang="en-US" sz="1500">
+                <a:solidFill>
+                  <a:schemeClr val="tx1"/>
+                </a:solidFill>
+              </a:rPr>
+              <a:t> </a:t>
+            </a:r>
+            <a:r>
+              <a:rPr lang="en-US" altLang="ko-KR" sz="1500">
+                <a:solidFill>
+                  <a:schemeClr val="tx1"/>
+                </a:solidFill>
+              </a:rPr>
+              <a:t>:</a:t>
+            </a:r>
+            <a:r>
+              <a:rPr lang="ko-KR" altLang="en-US" sz="1500">
+                <a:solidFill>
+                  <a:schemeClr val="tx1"/>
+                </a:solidFill>
+              </a:rPr>
+              <a:t> </a:t>
+            </a:r>
+            <a:r>
+              <a:rPr lang="en-US" altLang="ko-KR" sz="1500">
+                <a:solidFill>
+                  <a:schemeClr val="tx1"/>
+                </a:solidFill>
+              </a:rPr>
+              <a:t>1</a:t>
+            </a:r>
+          </a:p>
+          <a:p>
+            <a:pPr algn="ctr"/>
+            <a:endParaRPr lang="en-US" altLang="ko-KR" sz="1500">
+              <a:solidFill>
+                <a:schemeClr val="tx1"/>
+              </a:solidFill>
+            </a:endParaRPr>
+          </a:p>
+          <a:p>
+            <a:pPr algn="ctr"/>
+            <a:r>
+              <a:rPr lang="en-US" altLang="ko-KR" sz="1500">
+                <a:solidFill>
+                  <a:srgbClr val="FF0000"/>
+                </a:solidFill>
+              </a:rPr>
+              <a:t>G2_in_1 : 1</a:t>
+            </a:r>
+          </a:p>
+          <a:p>
+            <a:pPr algn="ctr"/>
+            <a:r>
+              <a:rPr lang="en-US" altLang="ko-KR" sz="1500">
+                <a:solidFill>
+                  <a:schemeClr val="tx1"/>
+                </a:solidFill>
+              </a:rPr>
+              <a:t>G2_in_2 : 1</a:t>
+            </a:r>
+          </a:p>
+          <a:p>
+            <a:pPr algn="ctr"/>
+            <a:r>
+              <a:rPr lang="en-US" altLang="ko-KR" sz="1500">
+                <a:solidFill>
+                  <a:schemeClr val="tx1"/>
+                </a:solidFill>
+              </a:rPr>
+              <a:t>G2_in_3 : 1</a:t>
+            </a:r>
+          </a:p>
+          <a:p>
+            <a:pPr algn="ctr"/>
+            <a:r>
+              <a:rPr lang="en-US" altLang="ko-KR" sz="1500">
+                <a:solidFill>
+                  <a:schemeClr val="tx1"/>
+                </a:solidFill>
+              </a:rPr>
+              <a:t>G2_out : 1</a:t>
+            </a:r>
+          </a:p>
+          <a:p>
+            <a:pPr algn="ctr"/>
+            <a:endParaRPr lang="en-US" altLang="ko-KR" sz="1500">
+              <a:solidFill>
+                <a:schemeClr val="tx1"/>
+              </a:solidFill>
+            </a:endParaRPr>
+          </a:p>
+          <a:p>
+            <a:pPr algn="ctr"/>
+            <a:r>
+              <a:rPr lang="en-US" altLang="ko-KR" sz="1500">
+                <a:solidFill>
+                  <a:schemeClr val="tx1"/>
+                </a:solidFill>
+              </a:rPr>
+              <a:t>G3_in_1 : 1</a:t>
+            </a:r>
+          </a:p>
+          <a:p>
+            <a:pPr algn="ctr"/>
+            <a:r>
+              <a:rPr lang="en-US" altLang="ko-KR" sz="1500">
+                <a:solidFill>
+                  <a:schemeClr val="tx1"/>
+                </a:solidFill>
+              </a:rPr>
+              <a:t>G3_in_2 : 0</a:t>
+            </a:r>
+          </a:p>
+          <a:p>
+            <a:pPr algn="ctr"/>
+            <a:r>
+              <a:rPr lang="en-US" altLang="ko-KR" sz="1500">
+                <a:solidFill>
+                  <a:schemeClr val="tx1"/>
+                </a:solidFill>
+              </a:rPr>
+              <a:t>G3_out : 1</a:t>
+            </a:r>
+          </a:p>
+          <a:p>
+            <a:pPr algn="ctr"/>
+            <a:endParaRPr lang="en-US" altLang="ko-KR" sz="1500">
+              <a:solidFill>
+                <a:schemeClr val="tx1"/>
+              </a:solidFill>
+            </a:endParaRPr>
+          </a:p>
+          <a:p>
+            <a:pPr algn="ctr"/>
+            <a:r>
+              <a:rPr lang="en-US" altLang="ko-KR" sz="1500">
+                <a:solidFill>
+                  <a:schemeClr val="tx1"/>
+                </a:solidFill>
+              </a:rPr>
+              <a:t>G4_in_1 : 1</a:t>
+            </a:r>
+          </a:p>
+          <a:p>
+            <a:pPr algn="ctr"/>
+            <a:r>
+              <a:rPr lang="en-US" altLang="ko-KR" sz="1500">
+                <a:solidFill>
+                  <a:schemeClr val="tx1"/>
+                </a:solidFill>
+              </a:rPr>
+              <a:t>G4_in_2 : 1</a:t>
+            </a:r>
+          </a:p>
+          <a:p>
+            <a:pPr algn="ctr"/>
+            <a:r>
+              <a:rPr lang="en-US" altLang="ko-KR" sz="1500">
+                <a:solidFill>
+                  <a:schemeClr val="tx1"/>
+                </a:solidFill>
+              </a:rPr>
+              <a:t>G4_out : 0</a:t>
+            </a:r>
+          </a:p>
+          <a:p>
+            <a:pPr algn="ctr"/>
+            <a:endParaRPr lang="en-US" altLang="ko-KR" sz="1500">
+              <a:solidFill>
+                <a:schemeClr val="tx1"/>
+              </a:solidFill>
+            </a:endParaRPr>
+          </a:p>
+          <a:p>
+            <a:pPr algn="ctr"/>
+            <a:r>
+              <a:rPr lang="en-US" altLang="ko-KR" sz="1500">
+                <a:solidFill>
+                  <a:schemeClr val="tx1"/>
+                </a:solidFill>
+              </a:rPr>
+              <a:t>Q : 1</a:t>
+            </a:r>
+          </a:p>
+          <a:p>
+            <a:pPr algn="ctr"/>
+            <a:r>
+              <a:rPr lang="en-US" altLang="ko-KR" sz="1500">
+                <a:solidFill>
+                  <a:schemeClr val="tx1"/>
+                </a:solidFill>
+              </a:rPr>
+              <a:t>Q’ : 0</a:t>
+            </a:r>
+          </a:p>
+        </p:txBody>
+      </p:sp>
+      <p:cxnSp>
+        <p:nvCxnSpPr>
+          <p:cNvPr id="49" name="직선 연결선 48">
+            <a:extLst>
+              <a:ext uri="{FF2B5EF4-FFF2-40B4-BE49-F238E27FC236}">
+                <a16:creationId xmlns:a16="http://schemas.microsoft.com/office/drawing/2014/main" id="{B2045013-59C0-4853-64D5-68908258FE27}"/>
+              </a:ext>
+            </a:extLst>
+          </p:cNvPr>
+          <p:cNvCxnSpPr>
+            <a:stCxn id="10" idx="3"/>
+            <a:endCxn id="47" idx="1"/>
+          </p:cNvCxnSpPr>
+          <p:nvPr/>
+        </p:nvCxnSpPr>
+        <p:spPr>
+          <a:xfrm>
+            <a:off x="3181350" y="3429000"/>
+            <a:ext cx="3390900" cy="0"/>
+          </a:xfrm>
+          <a:prstGeom prst="line">
+            <a:avLst/>
+          </a:prstGeom>
+          <a:ln w="28575"/>
+        </p:spPr>
+        <p:style>
+          <a:lnRef idx="2">
+            <a:schemeClr val="dk1"/>
+          </a:lnRef>
+          <a:fillRef idx="0">
+            <a:schemeClr val="dk1"/>
+          </a:fillRef>
+          <a:effectRef idx="1">
+            <a:schemeClr val="dk1"/>
+          </a:effectRef>
+          <a:fontRef idx="minor">
+            <a:schemeClr val="tx1"/>
+          </a:fontRef>
+        </p:style>
+      </p:cxnSp>
+      <p:sp>
+        <p:nvSpPr>
+          <p:cNvPr id="57" name="이등변 삼각형 56">
+            <a:extLst>
+              <a:ext uri="{FF2B5EF4-FFF2-40B4-BE49-F238E27FC236}">
+                <a16:creationId xmlns:a16="http://schemas.microsoft.com/office/drawing/2014/main" id="{10ADCCCE-A254-AB24-D18A-BD0CF149AFA6}"/>
+              </a:ext>
+            </a:extLst>
+          </p:cNvPr>
+          <p:cNvSpPr/>
+          <p:nvPr/>
+        </p:nvSpPr>
+        <p:spPr>
+          <a:xfrm rot="5400000">
+            <a:off x="6329362" y="3314700"/>
+            <a:ext cx="238125" cy="228600"/>
+          </a:xfrm>
+          <a:prstGeom prst="triangle">
+            <a:avLst/>
+          </a:prstGeom>
+          <a:noFill/>
+          <a:ln w="28575"/>
+        </p:spPr>
+        <p:style>
+          <a:lnRef idx="2">
+            <a:schemeClr val="accent1">
+              <a:shade val="15000"/>
+            </a:schemeClr>
+          </a:lnRef>
+          <a:fillRef idx="1">
+            <a:schemeClr val="accent1"/>
+          </a:fillRef>
+          <a:effectRef idx="0">
+            <a:schemeClr val="accent1"/>
+          </a:effectRef>
+          <a:fontRef idx="minor">
+            <a:schemeClr val="lt1"/>
+          </a:fontRef>
+        </p:style>
+        <p:txBody>
+          <a:bodyPr rtlCol="0" anchor="ctr"/>
+          <a:lstStyle/>
+          <a:p>
+            <a:pPr algn="ctr"/>
+            <a:endParaRPr lang="ko-KR" altLang="en-US"/>
+          </a:p>
+        </p:txBody>
+      </p:sp>
+      <p:sp>
+        <p:nvSpPr>
+          <p:cNvPr id="58" name="TextBox 57">
+            <a:extLst>
+              <a:ext uri="{FF2B5EF4-FFF2-40B4-BE49-F238E27FC236}">
+                <a16:creationId xmlns:a16="http://schemas.microsoft.com/office/drawing/2014/main" id="{E6A10B8B-D34F-A3D0-83ED-00C1A06C72A1}"/>
+              </a:ext>
+            </a:extLst>
+          </p:cNvPr>
+          <p:cNvSpPr txBox="1"/>
+          <p:nvPr/>
+        </p:nvSpPr>
+        <p:spPr>
+          <a:xfrm>
+            <a:off x="3400425" y="447675"/>
+            <a:ext cx="2952750" cy="369332"/>
+          </a:xfrm>
+          <a:prstGeom prst="rect">
+            <a:avLst/>
+          </a:prstGeom>
+          <a:noFill/>
+        </p:spPr>
+        <p:txBody>
+          <a:bodyPr wrap="square" rtlCol="0">
+            <a:spAutoFit/>
+          </a:bodyPr>
+          <a:lstStyle/>
+          <a:p>
+            <a:r>
+              <a:rPr lang="en-US" altLang="ko-KR"/>
+              <a:t>Queue : [</a:t>
+            </a:r>
+            <a:r>
+              <a:rPr lang="en-US" altLang="ko-KR">
+                <a:solidFill>
+                  <a:srgbClr val="FF0000"/>
+                </a:solidFill>
+              </a:rPr>
+              <a:t>en</a:t>
+            </a:r>
+            <a:r>
+              <a:rPr lang="en-US" altLang="ko-KR"/>
+              <a:t>]</a:t>
+            </a:r>
+            <a:endParaRPr lang="ko-KR" altLang="en-US"/>
+          </a:p>
+        </p:txBody>
+      </p:sp>
+      <p:sp>
+        <p:nvSpPr>
+          <p:cNvPr id="61" name="TextBox 60">
+            <a:extLst>
+              <a:ext uri="{FF2B5EF4-FFF2-40B4-BE49-F238E27FC236}">
+                <a16:creationId xmlns:a16="http://schemas.microsoft.com/office/drawing/2014/main" id="{84288DFA-476B-E994-0384-9B7C438412EE}"/>
+              </a:ext>
+            </a:extLst>
+          </p:cNvPr>
+          <p:cNvSpPr txBox="1"/>
+          <p:nvPr/>
+        </p:nvSpPr>
+        <p:spPr>
+          <a:xfrm>
+            <a:off x="8296275" y="447675"/>
+            <a:ext cx="2952750" cy="369332"/>
+          </a:xfrm>
+          <a:prstGeom prst="rect">
+            <a:avLst/>
+          </a:prstGeom>
+          <a:noFill/>
+        </p:spPr>
+        <p:txBody>
+          <a:bodyPr wrap="square" rtlCol="0">
+            <a:spAutoFit/>
+          </a:bodyPr>
+          <a:lstStyle/>
+          <a:p>
+            <a:r>
+              <a:rPr lang="en-US" altLang="ko-KR"/>
+              <a:t>Queue : [G1, G2]</a:t>
+            </a:r>
+            <a:endParaRPr lang="ko-KR" altLang="en-US"/>
+          </a:p>
+        </p:txBody>
+      </p:sp>
+    </p:spTree>
+    <p:extLst>
+      <p:ext uri="{BB962C8B-B14F-4D97-AF65-F5344CB8AC3E}">
+        <p14:creationId xmlns:p14="http://schemas.microsoft.com/office/powerpoint/2010/main" val="1754947606"/>
+      </p:ext>
+    </p:extLst>
+  </p:cSld>
+  <p:clrMapOvr>
+    <a:masterClrMapping/>
+  </p:clrMapOvr>
+</p:sld>
+</file>
+
+<file path=ppt/slides/slide26.xml><?xml version="1.0" encoding="utf-8"?>
+<p:sld xmlns:a="http://schemas.openxmlformats.org/drawingml/2006/main" xmlns:r="http://schemas.openxmlformats.org/officeDocument/2006/relationships" xmlns:p="http://schemas.openxmlformats.org/presentationml/2006/main">
+  <p:cSld>
+    <p:spTree>
+      <p:nvGrpSpPr>
+        <p:cNvPr id="1" name="">
+          <a:extLst>
+            <a:ext uri="{FF2B5EF4-FFF2-40B4-BE49-F238E27FC236}">
+              <a16:creationId xmlns:a16="http://schemas.microsoft.com/office/drawing/2014/main" id="{89D0101E-B907-A168-B797-A3B0B6DE450D}"/>
+            </a:ext>
+          </a:extLst>
+        </p:cNvPr>
+        <p:cNvGrpSpPr/>
+        <p:nvPr/>
+      </p:nvGrpSpPr>
+      <p:grpSpPr>
+        <a:xfrm>
+          <a:off x="0" y="0"/>
+          <a:ext cx="0" cy="0"/>
+          <a:chOff x="0" y="0"/>
+          <a:chExt cx="0" cy="0"/>
+        </a:xfrm>
+      </p:grpSpPr>
+      <p:sp>
+        <p:nvSpPr>
+          <p:cNvPr id="10" name="직사각형 9">
+            <a:extLst>
+              <a:ext uri="{FF2B5EF4-FFF2-40B4-BE49-F238E27FC236}">
+                <a16:creationId xmlns:a16="http://schemas.microsoft.com/office/drawing/2014/main" id="{E2BA301F-DCDB-9B2D-7C7F-F20C6BDC4A26}"/>
+              </a:ext>
+            </a:extLst>
+          </p:cNvPr>
+          <p:cNvSpPr/>
+          <p:nvPr/>
+        </p:nvSpPr>
+        <p:spPr>
+          <a:xfrm>
+            <a:off x="1676400" y="447675"/>
+            <a:ext cx="1504950" cy="5962650"/>
+          </a:xfrm>
+          <a:prstGeom prst="rect">
+            <a:avLst/>
+          </a:prstGeom>
+          <a:solidFill>
+            <a:schemeClr val="bg1"/>
+          </a:solidFill>
+          <a:ln w="28575">
+            <a:solidFill>
+              <a:schemeClr val="tx1"/>
+            </a:solidFill>
+          </a:ln>
+        </p:spPr>
+        <p:style>
+          <a:lnRef idx="2">
+            <a:schemeClr val="accent1">
+              <a:shade val="15000"/>
+            </a:schemeClr>
+          </a:lnRef>
+          <a:fillRef idx="1">
+            <a:schemeClr val="accent1"/>
+          </a:fillRef>
+          <a:effectRef idx="0">
+            <a:schemeClr val="accent1"/>
+          </a:effectRef>
+          <a:fontRef idx="minor">
+            <a:schemeClr val="lt1"/>
+          </a:fontRef>
+        </p:style>
+        <p:txBody>
+          <a:bodyPr rtlCol="0" anchor="ctr"/>
+          <a:lstStyle/>
+          <a:p>
+            <a:pPr algn="ctr"/>
+            <a:r>
+              <a:rPr lang="en-US" altLang="ko-KR" sz="1500">
+                <a:solidFill>
+                  <a:schemeClr val="tx1"/>
+                </a:solidFill>
+              </a:rPr>
+              <a:t>J : 1</a:t>
+            </a:r>
+          </a:p>
+          <a:p>
+            <a:pPr algn="ctr"/>
+            <a:r>
+              <a:rPr lang="en-US" altLang="ko-KR" sz="1500">
+                <a:solidFill>
+                  <a:schemeClr val="tx1"/>
+                </a:solidFill>
+              </a:rPr>
+              <a:t>en : 1</a:t>
+            </a:r>
+          </a:p>
+          <a:p>
+            <a:pPr algn="ctr"/>
+            <a:r>
+              <a:rPr lang="en-US" altLang="ko-KR" sz="1500">
+                <a:solidFill>
+                  <a:schemeClr val="tx1"/>
+                </a:solidFill>
+              </a:rPr>
+              <a:t>K : 1</a:t>
+            </a:r>
+          </a:p>
+          <a:p>
+            <a:pPr algn="ctr"/>
+            <a:endParaRPr lang="en-US" altLang="ko-KR" sz="1500">
+              <a:solidFill>
+                <a:schemeClr val="tx1"/>
+              </a:solidFill>
+            </a:endParaRPr>
+          </a:p>
+          <a:p>
+            <a:pPr algn="ctr"/>
+            <a:r>
+              <a:rPr lang="en-US" altLang="ko-KR" sz="1500">
+                <a:solidFill>
+                  <a:schemeClr val="tx1"/>
+                </a:solidFill>
+              </a:rPr>
+              <a:t>G1_in_1 : 0</a:t>
+            </a:r>
+          </a:p>
+          <a:p>
+            <a:pPr algn="ctr"/>
+            <a:r>
+              <a:rPr lang="en-US" altLang="ko-KR" sz="1500">
+                <a:solidFill>
+                  <a:schemeClr val="tx1"/>
+                </a:solidFill>
+              </a:rPr>
+              <a:t>G1_in_2 : 1</a:t>
+            </a:r>
+          </a:p>
+          <a:p>
+            <a:pPr algn="ctr"/>
+            <a:r>
+              <a:rPr lang="en-US" altLang="ko-KR" sz="1500">
+                <a:solidFill>
+                  <a:srgbClr val="FF0000"/>
+                </a:solidFill>
+              </a:rPr>
+              <a:t>G1_in_3 : 1</a:t>
+            </a:r>
+          </a:p>
+          <a:p>
+            <a:pPr algn="ctr"/>
+            <a:r>
+              <a:rPr lang="en-US" altLang="ko-KR" sz="1500">
+                <a:solidFill>
+                  <a:schemeClr val="tx1"/>
+                </a:solidFill>
+              </a:rPr>
+              <a:t>G1_out</a:t>
+            </a:r>
+            <a:r>
+              <a:rPr lang="ko-KR" altLang="en-US" sz="1500">
+                <a:solidFill>
+                  <a:schemeClr val="tx1"/>
+                </a:solidFill>
+              </a:rPr>
+              <a:t> </a:t>
+            </a:r>
+            <a:r>
+              <a:rPr lang="en-US" altLang="ko-KR" sz="1500">
+                <a:solidFill>
+                  <a:schemeClr val="tx1"/>
+                </a:solidFill>
+              </a:rPr>
+              <a:t>:</a:t>
+            </a:r>
+            <a:r>
+              <a:rPr lang="ko-KR" altLang="en-US" sz="1500">
+                <a:solidFill>
+                  <a:schemeClr val="tx1"/>
+                </a:solidFill>
+              </a:rPr>
+              <a:t> </a:t>
+            </a:r>
+            <a:r>
+              <a:rPr lang="en-US" altLang="ko-KR" sz="1500">
+                <a:solidFill>
+                  <a:schemeClr val="tx1"/>
+                </a:solidFill>
+              </a:rPr>
+              <a:t>1</a:t>
+            </a:r>
+          </a:p>
+          <a:p>
+            <a:pPr algn="ctr"/>
+            <a:endParaRPr lang="en-US" altLang="ko-KR" sz="1500">
+              <a:solidFill>
+                <a:schemeClr val="tx1"/>
+              </a:solidFill>
+            </a:endParaRPr>
+          </a:p>
+          <a:p>
+            <a:pPr algn="ctr"/>
+            <a:r>
+              <a:rPr lang="en-US" altLang="ko-KR" sz="1500">
+                <a:solidFill>
+                  <a:schemeClr val="tx1"/>
+                </a:solidFill>
+              </a:rPr>
+              <a:t>G2_in_1 : 1</a:t>
+            </a:r>
+          </a:p>
+          <a:p>
+            <a:pPr algn="ctr"/>
+            <a:r>
+              <a:rPr lang="en-US" altLang="ko-KR" sz="1500">
+                <a:solidFill>
+                  <a:schemeClr val="tx1"/>
+                </a:solidFill>
+              </a:rPr>
+              <a:t>G2_in_2 : 1</a:t>
+            </a:r>
+          </a:p>
+          <a:p>
+            <a:pPr algn="ctr"/>
+            <a:r>
+              <a:rPr lang="en-US" altLang="ko-KR" sz="1500">
+                <a:solidFill>
+                  <a:schemeClr val="tx1"/>
+                </a:solidFill>
+              </a:rPr>
+              <a:t>G2_in_3 : 1</a:t>
+            </a:r>
+          </a:p>
+          <a:p>
+            <a:pPr algn="ctr"/>
+            <a:r>
+              <a:rPr lang="en-US" altLang="ko-KR" sz="1500">
+                <a:solidFill>
+                  <a:schemeClr val="tx1"/>
+                </a:solidFill>
+              </a:rPr>
+              <a:t>G2_out : 1</a:t>
+            </a:r>
+          </a:p>
+          <a:p>
+            <a:pPr algn="ctr"/>
+            <a:endParaRPr lang="en-US" altLang="ko-KR" sz="1500">
+              <a:solidFill>
+                <a:schemeClr val="tx1"/>
+              </a:solidFill>
+            </a:endParaRPr>
+          </a:p>
+          <a:p>
+            <a:pPr algn="ctr"/>
+            <a:r>
+              <a:rPr lang="en-US" altLang="ko-KR" sz="1500">
+                <a:solidFill>
+                  <a:schemeClr val="tx1"/>
+                </a:solidFill>
+              </a:rPr>
+              <a:t>G3_in_1 : 1</a:t>
+            </a:r>
+          </a:p>
+          <a:p>
+            <a:pPr algn="ctr"/>
+            <a:r>
+              <a:rPr lang="en-US" altLang="ko-KR" sz="1500">
+                <a:solidFill>
+                  <a:schemeClr val="tx1"/>
+                </a:solidFill>
+              </a:rPr>
+              <a:t>G3_in_2 : 0</a:t>
+            </a:r>
+          </a:p>
+          <a:p>
+            <a:pPr algn="ctr"/>
+            <a:r>
+              <a:rPr lang="en-US" altLang="ko-KR" sz="1500">
+                <a:solidFill>
+                  <a:schemeClr val="tx1"/>
+                </a:solidFill>
+              </a:rPr>
+              <a:t>G3_out : 1</a:t>
+            </a:r>
+          </a:p>
+          <a:p>
+            <a:pPr algn="ctr"/>
+            <a:endParaRPr lang="en-US" altLang="ko-KR" sz="1500">
+              <a:solidFill>
+                <a:schemeClr val="tx1"/>
+              </a:solidFill>
+            </a:endParaRPr>
+          </a:p>
+          <a:p>
+            <a:pPr algn="ctr"/>
+            <a:r>
+              <a:rPr lang="en-US" altLang="ko-KR" sz="1500">
+                <a:solidFill>
+                  <a:schemeClr val="tx1"/>
+                </a:solidFill>
+              </a:rPr>
+              <a:t>G4_in_1 : 1</a:t>
+            </a:r>
+          </a:p>
+          <a:p>
+            <a:pPr algn="ctr"/>
+            <a:r>
+              <a:rPr lang="en-US" altLang="ko-KR" sz="1500">
+                <a:solidFill>
+                  <a:schemeClr val="tx1"/>
+                </a:solidFill>
+              </a:rPr>
+              <a:t>G4_in_2 : 1</a:t>
+            </a:r>
+          </a:p>
+          <a:p>
+            <a:pPr algn="ctr"/>
+            <a:r>
+              <a:rPr lang="en-US" altLang="ko-KR" sz="1500">
+                <a:solidFill>
+                  <a:schemeClr val="tx1"/>
+                </a:solidFill>
+              </a:rPr>
+              <a:t>G4_out : 0</a:t>
+            </a:r>
+          </a:p>
+          <a:p>
+            <a:pPr algn="ctr"/>
+            <a:endParaRPr lang="en-US" altLang="ko-KR" sz="1500">
+              <a:solidFill>
+                <a:schemeClr val="tx1"/>
+              </a:solidFill>
+            </a:endParaRPr>
+          </a:p>
+          <a:p>
+            <a:pPr algn="ctr"/>
+            <a:r>
+              <a:rPr lang="en-US" altLang="ko-KR" sz="1500">
+                <a:solidFill>
+                  <a:schemeClr val="tx1"/>
+                </a:solidFill>
+              </a:rPr>
+              <a:t>Q : 1</a:t>
+            </a:r>
+          </a:p>
+          <a:p>
+            <a:pPr algn="ctr"/>
+            <a:r>
+              <a:rPr lang="en-US" altLang="ko-KR" sz="1500">
+                <a:solidFill>
+                  <a:schemeClr val="tx1"/>
+                </a:solidFill>
+              </a:rPr>
+              <a:t>Q’ : 0</a:t>
+            </a:r>
+          </a:p>
+        </p:txBody>
+      </p:sp>
+      <p:sp>
+        <p:nvSpPr>
+          <p:cNvPr id="47" name="직사각형 46">
+            <a:extLst>
+              <a:ext uri="{FF2B5EF4-FFF2-40B4-BE49-F238E27FC236}">
+                <a16:creationId xmlns:a16="http://schemas.microsoft.com/office/drawing/2014/main" id="{0F7F8EB6-7A9E-D9DB-22C0-D92F4E1650A7}"/>
+              </a:ext>
+            </a:extLst>
+          </p:cNvPr>
+          <p:cNvSpPr/>
+          <p:nvPr/>
+        </p:nvSpPr>
+        <p:spPr>
+          <a:xfrm>
+            <a:off x="6572250" y="447675"/>
+            <a:ext cx="1504950" cy="5962650"/>
+          </a:xfrm>
+          <a:prstGeom prst="rect">
+            <a:avLst/>
+          </a:prstGeom>
+          <a:solidFill>
+            <a:schemeClr val="bg1"/>
+          </a:solidFill>
+          <a:ln w="28575">
+            <a:solidFill>
+              <a:schemeClr val="tx1"/>
+            </a:solidFill>
+          </a:ln>
+        </p:spPr>
+        <p:style>
+          <a:lnRef idx="2">
+            <a:schemeClr val="accent1">
+              <a:shade val="15000"/>
+            </a:schemeClr>
+          </a:lnRef>
+          <a:fillRef idx="1">
+            <a:schemeClr val="accent1"/>
+          </a:fillRef>
+          <a:effectRef idx="0">
+            <a:schemeClr val="accent1"/>
+          </a:effectRef>
+          <a:fontRef idx="minor">
+            <a:schemeClr val="lt1"/>
+          </a:fontRef>
+        </p:style>
+        <p:txBody>
+          <a:bodyPr rtlCol="0" anchor="ctr"/>
+          <a:lstStyle/>
+          <a:p>
+            <a:pPr algn="ctr"/>
+            <a:r>
+              <a:rPr lang="en-US" altLang="ko-KR" sz="1500">
+                <a:solidFill>
+                  <a:schemeClr val="tx1"/>
+                </a:solidFill>
+              </a:rPr>
+              <a:t>J : 1</a:t>
+            </a:r>
+          </a:p>
+          <a:p>
+            <a:pPr algn="ctr"/>
+            <a:r>
+              <a:rPr lang="en-US" altLang="ko-KR" sz="1500">
+                <a:solidFill>
+                  <a:schemeClr val="tx1"/>
+                </a:solidFill>
+              </a:rPr>
+              <a:t>en : 1</a:t>
+            </a:r>
+          </a:p>
+          <a:p>
+            <a:pPr algn="ctr"/>
+            <a:r>
+              <a:rPr lang="en-US" altLang="ko-KR" sz="1500">
+                <a:solidFill>
+                  <a:schemeClr val="tx1"/>
+                </a:solidFill>
+              </a:rPr>
+              <a:t>K : 1</a:t>
+            </a:r>
+          </a:p>
+          <a:p>
+            <a:pPr algn="ctr"/>
+            <a:endParaRPr lang="en-US" altLang="ko-KR" sz="1500">
+              <a:solidFill>
+                <a:schemeClr val="tx1"/>
+              </a:solidFill>
+            </a:endParaRPr>
+          </a:p>
+          <a:p>
+            <a:pPr algn="ctr"/>
+            <a:r>
+              <a:rPr lang="en-US" altLang="ko-KR" sz="1500">
+                <a:solidFill>
+                  <a:schemeClr val="tx1"/>
+                </a:solidFill>
+              </a:rPr>
+              <a:t>G1_in_1 : 0</a:t>
+            </a:r>
+          </a:p>
+          <a:p>
+            <a:pPr algn="ctr"/>
+            <a:r>
+              <a:rPr lang="en-US" altLang="ko-KR" sz="1500">
+                <a:solidFill>
+                  <a:schemeClr val="tx1"/>
+                </a:solidFill>
+              </a:rPr>
+              <a:t>G1_in_2 : 1</a:t>
+            </a:r>
+          </a:p>
+          <a:p>
+            <a:pPr algn="ctr"/>
+            <a:r>
+              <a:rPr lang="en-US" altLang="ko-KR" sz="1500">
+                <a:solidFill>
+                  <a:srgbClr val="0000FF"/>
+                </a:solidFill>
+              </a:rPr>
+              <a:t>G1_in_3 : 1</a:t>
+            </a:r>
+          </a:p>
+          <a:p>
+            <a:pPr algn="ctr"/>
+            <a:r>
+              <a:rPr lang="en-US" altLang="ko-KR" sz="1500">
+                <a:solidFill>
+                  <a:srgbClr val="FF0000"/>
+                </a:solidFill>
+              </a:rPr>
+              <a:t>G1_out</a:t>
+            </a:r>
+            <a:r>
+              <a:rPr lang="ko-KR" altLang="en-US" sz="1500">
+                <a:solidFill>
+                  <a:srgbClr val="FF0000"/>
+                </a:solidFill>
+              </a:rPr>
+              <a:t> </a:t>
+            </a:r>
+            <a:r>
+              <a:rPr lang="en-US" altLang="ko-KR" sz="1500">
+                <a:solidFill>
+                  <a:srgbClr val="FF0000"/>
+                </a:solidFill>
+              </a:rPr>
+              <a:t>:</a:t>
+            </a:r>
+            <a:r>
+              <a:rPr lang="ko-KR" altLang="en-US" sz="1500">
+                <a:solidFill>
+                  <a:srgbClr val="FF0000"/>
+                </a:solidFill>
+              </a:rPr>
+              <a:t> </a:t>
+            </a:r>
+            <a:r>
+              <a:rPr lang="en-US" altLang="ko-KR" sz="1500">
+                <a:solidFill>
+                  <a:srgbClr val="FF0000"/>
+                </a:solidFill>
+              </a:rPr>
+              <a:t>1</a:t>
+            </a:r>
+          </a:p>
+          <a:p>
+            <a:pPr algn="ctr"/>
+            <a:endParaRPr lang="en-US" altLang="ko-KR" sz="1500">
+              <a:solidFill>
+                <a:schemeClr val="tx1"/>
+              </a:solidFill>
+            </a:endParaRPr>
+          </a:p>
+          <a:p>
+            <a:pPr algn="ctr"/>
+            <a:r>
+              <a:rPr lang="en-US" altLang="ko-KR" sz="1500">
+                <a:solidFill>
+                  <a:schemeClr val="tx1"/>
+                </a:solidFill>
+              </a:rPr>
+              <a:t>G2_in_1 : 1</a:t>
+            </a:r>
+          </a:p>
+          <a:p>
+            <a:pPr algn="ctr"/>
+            <a:r>
+              <a:rPr lang="en-US" altLang="ko-KR" sz="1500">
+                <a:solidFill>
+                  <a:schemeClr val="tx1"/>
+                </a:solidFill>
+              </a:rPr>
+              <a:t>G2_in_2 : 1</a:t>
+            </a:r>
+          </a:p>
+          <a:p>
+            <a:pPr algn="ctr"/>
+            <a:r>
+              <a:rPr lang="en-US" altLang="ko-KR" sz="1500">
+                <a:solidFill>
+                  <a:schemeClr val="tx1"/>
+                </a:solidFill>
+              </a:rPr>
+              <a:t>G2_in_3 : 1</a:t>
+            </a:r>
+          </a:p>
+          <a:p>
+            <a:pPr algn="ctr"/>
+            <a:r>
+              <a:rPr lang="en-US" altLang="ko-KR" sz="1500">
+                <a:solidFill>
+                  <a:schemeClr val="tx1"/>
+                </a:solidFill>
+              </a:rPr>
+              <a:t>G2_out : 1</a:t>
+            </a:r>
+          </a:p>
+          <a:p>
+            <a:pPr algn="ctr"/>
+            <a:endParaRPr lang="en-US" altLang="ko-KR" sz="1500">
+              <a:solidFill>
+                <a:schemeClr val="tx1"/>
+              </a:solidFill>
+            </a:endParaRPr>
+          </a:p>
+          <a:p>
+            <a:pPr algn="ctr"/>
+            <a:r>
+              <a:rPr lang="en-US" altLang="ko-KR" sz="1500">
+                <a:solidFill>
+                  <a:srgbClr val="FF0000"/>
+                </a:solidFill>
+              </a:rPr>
+              <a:t>G3_in_1 : 1</a:t>
+            </a:r>
+          </a:p>
+          <a:p>
+            <a:pPr algn="ctr"/>
+            <a:r>
+              <a:rPr lang="en-US" altLang="ko-KR" sz="1500">
+                <a:solidFill>
+                  <a:schemeClr val="tx1"/>
+                </a:solidFill>
+              </a:rPr>
+              <a:t>G3_in_2 : 0</a:t>
+            </a:r>
+          </a:p>
+          <a:p>
+            <a:pPr algn="ctr"/>
+            <a:r>
+              <a:rPr lang="en-US" altLang="ko-KR" sz="1500">
+                <a:solidFill>
+                  <a:schemeClr val="tx1"/>
+                </a:solidFill>
+              </a:rPr>
+              <a:t>G3_out : 1</a:t>
+            </a:r>
+          </a:p>
+          <a:p>
+            <a:pPr algn="ctr"/>
+            <a:endParaRPr lang="en-US" altLang="ko-KR" sz="1500">
+              <a:solidFill>
+                <a:schemeClr val="tx1"/>
+              </a:solidFill>
+            </a:endParaRPr>
+          </a:p>
+          <a:p>
+            <a:pPr algn="ctr"/>
+            <a:r>
+              <a:rPr lang="en-US" altLang="ko-KR" sz="1500">
+                <a:solidFill>
+                  <a:schemeClr val="tx1"/>
+                </a:solidFill>
+              </a:rPr>
+              <a:t>G4_in_1 : 1</a:t>
+            </a:r>
+          </a:p>
+          <a:p>
+            <a:pPr algn="ctr"/>
+            <a:r>
+              <a:rPr lang="en-US" altLang="ko-KR" sz="1500">
+                <a:solidFill>
+                  <a:schemeClr val="tx1"/>
+                </a:solidFill>
+              </a:rPr>
+              <a:t>G4_in_2 : 1</a:t>
+            </a:r>
+          </a:p>
+          <a:p>
+            <a:pPr algn="ctr"/>
+            <a:r>
+              <a:rPr lang="en-US" altLang="ko-KR" sz="1500">
+                <a:solidFill>
+                  <a:schemeClr val="tx1"/>
+                </a:solidFill>
+              </a:rPr>
+              <a:t>G4_out : 0</a:t>
+            </a:r>
+          </a:p>
+          <a:p>
+            <a:pPr algn="ctr"/>
+            <a:endParaRPr lang="en-US" altLang="ko-KR" sz="1500">
+              <a:solidFill>
+                <a:schemeClr val="tx1"/>
+              </a:solidFill>
+            </a:endParaRPr>
+          </a:p>
+          <a:p>
+            <a:pPr algn="ctr"/>
+            <a:r>
+              <a:rPr lang="en-US" altLang="ko-KR" sz="1500">
+                <a:solidFill>
+                  <a:schemeClr val="tx1"/>
+                </a:solidFill>
+              </a:rPr>
+              <a:t>Q : 1</a:t>
+            </a:r>
+          </a:p>
+          <a:p>
+            <a:pPr algn="ctr"/>
+            <a:r>
+              <a:rPr lang="en-US" altLang="ko-KR" sz="1500">
+                <a:solidFill>
+                  <a:schemeClr val="tx1"/>
+                </a:solidFill>
+              </a:rPr>
+              <a:t>Q’ : 0</a:t>
+            </a:r>
+          </a:p>
+        </p:txBody>
+      </p:sp>
+      <p:cxnSp>
+        <p:nvCxnSpPr>
+          <p:cNvPr id="49" name="직선 연결선 48">
+            <a:extLst>
+              <a:ext uri="{FF2B5EF4-FFF2-40B4-BE49-F238E27FC236}">
+                <a16:creationId xmlns:a16="http://schemas.microsoft.com/office/drawing/2014/main" id="{97ADDCFF-99CC-015A-265A-6E3D23194C42}"/>
+              </a:ext>
+            </a:extLst>
+          </p:cNvPr>
+          <p:cNvCxnSpPr>
+            <a:stCxn id="10" idx="3"/>
+            <a:endCxn id="47" idx="1"/>
+          </p:cNvCxnSpPr>
+          <p:nvPr/>
+        </p:nvCxnSpPr>
+        <p:spPr>
+          <a:xfrm>
+            <a:off x="3181350" y="3429000"/>
+            <a:ext cx="3390900" cy="0"/>
+          </a:xfrm>
+          <a:prstGeom prst="line">
+            <a:avLst/>
+          </a:prstGeom>
+          <a:ln w="28575"/>
+        </p:spPr>
+        <p:style>
+          <a:lnRef idx="2">
+            <a:schemeClr val="dk1"/>
+          </a:lnRef>
+          <a:fillRef idx="0">
+            <a:schemeClr val="dk1"/>
+          </a:fillRef>
+          <a:effectRef idx="1">
+            <a:schemeClr val="dk1"/>
+          </a:effectRef>
+          <a:fontRef idx="minor">
+            <a:schemeClr val="tx1"/>
+          </a:fontRef>
+        </p:style>
+      </p:cxnSp>
+      <p:sp>
+        <p:nvSpPr>
+          <p:cNvPr id="57" name="이등변 삼각형 56">
+            <a:extLst>
+              <a:ext uri="{FF2B5EF4-FFF2-40B4-BE49-F238E27FC236}">
+                <a16:creationId xmlns:a16="http://schemas.microsoft.com/office/drawing/2014/main" id="{8E77CE46-927F-DC51-8D43-64086A5126FB}"/>
+              </a:ext>
+            </a:extLst>
+          </p:cNvPr>
+          <p:cNvSpPr/>
+          <p:nvPr/>
+        </p:nvSpPr>
+        <p:spPr>
+          <a:xfrm rot="5400000">
+            <a:off x="6329362" y="3314700"/>
+            <a:ext cx="238125" cy="228600"/>
+          </a:xfrm>
+          <a:prstGeom prst="triangle">
+            <a:avLst/>
+          </a:prstGeom>
+          <a:noFill/>
+          <a:ln w="28575"/>
+        </p:spPr>
+        <p:style>
+          <a:lnRef idx="2">
+            <a:schemeClr val="accent1">
+              <a:shade val="15000"/>
+            </a:schemeClr>
+          </a:lnRef>
+          <a:fillRef idx="1">
+            <a:schemeClr val="accent1"/>
+          </a:fillRef>
+          <a:effectRef idx="0">
+            <a:schemeClr val="accent1"/>
+          </a:effectRef>
+          <a:fontRef idx="minor">
+            <a:schemeClr val="lt1"/>
+          </a:fontRef>
+        </p:style>
+        <p:txBody>
+          <a:bodyPr rtlCol="0" anchor="ctr"/>
+          <a:lstStyle/>
+          <a:p>
+            <a:pPr algn="ctr"/>
+            <a:endParaRPr lang="ko-KR" altLang="en-US"/>
+          </a:p>
+        </p:txBody>
+      </p:sp>
+      <p:sp>
+        <p:nvSpPr>
+          <p:cNvPr id="58" name="TextBox 57">
+            <a:extLst>
+              <a:ext uri="{FF2B5EF4-FFF2-40B4-BE49-F238E27FC236}">
+                <a16:creationId xmlns:a16="http://schemas.microsoft.com/office/drawing/2014/main" id="{9E21D9B0-820B-B1E8-7081-E557B9A23E97}"/>
+              </a:ext>
+            </a:extLst>
+          </p:cNvPr>
+          <p:cNvSpPr txBox="1"/>
+          <p:nvPr/>
+        </p:nvSpPr>
+        <p:spPr>
+          <a:xfrm>
+            <a:off x="3400425" y="447675"/>
+            <a:ext cx="2952750" cy="369332"/>
+          </a:xfrm>
+          <a:prstGeom prst="rect">
+            <a:avLst/>
+          </a:prstGeom>
+          <a:noFill/>
+        </p:spPr>
+        <p:txBody>
+          <a:bodyPr wrap="square" rtlCol="0">
+            <a:spAutoFit/>
+          </a:bodyPr>
+          <a:lstStyle/>
+          <a:p>
+            <a:r>
+              <a:rPr lang="en-US" altLang="ko-KR"/>
+              <a:t>Queue : [</a:t>
+            </a:r>
+            <a:r>
+              <a:rPr lang="en-US" altLang="ko-KR">
+                <a:solidFill>
+                  <a:srgbClr val="FF0000"/>
+                </a:solidFill>
+              </a:rPr>
+              <a:t>G1</a:t>
+            </a:r>
+            <a:r>
+              <a:rPr lang="en-US" altLang="ko-KR"/>
+              <a:t>, G2]</a:t>
+            </a:r>
+            <a:endParaRPr lang="ko-KR" altLang="en-US"/>
+          </a:p>
+        </p:txBody>
+      </p:sp>
+      <p:sp>
+        <p:nvSpPr>
+          <p:cNvPr id="61" name="TextBox 60">
+            <a:extLst>
+              <a:ext uri="{FF2B5EF4-FFF2-40B4-BE49-F238E27FC236}">
+                <a16:creationId xmlns:a16="http://schemas.microsoft.com/office/drawing/2014/main" id="{196BCF25-2177-4087-F70A-B76B49348FF5}"/>
+              </a:ext>
+            </a:extLst>
+          </p:cNvPr>
+          <p:cNvSpPr txBox="1"/>
+          <p:nvPr/>
+        </p:nvSpPr>
+        <p:spPr>
+          <a:xfrm>
+            <a:off x="8296275" y="447675"/>
+            <a:ext cx="2952750" cy="369332"/>
+          </a:xfrm>
+          <a:prstGeom prst="rect">
+            <a:avLst/>
+          </a:prstGeom>
+          <a:noFill/>
+        </p:spPr>
+        <p:txBody>
+          <a:bodyPr wrap="square" rtlCol="0">
+            <a:spAutoFit/>
+          </a:bodyPr>
+          <a:lstStyle/>
+          <a:p>
+            <a:r>
+              <a:rPr lang="en-US" altLang="ko-KR"/>
+              <a:t>Queue : [G2]</a:t>
+            </a:r>
+            <a:endParaRPr lang="ko-KR" altLang="en-US"/>
+          </a:p>
+        </p:txBody>
+      </p:sp>
+      <p:sp>
+        <p:nvSpPr>
+          <p:cNvPr id="2" name="TextBox 1">
+            <a:extLst>
+              <a:ext uri="{FF2B5EF4-FFF2-40B4-BE49-F238E27FC236}">
+                <a16:creationId xmlns:a16="http://schemas.microsoft.com/office/drawing/2014/main" id="{593482B5-BBE7-EB5E-C4DB-75B9FE07C258}"/>
+              </a:ext>
+            </a:extLst>
+          </p:cNvPr>
+          <p:cNvSpPr txBox="1"/>
+          <p:nvPr/>
+        </p:nvSpPr>
+        <p:spPr>
+          <a:xfrm>
+            <a:off x="8496300" y="3095625"/>
+            <a:ext cx="2507418" cy="369332"/>
+          </a:xfrm>
+          <a:prstGeom prst="rect">
+            <a:avLst/>
+          </a:prstGeom>
+          <a:noFill/>
+        </p:spPr>
+        <p:txBody>
+          <a:bodyPr wrap="none" rtlCol="0">
+            <a:spAutoFit/>
+          </a:bodyPr>
+          <a:lstStyle/>
+          <a:p>
+            <a:r>
+              <a:rPr lang="ko-KR" altLang="en-US"/>
+              <a:t>불변</a:t>
+            </a:r>
+            <a:r>
+              <a:rPr lang="en-US" altLang="ko-KR"/>
+              <a:t>, Queue</a:t>
+            </a:r>
+            <a:r>
+              <a:rPr lang="ko-KR" altLang="en-US"/>
+              <a:t>에 </a:t>
+            </a:r>
+            <a:r>
+              <a:rPr lang="en-US" altLang="ko-KR"/>
+              <a:t>push</a:t>
+            </a:r>
+            <a:r>
+              <a:rPr lang="ko-KR" altLang="en-US"/>
+              <a:t> </a:t>
+            </a:r>
+            <a:r>
+              <a:rPr lang="en-US" altLang="ko-KR"/>
+              <a:t>X</a:t>
+            </a:r>
+          </a:p>
+        </p:txBody>
+      </p:sp>
+    </p:spTree>
+    <p:extLst>
+      <p:ext uri="{BB962C8B-B14F-4D97-AF65-F5344CB8AC3E}">
+        <p14:creationId xmlns:p14="http://schemas.microsoft.com/office/powerpoint/2010/main" val="4203004902"/>
+      </p:ext>
+    </p:extLst>
+  </p:cSld>
+  <p:clrMapOvr>
+    <a:masterClrMapping/>
+  </p:clrMapOvr>
+</p:sld>
+</file>
+
+<file path=ppt/slides/slide27.xml><?xml version="1.0" encoding="utf-8"?>
+<p:sld xmlns:a="http://schemas.openxmlformats.org/drawingml/2006/main" xmlns:r="http://schemas.openxmlformats.org/officeDocument/2006/relationships" xmlns:p="http://schemas.openxmlformats.org/presentationml/2006/main">
+  <p:cSld>
+    <p:spTree>
+      <p:nvGrpSpPr>
+        <p:cNvPr id="1" name="">
+          <a:extLst>
+            <a:ext uri="{FF2B5EF4-FFF2-40B4-BE49-F238E27FC236}">
+              <a16:creationId xmlns:a16="http://schemas.microsoft.com/office/drawing/2014/main" id="{BC42171F-6C86-9563-9B14-59CC84C0E286}"/>
+            </a:ext>
+          </a:extLst>
+        </p:cNvPr>
+        <p:cNvGrpSpPr/>
+        <p:nvPr/>
+      </p:nvGrpSpPr>
+      <p:grpSpPr>
+        <a:xfrm>
+          <a:off x="0" y="0"/>
+          <a:ext cx="0" cy="0"/>
+          <a:chOff x="0" y="0"/>
+          <a:chExt cx="0" cy="0"/>
+        </a:xfrm>
+      </p:grpSpPr>
+      <p:sp>
+        <p:nvSpPr>
+          <p:cNvPr id="10" name="직사각형 9">
+            <a:extLst>
+              <a:ext uri="{FF2B5EF4-FFF2-40B4-BE49-F238E27FC236}">
+                <a16:creationId xmlns:a16="http://schemas.microsoft.com/office/drawing/2014/main" id="{106C1B8B-A6D4-8814-B6BF-3E54A4D92244}"/>
+              </a:ext>
+            </a:extLst>
+          </p:cNvPr>
+          <p:cNvSpPr/>
+          <p:nvPr/>
+        </p:nvSpPr>
+        <p:spPr>
+          <a:xfrm>
+            <a:off x="1676400" y="447675"/>
+            <a:ext cx="1504950" cy="5962650"/>
+          </a:xfrm>
+          <a:prstGeom prst="rect">
+            <a:avLst/>
+          </a:prstGeom>
+          <a:solidFill>
+            <a:schemeClr val="bg1"/>
+          </a:solidFill>
+          <a:ln w="28575">
+            <a:solidFill>
+              <a:schemeClr val="tx1"/>
+            </a:solidFill>
+          </a:ln>
+        </p:spPr>
+        <p:style>
+          <a:lnRef idx="2">
+            <a:schemeClr val="accent1">
+              <a:shade val="15000"/>
+            </a:schemeClr>
+          </a:lnRef>
+          <a:fillRef idx="1">
+            <a:schemeClr val="accent1"/>
+          </a:fillRef>
+          <a:effectRef idx="0">
+            <a:schemeClr val="accent1"/>
+          </a:effectRef>
+          <a:fontRef idx="minor">
+            <a:schemeClr val="lt1"/>
+          </a:fontRef>
+        </p:style>
+        <p:txBody>
+          <a:bodyPr rtlCol="0" anchor="ctr"/>
+          <a:lstStyle/>
+          <a:p>
+            <a:pPr algn="ctr"/>
+            <a:r>
+              <a:rPr lang="en-US" altLang="ko-KR" sz="1500">
+                <a:solidFill>
+                  <a:schemeClr val="tx1"/>
+                </a:solidFill>
+              </a:rPr>
+              <a:t>J : 1</a:t>
+            </a:r>
+          </a:p>
+          <a:p>
+            <a:pPr algn="ctr"/>
+            <a:r>
+              <a:rPr lang="en-US" altLang="ko-KR" sz="1500">
+                <a:solidFill>
+                  <a:schemeClr val="tx1"/>
+                </a:solidFill>
+              </a:rPr>
+              <a:t>en : 1</a:t>
+            </a:r>
+          </a:p>
+          <a:p>
+            <a:pPr algn="ctr"/>
+            <a:r>
+              <a:rPr lang="en-US" altLang="ko-KR" sz="1500">
+                <a:solidFill>
+                  <a:schemeClr val="tx1"/>
+                </a:solidFill>
+              </a:rPr>
+              <a:t>K : 1</a:t>
+            </a:r>
+          </a:p>
+          <a:p>
+            <a:pPr algn="ctr"/>
+            <a:endParaRPr lang="en-US" altLang="ko-KR" sz="1500">
+              <a:solidFill>
+                <a:schemeClr val="tx1"/>
+              </a:solidFill>
+            </a:endParaRPr>
+          </a:p>
+          <a:p>
+            <a:pPr algn="ctr"/>
+            <a:r>
+              <a:rPr lang="en-US" altLang="ko-KR" sz="1500">
+                <a:solidFill>
+                  <a:schemeClr val="tx1"/>
+                </a:solidFill>
+              </a:rPr>
+              <a:t>G1_in_1 : 0</a:t>
+            </a:r>
+          </a:p>
+          <a:p>
+            <a:pPr algn="ctr"/>
+            <a:r>
+              <a:rPr lang="en-US" altLang="ko-KR" sz="1500">
+                <a:solidFill>
+                  <a:schemeClr val="tx1"/>
+                </a:solidFill>
+              </a:rPr>
+              <a:t>G1_in_2 : 1</a:t>
+            </a:r>
+          </a:p>
+          <a:p>
+            <a:pPr algn="ctr"/>
+            <a:r>
+              <a:rPr lang="en-US" altLang="ko-KR" sz="1500">
+                <a:solidFill>
+                  <a:schemeClr val="tx1"/>
+                </a:solidFill>
+              </a:rPr>
+              <a:t>G1_in_3 : 1</a:t>
+            </a:r>
+          </a:p>
+          <a:p>
+            <a:pPr algn="ctr"/>
+            <a:r>
+              <a:rPr lang="en-US" altLang="ko-KR" sz="1500">
+                <a:solidFill>
+                  <a:schemeClr val="tx1"/>
+                </a:solidFill>
+              </a:rPr>
+              <a:t>G1_out</a:t>
+            </a:r>
+            <a:r>
+              <a:rPr lang="ko-KR" altLang="en-US" sz="1500">
+                <a:solidFill>
+                  <a:schemeClr val="tx1"/>
+                </a:solidFill>
+              </a:rPr>
+              <a:t> </a:t>
+            </a:r>
+            <a:r>
+              <a:rPr lang="en-US" altLang="ko-KR" sz="1500">
+                <a:solidFill>
+                  <a:schemeClr val="tx1"/>
+                </a:solidFill>
+              </a:rPr>
+              <a:t>:</a:t>
+            </a:r>
+            <a:r>
+              <a:rPr lang="ko-KR" altLang="en-US" sz="1500">
+                <a:solidFill>
+                  <a:schemeClr val="tx1"/>
+                </a:solidFill>
+              </a:rPr>
+              <a:t> </a:t>
+            </a:r>
+            <a:r>
+              <a:rPr lang="en-US" altLang="ko-KR" sz="1500">
+                <a:solidFill>
+                  <a:schemeClr val="tx1"/>
+                </a:solidFill>
+              </a:rPr>
+              <a:t>1</a:t>
+            </a:r>
+          </a:p>
+          <a:p>
+            <a:pPr algn="ctr"/>
+            <a:endParaRPr lang="en-US" altLang="ko-KR" sz="1500">
+              <a:solidFill>
+                <a:schemeClr val="tx1"/>
+              </a:solidFill>
+            </a:endParaRPr>
+          </a:p>
+          <a:p>
+            <a:pPr algn="ctr"/>
+            <a:r>
+              <a:rPr lang="en-US" altLang="ko-KR" sz="1500">
+                <a:solidFill>
+                  <a:srgbClr val="FF0000"/>
+                </a:solidFill>
+              </a:rPr>
+              <a:t>G2_in_1 : 1</a:t>
+            </a:r>
+          </a:p>
+          <a:p>
+            <a:pPr algn="ctr"/>
+            <a:r>
+              <a:rPr lang="en-US" altLang="ko-KR" sz="1500">
+                <a:solidFill>
+                  <a:schemeClr val="tx1"/>
+                </a:solidFill>
+              </a:rPr>
+              <a:t>G2_in_2 : 1</a:t>
+            </a:r>
+          </a:p>
+          <a:p>
+            <a:pPr algn="ctr"/>
+            <a:r>
+              <a:rPr lang="en-US" altLang="ko-KR" sz="1500">
+                <a:solidFill>
+                  <a:schemeClr val="tx1"/>
+                </a:solidFill>
+              </a:rPr>
+              <a:t>G2_in_3 : 1</a:t>
+            </a:r>
+          </a:p>
+          <a:p>
+            <a:pPr algn="ctr"/>
+            <a:r>
+              <a:rPr lang="en-US" altLang="ko-KR" sz="1500">
+                <a:solidFill>
+                  <a:schemeClr val="tx1"/>
+                </a:solidFill>
+              </a:rPr>
+              <a:t>G2_out : 1</a:t>
+            </a:r>
+          </a:p>
+          <a:p>
+            <a:pPr algn="ctr"/>
+            <a:endParaRPr lang="en-US" altLang="ko-KR" sz="1500">
+              <a:solidFill>
+                <a:schemeClr val="tx1"/>
+              </a:solidFill>
+            </a:endParaRPr>
+          </a:p>
+          <a:p>
+            <a:pPr algn="ctr"/>
+            <a:r>
+              <a:rPr lang="en-US" altLang="ko-KR" sz="1500">
+                <a:solidFill>
+                  <a:schemeClr val="tx1"/>
+                </a:solidFill>
+              </a:rPr>
+              <a:t>G3_in_1 : 1</a:t>
+            </a:r>
+          </a:p>
+          <a:p>
+            <a:pPr algn="ctr"/>
+            <a:r>
+              <a:rPr lang="en-US" altLang="ko-KR" sz="1500">
+                <a:solidFill>
+                  <a:schemeClr val="tx1"/>
+                </a:solidFill>
+              </a:rPr>
+              <a:t>G3_in_2 : 0</a:t>
+            </a:r>
+          </a:p>
+          <a:p>
+            <a:pPr algn="ctr"/>
+            <a:r>
+              <a:rPr lang="en-US" altLang="ko-KR" sz="1500">
+                <a:solidFill>
+                  <a:schemeClr val="tx1"/>
+                </a:solidFill>
+              </a:rPr>
+              <a:t>G3_out : 1</a:t>
+            </a:r>
+          </a:p>
+          <a:p>
+            <a:pPr algn="ctr"/>
+            <a:endParaRPr lang="en-US" altLang="ko-KR" sz="1500">
+              <a:solidFill>
+                <a:schemeClr val="tx1"/>
+              </a:solidFill>
+            </a:endParaRPr>
+          </a:p>
+          <a:p>
+            <a:pPr algn="ctr"/>
+            <a:r>
+              <a:rPr lang="en-US" altLang="ko-KR" sz="1500">
+                <a:solidFill>
+                  <a:schemeClr val="tx1"/>
+                </a:solidFill>
+              </a:rPr>
+              <a:t>G4_in_1 : 1</a:t>
+            </a:r>
+          </a:p>
+          <a:p>
+            <a:pPr algn="ctr"/>
+            <a:r>
+              <a:rPr lang="en-US" altLang="ko-KR" sz="1500">
+                <a:solidFill>
+                  <a:schemeClr val="tx1"/>
+                </a:solidFill>
+              </a:rPr>
+              <a:t>G4_in_2 : 1</a:t>
+            </a:r>
+          </a:p>
+          <a:p>
+            <a:pPr algn="ctr"/>
+            <a:r>
+              <a:rPr lang="en-US" altLang="ko-KR" sz="1500">
+                <a:solidFill>
+                  <a:schemeClr val="tx1"/>
+                </a:solidFill>
+              </a:rPr>
+              <a:t>G4_out : 0</a:t>
+            </a:r>
+          </a:p>
+          <a:p>
+            <a:pPr algn="ctr"/>
+            <a:endParaRPr lang="en-US" altLang="ko-KR" sz="1500">
+              <a:solidFill>
+                <a:schemeClr val="tx1"/>
+              </a:solidFill>
+            </a:endParaRPr>
+          </a:p>
+          <a:p>
+            <a:pPr algn="ctr"/>
+            <a:r>
+              <a:rPr lang="en-US" altLang="ko-KR" sz="1500">
+                <a:solidFill>
+                  <a:schemeClr val="tx1"/>
+                </a:solidFill>
+              </a:rPr>
+              <a:t>Q : 1</a:t>
+            </a:r>
+          </a:p>
+          <a:p>
+            <a:pPr algn="ctr"/>
+            <a:r>
+              <a:rPr lang="en-US" altLang="ko-KR" sz="1500">
+                <a:solidFill>
+                  <a:schemeClr val="tx1"/>
+                </a:solidFill>
+              </a:rPr>
+              <a:t>Q’ : 0</a:t>
+            </a:r>
+          </a:p>
+        </p:txBody>
+      </p:sp>
+      <p:sp>
+        <p:nvSpPr>
+          <p:cNvPr id="47" name="직사각형 46">
+            <a:extLst>
+              <a:ext uri="{FF2B5EF4-FFF2-40B4-BE49-F238E27FC236}">
+                <a16:creationId xmlns:a16="http://schemas.microsoft.com/office/drawing/2014/main" id="{F647E743-778A-6A54-1FB4-00947C877AD3}"/>
+              </a:ext>
+            </a:extLst>
+          </p:cNvPr>
+          <p:cNvSpPr/>
+          <p:nvPr/>
+        </p:nvSpPr>
+        <p:spPr>
+          <a:xfrm>
+            <a:off x="6572250" y="447675"/>
+            <a:ext cx="1504950" cy="5962650"/>
+          </a:xfrm>
+          <a:prstGeom prst="rect">
+            <a:avLst/>
+          </a:prstGeom>
+          <a:solidFill>
+            <a:schemeClr val="bg1"/>
+          </a:solidFill>
+          <a:ln w="28575">
+            <a:solidFill>
+              <a:schemeClr val="tx1"/>
+            </a:solidFill>
+          </a:ln>
+        </p:spPr>
+        <p:style>
+          <a:lnRef idx="2">
+            <a:schemeClr val="accent1">
+              <a:shade val="15000"/>
+            </a:schemeClr>
+          </a:lnRef>
+          <a:fillRef idx="1">
+            <a:schemeClr val="accent1"/>
+          </a:fillRef>
+          <a:effectRef idx="0">
+            <a:schemeClr val="accent1"/>
+          </a:effectRef>
+          <a:fontRef idx="minor">
+            <a:schemeClr val="lt1"/>
+          </a:fontRef>
+        </p:style>
+        <p:txBody>
+          <a:bodyPr rtlCol="0" anchor="ctr"/>
+          <a:lstStyle/>
+          <a:p>
+            <a:pPr algn="ctr"/>
+            <a:r>
+              <a:rPr lang="en-US" altLang="ko-KR" sz="1500">
+                <a:solidFill>
+                  <a:schemeClr val="tx1"/>
+                </a:solidFill>
+              </a:rPr>
+              <a:t>J : 1</a:t>
+            </a:r>
+          </a:p>
+          <a:p>
+            <a:pPr algn="ctr"/>
+            <a:r>
+              <a:rPr lang="en-US" altLang="ko-KR" sz="1500">
+                <a:solidFill>
+                  <a:schemeClr val="tx1"/>
+                </a:solidFill>
+              </a:rPr>
+              <a:t>en : 1</a:t>
+            </a:r>
+          </a:p>
+          <a:p>
+            <a:pPr algn="ctr"/>
+            <a:r>
+              <a:rPr lang="en-US" altLang="ko-KR" sz="1500">
+                <a:solidFill>
+                  <a:schemeClr val="tx1"/>
+                </a:solidFill>
+              </a:rPr>
+              <a:t>K : 1</a:t>
+            </a:r>
+          </a:p>
+          <a:p>
+            <a:pPr algn="ctr"/>
+            <a:endParaRPr lang="en-US" altLang="ko-KR" sz="1500">
+              <a:solidFill>
+                <a:schemeClr val="tx1"/>
+              </a:solidFill>
+            </a:endParaRPr>
+          </a:p>
+          <a:p>
+            <a:pPr algn="ctr"/>
+            <a:r>
+              <a:rPr lang="en-US" altLang="ko-KR" sz="1500">
+                <a:solidFill>
+                  <a:schemeClr val="tx1"/>
+                </a:solidFill>
+              </a:rPr>
+              <a:t>G1_in_1 : 0</a:t>
+            </a:r>
+          </a:p>
+          <a:p>
+            <a:pPr algn="ctr"/>
+            <a:r>
+              <a:rPr lang="en-US" altLang="ko-KR" sz="1500">
+                <a:solidFill>
+                  <a:schemeClr val="tx1"/>
+                </a:solidFill>
+              </a:rPr>
+              <a:t>G1_in_2 : 1</a:t>
+            </a:r>
+          </a:p>
+          <a:p>
+            <a:pPr algn="ctr"/>
+            <a:r>
+              <a:rPr lang="en-US" altLang="ko-KR" sz="1500">
+                <a:solidFill>
+                  <a:schemeClr val="tx1"/>
+                </a:solidFill>
+              </a:rPr>
+              <a:t>G1_in_3 : 1</a:t>
+            </a:r>
+          </a:p>
+          <a:p>
+            <a:pPr algn="ctr"/>
+            <a:r>
+              <a:rPr lang="en-US" altLang="ko-KR" sz="1500">
+                <a:solidFill>
+                  <a:schemeClr val="tx1"/>
+                </a:solidFill>
+              </a:rPr>
+              <a:t>G1_out</a:t>
+            </a:r>
+            <a:r>
+              <a:rPr lang="ko-KR" altLang="en-US" sz="1500">
+                <a:solidFill>
+                  <a:schemeClr val="tx1"/>
+                </a:solidFill>
+              </a:rPr>
+              <a:t> </a:t>
+            </a:r>
+            <a:r>
+              <a:rPr lang="en-US" altLang="ko-KR" sz="1500">
+                <a:solidFill>
+                  <a:schemeClr val="tx1"/>
+                </a:solidFill>
+              </a:rPr>
+              <a:t>:</a:t>
+            </a:r>
+            <a:r>
+              <a:rPr lang="ko-KR" altLang="en-US" sz="1500">
+                <a:solidFill>
+                  <a:schemeClr val="tx1"/>
+                </a:solidFill>
+              </a:rPr>
+              <a:t> </a:t>
+            </a:r>
+            <a:r>
+              <a:rPr lang="en-US" altLang="ko-KR" sz="1500">
+                <a:solidFill>
+                  <a:schemeClr val="tx1"/>
+                </a:solidFill>
+              </a:rPr>
+              <a:t>1</a:t>
+            </a:r>
+          </a:p>
+          <a:p>
+            <a:pPr algn="ctr"/>
+            <a:endParaRPr lang="en-US" altLang="ko-KR" sz="1500">
+              <a:solidFill>
+                <a:schemeClr val="tx1"/>
+              </a:solidFill>
+            </a:endParaRPr>
+          </a:p>
+          <a:p>
+            <a:pPr algn="ctr"/>
+            <a:r>
+              <a:rPr lang="en-US" altLang="ko-KR" sz="1500">
+                <a:solidFill>
+                  <a:srgbClr val="0000FF"/>
+                </a:solidFill>
+              </a:rPr>
+              <a:t>G2_in_1 : 1</a:t>
+            </a:r>
+          </a:p>
+          <a:p>
+            <a:pPr algn="ctr"/>
+            <a:r>
+              <a:rPr lang="en-US" altLang="ko-KR" sz="1500">
+                <a:solidFill>
+                  <a:schemeClr val="tx1"/>
+                </a:solidFill>
+              </a:rPr>
+              <a:t>G2_in_2 : 1</a:t>
+            </a:r>
+          </a:p>
+          <a:p>
+            <a:pPr algn="ctr"/>
+            <a:r>
+              <a:rPr lang="en-US" altLang="ko-KR" sz="1500">
+                <a:solidFill>
+                  <a:schemeClr val="tx1"/>
+                </a:solidFill>
+              </a:rPr>
+              <a:t>G2_in_3 : 1</a:t>
+            </a:r>
+          </a:p>
+          <a:p>
+            <a:pPr algn="ctr"/>
+            <a:r>
+              <a:rPr lang="en-US" altLang="ko-KR" sz="1500">
+                <a:solidFill>
+                  <a:srgbClr val="FF0000"/>
+                </a:solidFill>
+              </a:rPr>
+              <a:t>G2_out : 0</a:t>
+            </a:r>
+          </a:p>
+          <a:p>
+            <a:pPr algn="ctr"/>
+            <a:endParaRPr lang="en-US" altLang="ko-KR" sz="1500">
+              <a:solidFill>
+                <a:schemeClr val="tx1"/>
+              </a:solidFill>
+            </a:endParaRPr>
+          </a:p>
+          <a:p>
+            <a:pPr algn="ctr"/>
+            <a:r>
+              <a:rPr lang="en-US" altLang="ko-KR" sz="1500">
+                <a:solidFill>
+                  <a:schemeClr val="tx1"/>
+                </a:solidFill>
+              </a:rPr>
+              <a:t>G3_in_1 : 1</a:t>
+            </a:r>
+          </a:p>
+          <a:p>
+            <a:pPr algn="ctr"/>
+            <a:r>
+              <a:rPr lang="en-US" altLang="ko-KR" sz="1500">
+                <a:solidFill>
+                  <a:schemeClr val="tx1"/>
+                </a:solidFill>
+              </a:rPr>
+              <a:t>G3_in_2 : 0</a:t>
+            </a:r>
+          </a:p>
+          <a:p>
+            <a:pPr algn="ctr"/>
+            <a:r>
+              <a:rPr lang="en-US" altLang="ko-KR" sz="1500">
+                <a:solidFill>
+                  <a:schemeClr val="tx1"/>
+                </a:solidFill>
+              </a:rPr>
+              <a:t>G3_out : 1</a:t>
+            </a:r>
+          </a:p>
+          <a:p>
+            <a:pPr algn="ctr"/>
+            <a:endParaRPr lang="en-US" altLang="ko-KR" sz="1500">
+              <a:solidFill>
+                <a:schemeClr val="tx1"/>
+              </a:solidFill>
+            </a:endParaRPr>
+          </a:p>
+          <a:p>
+            <a:pPr algn="ctr"/>
+            <a:r>
+              <a:rPr lang="en-US" altLang="ko-KR" sz="1500">
+                <a:solidFill>
+                  <a:schemeClr val="tx1"/>
+                </a:solidFill>
+              </a:rPr>
+              <a:t>G4_in_1 : 1</a:t>
+            </a:r>
+          </a:p>
+          <a:p>
+            <a:pPr algn="ctr"/>
+            <a:r>
+              <a:rPr lang="en-US" altLang="ko-KR" sz="1500">
+                <a:solidFill>
+                  <a:srgbClr val="FF0000"/>
+                </a:solidFill>
+              </a:rPr>
+              <a:t>G4_in_2 : 0</a:t>
+            </a:r>
+          </a:p>
+          <a:p>
+            <a:pPr algn="ctr"/>
+            <a:r>
+              <a:rPr lang="en-US" altLang="ko-KR" sz="1500">
+                <a:solidFill>
+                  <a:schemeClr val="tx1"/>
+                </a:solidFill>
+              </a:rPr>
+              <a:t>G4_out : 0</a:t>
+            </a:r>
+          </a:p>
+          <a:p>
+            <a:pPr algn="ctr"/>
+            <a:endParaRPr lang="en-US" altLang="ko-KR" sz="1500">
+              <a:solidFill>
+                <a:schemeClr val="tx1"/>
+              </a:solidFill>
+            </a:endParaRPr>
+          </a:p>
+          <a:p>
+            <a:pPr algn="ctr"/>
+            <a:r>
+              <a:rPr lang="en-US" altLang="ko-KR" sz="1500">
+                <a:solidFill>
+                  <a:schemeClr val="tx1"/>
+                </a:solidFill>
+              </a:rPr>
+              <a:t>Q : 1</a:t>
+            </a:r>
+          </a:p>
+          <a:p>
+            <a:pPr algn="ctr"/>
+            <a:r>
+              <a:rPr lang="en-US" altLang="ko-KR" sz="1500">
+                <a:solidFill>
+                  <a:schemeClr val="tx1"/>
+                </a:solidFill>
+              </a:rPr>
+              <a:t>Q’ : 0</a:t>
+            </a:r>
+          </a:p>
+        </p:txBody>
+      </p:sp>
+      <p:cxnSp>
+        <p:nvCxnSpPr>
+          <p:cNvPr id="49" name="직선 연결선 48">
+            <a:extLst>
+              <a:ext uri="{FF2B5EF4-FFF2-40B4-BE49-F238E27FC236}">
+                <a16:creationId xmlns:a16="http://schemas.microsoft.com/office/drawing/2014/main" id="{864A7639-D738-620C-CC91-5301BD2C47E6}"/>
+              </a:ext>
+            </a:extLst>
+          </p:cNvPr>
+          <p:cNvCxnSpPr>
+            <a:stCxn id="10" idx="3"/>
+            <a:endCxn id="47" idx="1"/>
+          </p:cNvCxnSpPr>
+          <p:nvPr/>
+        </p:nvCxnSpPr>
+        <p:spPr>
+          <a:xfrm>
+            <a:off x="3181350" y="3429000"/>
+            <a:ext cx="3390900" cy="0"/>
+          </a:xfrm>
+          <a:prstGeom prst="line">
+            <a:avLst/>
+          </a:prstGeom>
+          <a:ln w="28575"/>
+        </p:spPr>
+        <p:style>
+          <a:lnRef idx="2">
+            <a:schemeClr val="dk1"/>
+          </a:lnRef>
+          <a:fillRef idx="0">
+            <a:schemeClr val="dk1"/>
+          </a:fillRef>
+          <a:effectRef idx="1">
+            <a:schemeClr val="dk1"/>
+          </a:effectRef>
+          <a:fontRef idx="minor">
+            <a:schemeClr val="tx1"/>
+          </a:fontRef>
+        </p:style>
+      </p:cxnSp>
+      <p:sp>
+        <p:nvSpPr>
+          <p:cNvPr id="57" name="이등변 삼각형 56">
+            <a:extLst>
+              <a:ext uri="{FF2B5EF4-FFF2-40B4-BE49-F238E27FC236}">
+                <a16:creationId xmlns:a16="http://schemas.microsoft.com/office/drawing/2014/main" id="{B6B24F4A-AC88-3C6D-9352-C8B226B7DE3B}"/>
+              </a:ext>
+            </a:extLst>
+          </p:cNvPr>
+          <p:cNvSpPr/>
+          <p:nvPr/>
+        </p:nvSpPr>
+        <p:spPr>
+          <a:xfrm rot="5400000">
+            <a:off x="6329362" y="3314700"/>
+            <a:ext cx="238125" cy="228600"/>
+          </a:xfrm>
+          <a:prstGeom prst="triangle">
+            <a:avLst/>
+          </a:prstGeom>
+          <a:noFill/>
+          <a:ln w="28575"/>
+        </p:spPr>
+        <p:style>
+          <a:lnRef idx="2">
+            <a:schemeClr val="accent1">
+              <a:shade val="15000"/>
+            </a:schemeClr>
+          </a:lnRef>
+          <a:fillRef idx="1">
+            <a:schemeClr val="accent1"/>
+          </a:fillRef>
+          <a:effectRef idx="0">
+            <a:schemeClr val="accent1"/>
+          </a:effectRef>
+          <a:fontRef idx="minor">
+            <a:schemeClr val="lt1"/>
+          </a:fontRef>
+        </p:style>
+        <p:txBody>
+          <a:bodyPr rtlCol="0" anchor="ctr"/>
+          <a:lstStyle/>
+          <a:p>
+            <a:pPr algn="ctr"/>
+            <a:endParaRPr lang="ko-KR" altLang="en-US"/>
+          </a:p>
+        </p:txBody>
+      </p:sp>
+      <p:sp>
+        <p:nvSpPr>
+          <p:cNvPr id="58" name="TextBox 57">
+            <a:extLst>
+              <a:ext uri="{FF2B5EF4-FFF2-40B4-BE49-F238E27FC236}">
+                <a16:creationId xmlns:a16="http://schemas.microsoft.com/office/drawing/2014/main" id="{08C4206D-067C-1BBA-7327-A67823CE3DD9}"/>
+              </a:ext>
+            </a:extLst>
+          </p:cNvPr>
+          <p:cNvSpPr txBox="1"/>
+          <p:nvPr/>
+        </p:nvSpPr>
+        <p:spPr>
+          <a:xfrm>
+            <a:off x="3400425" y="447675"/>
+            <a:ext cx="2952750" cy="369332"/>
+          </a:xfrm>
+          <a:prstGeom prst="rect">
+            <a:avLst/>
+          </a:prstGeom>
+          <a:noFill/>
+        </p:spPr>
+        <p:txBody>
+          <a:bodyPr wrap="square" rtlCol="0">
+            <a:spAutoFit/>
+          </a:bodyPr>
+          <a:lstStyle/>
+          <a:p>
+            <a:r>
+              <a:rPr lang="en-US" altLang="ko-KR"/>
+              <a:t>Queue : [</a:t>
+            </a:r>
+            <a:r>
+              <a:rPr lang="en-US" altLang="ko-KR">
+                <a:solidFill>
+                  <a:srgbClr val="FF0000"/>
+                </a:solidFill>
+              </a:rPr>
+              <a:t>G2</a:t>
+            </a:r>
+            <a:r>
+              <a:rPr lang="en-US" altLang="ko-KR"/>
+              <a:t>]</a:t>
+            </a:r>
+            <a:endParaRPr lang="ko-KR" altLang="en-US"/>
+          </a:p>
+        </p:txBody>
+      </p:sp>
+      <p:sp>
+        <p:nvSpPr>
+          <p:cNvPr id="61" name="TextBox 60">
+            <a:extLst>
+              <a:ext uri="{FF2B5EF4-FFF2-40B4-BE49-F238E27FC236}">
+                <a16:creationId xmlns:a16="http://schemas.microsoft.com/office/drawing/2014/main" id="{8086F780-BCC1-2BF4-3104-396833EC1D5E}"/>
+              </a:ext>
+            </a:extLst>
+          </p:cNvPr>
+          <p:cNvSpPr txBox="1"/>
+          <p:nvPr/>
+        </p:nvSpPr>
+        <p:spPr>
+          <a:xfrm>
+            <a:off x="8296275" y="447675"/>
+            <a:ext cx="2952750" cy="369332"/>
+          </a:xfrm>
+          <a:prstGeom prst="rect">
+            <a:avLst/>
+          </a:prstGeom>
+          <a:noFill/>
+        </p:spPr>
+        <p:txBody>
+          <a:bodyPr wrap="square" rtlCol="0">
+            <a:spAutoFit/>
+          </a:bodyPr>
+          <a:lstStyle/>
+          <a:p>
+            <a:r>
+              <a:rPr lang="en-US" altLang="ko-KR"/>
+              <a:t>Queue : [G4]</a:t>
+            </a:r>
+            <a:endParaRPr lang="ko-KR" altLang="en-US"/>
+          </a:p>
+        </p:txBody>
+      </p:sp>
+    </p:spTree>
+    <p:extLst>
+      <p:ext uri="{BB962C8B-B14F-4D97-AF65-F5344CB8AC3E}">
+        <p14:creationId xmlns:p14="http://schemas.microsoft.com/office/powerpoint/2010/main" val="788882992"/>
+      </p:ext>
+    </p:extLst>
+  </p:cSld>
+  <p:clrMapOvr>
+    <a:masterClrMapping/>
+  </p:clrMapOvr>
+</p:sld>
+</file>
+
+<file path=ppt/slides/slide28.xml><?xml version="1.0" encoding="utf-8"?>
+<p:sld xmlns:a="http://schemas.openxmlformats.org/drawingml/2006/main" xmlns:r="http://schemas.openxmlformats.org/officeDocument/2006/relationships" xmlns:p="http://schemas.openxmlformats.org/presentationml/2006/main">
+  <p:cSld>
+    <p:spTree>
+      <p:nvGrpSpPr>
+        <p:cNvPr id="1" name="">
+          <a:extLst>
+            <a:ext uri="{FF2B5EF4-FFF2-40B4-BE49-F238E27FC236}">
+              <a16:creationId xmlns:a16="http://schemas.microsoft.com/office/drawing/2014/main" id="{6911FA08-5D47-BC64-06AF-CA5D0170AD9C}"/>
+            </a:ext>
+          </a:extLst>
+        </p:cNvPr>
+        <p:cNvGrpSpPr/>
+        <p:nvPr/>
+      </p:nvGrpSpPr>
+      <p:grpSpPr>
+        <a:xfrm>
+          <a:off x="0" y="0"/>
+          <a:ext cx="0" cy="0"/>
+          <a:chOff x="0" y="0"/>
+          <a:chExt cx="0" cy="0"/>
+        </a:xfrm>
+      </p:grpSpPr>
+      <p:sp>
+        <p:nvSpPr>
+          <p:cNvPr id="10" name="직사각형 9">
+            <a:extLst>
+              <a:ext uri="{FF2B5EF4-FFF2-40B4-BE49-F238E27FC236}">
+                <a16:creationId xmlns:a16="http://schemas.microsoft.com/office/drawing/2014/main" id="{3B8A30D8-0632-19F1-2A59-40916F912F50}"/>
+              </a:ext>
+            </a:extLst>
+          </p:cNvPr>
+          <p:cNvSpPr/>
+          <p:nvPr/>
+        </p:nvSpPr>
+        <p:spPr>
+          <a:xfrm>
+            <a:off x="1676400" y="447675"/>
+            <a:ext cx="1504950" cy="5962650"/>
+          </a:xfrm>
+          <a:prstGeom prst="rect">
+            <a:avLst/>
+          </a:prstGeom>
+          <a:solidFill>
+            <a:schemeClr val="bg1"/>
+          </a:solidFill>
+          <a:ln w="28575">
+            <a:solidFill>
+              <a:schemeClr val="tx1"/>
+            </a:solidFill>
+          </a:ln>
+        </p:spPr>
+        <p:style>
+          <a:lnRef idx="2">
+            <a:schemeClr val="accent1">
+              <a:shade val="15000"/>
+            </a:schemeClr>
+          </a:lnRef>
+          <a:fillRef idx="1">
+            <a:schemeClr val="accent1"/>
+          </a:fillRef>
+          <a:effectRef idx="0">
+            <a:schemeClr val="accent1"/>
+          </a:effectRef>
+          <a:fontRef idx="minor">
+            <a:schemeClr val="lt1"/>
+          </a:fontRef>
+        </p:style>
+        <p:txBody>
+          <a:bodyPr rtlCol="0" anchor="ctr"/>
+          <a:lstStyle/>
+          <a:p>
+            <a:pPr algn="ctr"/>
+            <a:r>
+              <a:rPr lang="en-US" altLang="ko-KR" sz="1500">
+                <a:solidFill>
+                  <a:schemeClr val="tx1"/>
+                </a:solidFill>
+              </a:rPr>
+              <a:t>J : 1</a:t>
+            </a:r>
+          </a:p>
+          <a:p>
+            <a:pPr algn="ctr"/>
+            <a:r>
+              <a:rPr lang="en-US" altLang="ko-KR" sz="1500">
+                <a:solidFill>
+                  <a:schemeClr val="tx1"/>
+                </a:solidFill>
+              </a:rPr>
+              <a:t>en : 1</a:t>
+            </a:r>
+          </a:p>
+          <a:p>
+            <a:pPr algn="ctr"/>
+            <a:r>
+              <a:rPr lang="en-US" altLang="ko-KR" sz="1500">
+                <a:solidFill>
+                  <a:schemeClr val="tx1"/>
+                </a:solidFill>
+              </a:rPr>
+              <a:t>K : 1</a:t>
+            </a:r>
+          </a:p>
+          <a:p>
+            <a:pPr algn="ctr"/>
+            <a:endParaRPr lang="en-US" altLang="ko-KR" sz="1500">
+              <a:solidFill>
+                <a:schemeClr val="tx1"/>
+              </a:solidFill>
+            </a:endParaRPr>
+          </a:p>
+          <a:p>
+            <a:pPr algn="ctr"/>
+            <a:r>
+              <a:rPr lang="en-US" altLang="ko-KR" sz="1500">
+                <a:solidFill>
+                  <a:schemeClr val="tx1"/>
+                </a:solidFill>
+              </a:rPr>
+              <a:t>G1_in_1 : 0</a:t>
+            </a:r>
+          </a:p>
+          <a:p>
+            <a:pPr algn="ctr"/>
+            <a:r>
+              <a:rPr lang="en-US" altLang="ko-KR" sz="1500">
+                <a:solidFill>
+                  <a:schemeClr val="tx1"/>
+                </a:solidFill>
+              </a:rPr>
+              <a:t>G1_in_2 : 1</a:t>
+            </a:r>
+          </a:p>
+          <a:p>
+            <a:pPr algn="ctr"/>
+            <a:r>
+              <a:rPr lang="en-US" altLang="ko-KR" sz="1500">
+                <a:solidFill>
+                  <a:schemeClr val="tx1"/>
+                </a:solidFill>
+              </a:rPr>
+              <a:t>G1_in_3 : 1</a:t>
+            </a:r>
+          </a:p>
+          <a:p>
+            <a:pPr algn="ctr"/>
+            <a:r>
+              <a:rPr lang="en-US" altLang="ko-KR" sz="1500">
+                <a:solidFill>
+                  <a:schemeClr val="tx1"/>
+                </a:solidFill>
+              </a:rPr>
+              <a:t>G1_out</a:t>
+            </a:r>
+            <a:r>
+              <a:rPr lang="ko-KR" altLang="en-US" sz="1500">
+                <a:solidFill>
+                  <a:schemeClr val="tx1"/>
+                </a:solidFill>
+              </a:rPr>
+              <a:t> </a:t>
+            </a:r>
+            <a:r>
+              <a:rPr lang="en-US" altLang="ko-KR" sz="1500">
+                <a:solidFill>
+                  <a:schemeClr val="tx1"/>
+                </a:solidFill>
+              </a:rPr>
+              <a:t>:</a:t>
+            </a:r>
+            <a:r>
+              <a:rPr lang="ko-KR" altLang="en-US" sz="1500">
+                <a:solidFill>
+                  <a:schemeClr val="tx1"/>
+                </a:solidFill>
+              </a:rPr>
+              <a:t> </a:t>
+            </a:r>
+            <a:r>
+              <a:rPr lang="en-US" altLang="ko-KR" sz="1500">
+                <a:solidFill>
+                  <a:schemeClr val="tx1"/>
+                </a:solidFill>
+              </a:rPr>
+              <a:t>1</a:t>
+            </a:r>
+          </a:p>
+          <a:p>
+            <a:pPr algn="ctr"/>
+            <a:endParaRPr lang="en-US" altLang="ko-KR" sz="1500">
+              <a:solidFill>
+                <a:schemeClr val="tx1"/>
+              </a:solidFill>
+            </a:endParaRPr>
+          </a:p>
+          <a:p>
+            <a:pPr algn="ctr"/>
+            <a:r>
+              <a:rPr lang="en-US" altLang="ko-KR" sz="1500">
+                <a:solidFill>
+                  <a:schemeClr val="tx1"/>
+                </a:solidFill>
+              </a:rPr>
+              <a:t>G2_in_1 : 1</a:t>
+            </a:r>
+          </a:p>
+          <a:p>
+            <a:pPr algn="ctr"/>
+            <a:r>
+              <a:rPr lang="en-US" altLang="ko-KR" sz="1500">
+                <a:solidFill>
+                  <a:schemeClr val="tx1"/>
+                </a:solidFill>
+              </a:rPr>
+              <a:t>G2_in_2 : 1</a:t>
+            </a:r>
+          </a:p>
+          <a:p>
+            <a:pPr algn="ctr"/>
+            <a:r>
+              <a:rPr lang="en-US" altLang="ko-KR" sz="1500">
+                <a:solidFill>
+                  <a:schemeClr val="tx1"/>
+                </a:solidFill>
+              </a:rPr>
+              <a:t>G2_in_3 : 1</a:t>
+            </a:r>
+          </a:p>
+          <a:p>
+            <a:pPr algn="ctr"/>
+            <a:r>
+              <a:rPr lang="en-US" altLang="ko-KR" sz="1500">
+                <a:solidFill>
+                  <a:schemeClr val="tx1"/>
+                </a:solidFill>
+              </a:rPr>
+              <a:t>G2_out : 0</a:t>
+            </a:r>
+          </a:p>
+          <a:p>
+            <a:pPr algn="ctr"/>
+            <a:endParaRPr lang="en-US" altLang="ko-KR" sz="1500">
+              <a:solidFill>
+                <a:schemeClr val="tx1"/>
+              </a:solidFill>
+            </a:endParaRPr>
+          </a:p>
+          <a:p>
+            <a:pPr algn="ctr"/>
+            <a:r>
+              <a:rPr lang="en-US" altLang="ko-KR" sz="1500">
+                <a:solidFill>
+                  <a:schemeClr val="tx1"/>
+                </a:solidFill>
+              </a:rPr>
+              <a:t>G3_in_1 : 1</a:t>
+            </a:r>
+          </a:p>
+          <a:p>
+            <a:pPr algn="ctr"/>
+            <a:r>
+              <a:rPr lang="en-US" altLang="ko-KR" sz="1500">
+                <a:solidFill>
+                  <a:schemeClr val="tx1"/>
+                </a:solidFill>
+              </a:rPr>
+              <a:t>G3_in_2 : 0</a:t>
+            </a:r>
+          </a:p>
+          <a:p>
+            <a:pPr algn="ctr"/>
+            <a:r>
+              <a:rPr lang="en-US" altLang="ko-KR" sz="1500">
+                <a:solidFill>
+                  <a:schemeClr val="tx1"/>
+                </a:solidFill>
+              </a:rPr>
+              <a:t>G3_out : 1</a:t>
+            </a:r>
+          </a:p>
+          <a:p>
+            <a:pPr algn="ctr"/>
+            <a:endParaRPr lang="en-US" altLang="ko-KR" sz="1500">
+              <a:solidFill>
+                <a:schemeClr val="tx1"/>
+              </a:solidFill>
+            </a:endParaRPr>
+          </a:p>
+          <a:p>
+            <a:pPr algn="ctr"/>
+            <a:r>
+              <a:rPr lang="en-US" altLang="ko-KR" sz="1500">
+                <a:solidFill>
+                  <a:schemeClr val="tx1"/>
+                </a:solidFill>
+              </a:rPr>
+              <a:t>G4_in_1 : 1</a:t>
+            </a:r>
+          </a:p>
+          <a:p>
+            <a:pPr algn="ctr"/>
+            <a:r>
+              <a:rPr lang="en-US" altLang="ko-KR" sz="1500">
+                <a:solidFill>
+                  <a:srgbClr val="FF0000"/>
+                </a:solidFill>
+              </a:rPr>
+              <a:t>G4_in_2 : 0</a:t>
+            </a:r>
+          </a:p>
+          <a:p>
+            <a:pPr algn="ctr"/>
+            <a:r>
+              <a:rPr lang="en-US" altLang="ko-KR" sz="1500">
+                <a:solidFill>
+                  <a:schemeClr val="tx1"/>
+                </a:solidFill>
+              </a:rPr>
+              <a:t>G4_out : 0</a:t>
+            </a:r>
+          </a:p>
+          <a:p>
+            <a:pPr algn="ctr"/>
+            <a:endParaRPr lang="en-US" altLang="ko-KR" sz="1500">
+              <a:solidFill>
+                <a:schemeClr val="tx1"/>
+              </a:solidFill>
+            </a:endParaRPr>
+          </a:p>
+          <a:p>
+            <a:pPr algn="ctr"/>
+            <a:r>
+              <a:rPr lang="en-US" altLang="ko-KR" sz="1500">
+                <a:solidFill>
+                  <a:schemeClr val="tx1"/>
+                </a:solidFill>
+              </a:rPr>
+              <a:t>Q : 1</a:t>
+            </a:r>
+          </a:p>
+          <a:p>
+            <a:pPr algn="ctr"/>
+            <a:r>
+              <a:rPr lang="en-US" altLang="ko-KR" sz="1500">
+                <a:solidFill>
+                  <a:schemeClr val="tx1"/>
+                </a:solidFill>
+              </a:rPr>
+              <a:t>Q’ : 0</a:t>
+            </a:r>
+          </a:p>
+        </p:txBody>
+      </p:sp>
+      <p:sp>
+        <p:nvSpPr>
+          <p:cNvPr id="47" name="직사각형 46">
+            <a:extLst>
+              <a:ext uri="{FF2B5EF4-FFF2-40B4-BE49-F238E27FC236}">
+                <a16:creationId xmlns:a16="http://schemas.microsoft.com/office/drawing/2014/main" id="{21380169-F40D-C2D0-AF00-6549DA74D933}"/>
+              </a:ext>
+            </a:extLst>
+          </p:cNvPr>
+          <p:cNvSpPr/>
+          <p:nvPr/>
+        </p:nvSpPr>
+        <p:spPr>
+          <a:xfrm>
+            <a:off x="6572250" y="447675"/>
+            <a:ext cx="1504950" cy="5962650"/>
+          </a:xfrm>
+          <a:prstGeom prst="rect">
+            <a:avLst/>
+          </a:prstGeom>
+          <a:solidFill>
+            <a:schemeClr val="bg1"/>
+          </a:solidFill>
+          <a:ln w="28575">
+            <a:solidFill>
+              <a:schemeClr val="tx1"/>
+            </a:solidFill>
+          </a:ln>
+        </p:spPr>
+        <p:style>
+          <a:lnRef idx="2">
+            <a:schemeClr val="accent1">
+              <a:shade val="15000"/>
+            </a:schemeClr>
+          </a:lnRef>
+          <a:fillRef idx="1">
+            <a:schemeClr val="accent1"/>
+          </a:fillRef>
+          <a:effectRef idx="0">
+            <a:schemeClr val="accent1"/>
+          </a:effectRef>
+          <a:fontRef idx="minor">
+            <a:schemeClr val="lt1"/>
+          </a:fontRef>
+        </p:style>
+        <p:txBody>
+          <a:bodyPr rtlCol="0" anchor="ctr"/>
+          <a:lstStyle/>
+          <a:p>
+            <a:pPr algn="ctr"/>
+            <a:r>
+              <a:rPr lang="en-US" altLang="ko-KR" sz="1500">
+                <a:solidFill>
+                  <a:schemeClr val="tx1"/>
+                </a:solidFill>
+              </a:rPr>
+              <a:t>J : 1</a:t>
+            </a:r>
+          </a:p>
+          <a:p>
+            <a:pPr algn="ctr"/>
+            <a:r>
+              <a:rPr lang="en-US" altLang="ko-KR" sz="1500">
+                <a:solidFill>
+                  <a:schemeClr val="tx1"/>
+                </a:solidFill>
+              </a:rPr>
+              <a:t>en : 1</a:t>
+            </a:r>
+          </a:p>
+          <a:p>
+            <a:pPr algn="ctr"/>
+            <a:r>
+              <a:rPr lang="en-US" altLang="ko-KR" sz="1500">
+                <a:solidFill>
+                  <a:schemeClr val="tx1"/>
+                </a:solidFill>
+              </a:rPr>
+              <a:t>K : 1</a:t>
+            </a:r>
+          </a:p>
+          <a:p>
+            <a:pPr algn="ctr"/>
+            <a:endParaRPr lang="en-US" altLang="ko-KR" sz="1500">
+              <a:solidFill>
+                <a:schemeClr val="tx1"/>
+              </a:solidFill>
+            </a:endParaRPr>
+          </a:p>
+          <a:p>
+            <a:pPr algn="ctr"/>
+            <a:r>
+              <a:rPr lang="en-US" altLang="ko-KR" sz="1500">
+                <a:solidFill>
+                  <a:srgbClr val="FF0000"/>
+                </a:solidFill>
+              </a:rPr>
+              <a:t>G1_in_1 : 1</a:t>
+            </a:r>
+          </a:p>
+          <a:p>
+            <a:pPr algn="ctr"/>
+            <a:r>
+              <a:rPr lang="en-US" altLang="ko-KR" sz="1500">
+                <a:solidFill>
+                  <a:schemeClr val="tx1"/>
+                </a:solidFill>
+              </a:rPr>
+              <a:t>G1_in_2 : 1</a:t>
+            </a:r>
+          </a:p>
+          <a:p>
+            <a:pPr algn="ctr"/>
+            <a:r>
+              <a:rPr lang="en-US" altLang="ko-KR" sz="1500">
+                <a:solidFill>
+                  <a:schemeClr val="tx1"/>
+                </a:solidFill>
+              </a:rPr>
+              <a:t>G1_in_3 : 1</a:t>
+            </a:r>
+          </a:p>
+          <a:p>
+            <a:pPr algn="ctr"/>
+            <a:r>
+              <a:rPr lang="en-US" altLang="ko-KR" sz="1500">
+                <a:solidFill>
+                  <a:schemeClr val="tx1"/>
+                </a:solidFill>
+              </a:rPr>
+              <a:t>G1_out</a:t>
+            </a:r>
+            <a:r>
+              <a:rPr lang="ko-KR" altLang="en-US" sz="1500">
+                <a:solidFill>
+                  <a:schemeClr val="tx1"/>
+                </a:solidFill>
+              </a:rPr>
+              <a:t> </a:t>
+            </a:r>
+            <a:r>
+              <a:rPr lang="en-US" altLang="ko-KR" sz="1500">
+                <a:solidFill>
+                  <a:schemeClr val="tx1"/>
+                </a:solidFill>
+              </a:rPr>
+              <a:t>:</a:t>
+            </a:r>
+            <a:r>
+              <a:rPr lang="ko-KR" altLang="en-US" sz="1500">
+                <a:solidFill>
+                  <a:schemeClr val="tx1"/>
+                </a:solidFill>
+              </a:rPr>
+              <a:t> </a:t>
+            </a:r>
+            <a:r>
+              <a:rPr lang="en-US" altLang="ko-KR" sz="1500">
+                <a:solidFill>
+                  <a:schemeClr val="tx1"/>
+                </a:solidFill>
+              </a:rPr>
+              <a:t>1</a:t>
+            </a:r>
+          </a:p>
+          <a:p>
+            <a:pPr algn="ctr"/>
+            <a:endParaRPr lang="en-US" altLang="ko-KR" sz="1500">
+              <a:solidFill>
+                <a:schemeClr val="tx1"/>
+              </a:solidFill>
+            </a:endParaRPr>
+          </a:p>
+          <a:p>
+            <a:pPr algn="ctr"/>
+            <a:r>
+              <a:rPr lang="en-US" altLang="ko-KR" sz="1500">
+                <a:solidFill>
+                  <a:schemeClr val="tx1"/>
+                </a:solidFill>
+              </a:rPr>
+              <a:t>G2_in_1 : 1</a:t>
+            </a:r>
+          </a:p>
+          <a:p>
+            <a:pPr algn="ctr"/>
+            <a:r>
+              <a:rPr lang="en-US" altLang="ko-KR" sz="1500">
+                <a:solidFill>
+                  <a:schemeClr val="tx1"/>
+                </a:solidFill>
+              </a:rPr>
+              <a:t>G2_in_2 : 1</a:t>
+            </a:r>
+          </a:p>
+          <a:p>
+            <a:pPr algn="ctr"/>
+            <a:r>
+              <a:rPr lang="en-US" altLang="ko-KR" sz="1500">
+                <a:solidFill>
+                  <a:schemeClr val="tx1"/>
+                </a:solidFill>
+              </a:rPr>
+              <a:t>G2_in_3 : 1</a:t>
+            </a:r>
+          </a:p>
+          <a:p>
+            <a:pPr algn="ctr"/>
+            <a:r>
+              <a:rPr lang="en-US" altLang="ko-KR" sz="1500">
+                <a:solidFill>
+                  <a:schemeClr val="tx1"/>
+                </a:solidFill>
+              </a:rPr>
+              <a:t>G2_out : 0</a:t>
+            </a:r>
+          </a:p>
+          <a:p>
+            <a:pPr algn="ctr"/>
+            <a:endParaRPr lang="en-US" altLang="ko-KR" sz="1500">
+              <a:solidFill>
+                <a:schemeClr val="tx1"/>
+              </a:solidFill>
+            </a:endParaRPr>
+          </a:p>
+          <a:p>
+            <a:pPr algn="ctr"/>
+            <a:r>
+              <a:rPr lang="en-US" altLang="ko-KR" sz="1500">
+                <a:solidFill>
+                  <a:schemeClr val="tx1"/>
+                </a:solidFill>
+              </a:rPr>
+              <a:t>G3_in_1 : 1</a:t>
+            </a:r>
+          </a:p>
+          <a:p>
+            <a:pPr algn="ctr"/>
+            <a:r>
+              <a:rPr lang="en-US" altLang="ko-KR" sz="1500">
+                <a:solidFill>
+                  <a:srgbClr val="FF0000"/>
+                </a:solidFill>
+              </a:rPr>
+              <a:t>G3_in_2 : 1</a:t>
+            </a:r>
+          </a:p>
+          <a:p>
+            <a:pPr algn="ctr"/>
+            <a:r>
+              <a:rPr lang="en-US" altLang="ko-KR" sz="1500">
+                <a:solidFill>
+                  <a:schemeClr val="tx1"/>
+                </a:solidFill>
+              </a:rPr>
+              <a:t>G3_out : 1</a:t>
+            </a:r>
+          </a:p>
+          <a:p>
+            <a:pPr algn="ctr"/>
+            <a:endParaRPr lang="en-US" altLang="ko-KR" sz="1500">
+              <a:solidFill>
+                <a:schemeClr val="tx1"/>
+              </a:solidFill>
+            </a:endParaRPr>
+          </a:p>
+          <a:p>
+            <a:pPr algn="ctr"/>
+            <a:r>
+              <a:rPr lang="en-US" altLang="ko-KR" sz="1500">
+                <a:solidFill>
+                  <a:schemeClr val="tx1"/>
+                </a:solidFill>
+              </a:rPr>
+              <a:t>G4_in_1 : 1</a:t>
+            </a:r>
+          </a:p>
+          <a:p>
+            <a:pPr algn="ctr"/>
+            <a:r>
+              <a:rPr lang="en-US" altLang="ko-KR" sz="1500">
+                <a:solidFill>
+                  <a:srgbClr val="0000FF"/>
+                </a:solidFill>
+              </a:rPr>
+              <a:t>G4_in_2 : 0</a:t>
+            </a:r>
+          </a:p>
+          <a:p>
+            <a:pPr algn="ctr"/>
+            <a:r>
+              <a:rPr lang="en-US" altLang="ko-KR" sz="1500">
+                <a:solidFill>
+                  <a:srgbClr val="FF0000"/>
+                </a:solidFill>
+              </a:rPr>
+              <a:t>G4_out : 1</a:t>
+            </a:r>
+          </a:p>
+          <a:p>
+            <a:pPr algn="ctr"/>
+            <a:endParaRPr lang="en-US" altLang="ko-KR" sz="1500">
+              <a:solidFill>
+                <a:schemeClr val="tx1"/>
+              </a:solidFill>
+            </a:endParaRPr>
+          </a:p>
+          <a:p>
+            <a:pPr algn="ctr"/>
+            <a:r>
+              <a:rPr lang="en-US" altLang="ko-KR" sz="1500">
+                <a:solidFill>
+                  <a:schemeClr val="tx1"/>
+                </a:solidFill>
+              </a:rPr>
+              <a:t>Q : 1</a:t>
+            </a:r>
+          </a:p>
+          <a:p>
+            <a:pPr algn="ctr"/>
+            <a:r>
+              <a:rPr lang="en-US" altLang="ko-KR" sz="1500">
+                <a:solidFill>
+                  <a:srgbClr val="FF0000"/>
+                </a:solidFill>
+              </a:rPr>
+              <a:t>Q’ : 1</a:t>
+            </a:r>
+          </a:p>
+        </p:txBody>
+      </p:sp>
+      <p:cxnSp>
+        <p:nvCxnSpPr>
+          <p:cNvPr id="49" name="직선 연결선 48">
+            <a:extLst>
+              <a:ext uri="{FF2B5EF4-FFF2-40B4-BE49-F238E27FC236}">
+                <a16:creationId xmlns:a16="http://schemas.microsoft.com/office/drawing/2014/main" id="{03BAF25D-40BC-FA72-2B89-E977041E746A}"/>
+              </a:ext>
+            </a:extLst>
+          </p:cNvPr>
+          <p:cNvCxnSpPr>
+            <a:stCxn id="10" idx="3"/>
+            <a:endCxn id="47" idx="1"/>
+          </p:cNvCxnSpPr>
+          <p:nvPr/>
+        </p:nvCxnSpPr>
+        <p:spPr>
+          <a:xfrm>
+            <a:off x="3181350" y="3429000"/>
+            <a:ext cx="3390900" cy="0"/>
+          </a:xfrm>
+          <a:prstGeom prst="line">
+            <a:avLst/>
+          </a:prstGeom>
+          <a:ln w="28575"/>
+        </p:spPr>
+        <p:style>
+          <a:lnRef idx="2">
+            <a:schemeClr val="dk1"/>
+          </a:lnRef>
+          <a:fillRef idx="0">
+            <a:schemeClr val="dk1"/>
+          </a:fillRef>
+          <a:effectRef idx="1">
+            <a:schemeClr val="dk1"/>
+          </a:effectRef>
+          <a:fontRef idx="minor">
+            <a:schemeClr val="tx1"/>
+          </a:fontRef>
+        </p:style>
+      </p:cxnSp>
+      <p:sp>
+        <p:nvSpPr>
+          <p:cNvPr id="57" name="이등변 삼각형 56">
+            <a:extLst>
+              <a:ext uri="{FF2B5EF4-FFF2-40B4-BE49-F238E27FC236}">
+                <a16:creationId xmlns:a16="http://schemas.microsoft.com/office/drawing/2014/main" id="{83D7DA0C-88AA-46E6-F8C0-EC874FFE8E07}"/>
+              </a:ext>
+            </a:extLst>
+          </p:cNvPr>
+          <p:cNvSpPr/>
+          <p:nvPr/>
+        </p:nvSpPr>
+        <p:spPr>
+          <a:xfrm rot="5400000">
+            <a:off x="6329362" y="3314700"/>
+            <a:ext cx="238125" cy="228600"/>
+          </a:xfrm>
+          <a:prstGeom prst="triangle">
+            <a:avLst/>
+          </a:prstGeom>
+          <a:noFill/>
+          <a:ln w="28575"/>
+        </p:spPr>
+        <p:style>
+          <a:lnRef idx="2">
+            <a:schemeClr val="accent1">
+              <a:shade val="15000"/>
+            </a:schemeClr>
+          </a:lnRef>
+          <a:fillRef idx="1">
+            <a:schemeClr val="accent1"/>
+          </a:fillRef>
+          <a:effectRef idx="0">
+            <a:schemeClr val="accent1"/>
+          </a:effectRef>
+          <a:fontRef idx="minor">
+            <a:schemeClr val="lt1"/>
+          </a:fontRef>
+        </p:style>
+        <p:txBody>
+          <a:bodyPr rtlCol="0" anchor="ctr"/>
+          <a:lstStyle/>
+          <a:p>
+            <a:pPr algn="ctr"/>
+            <a:endParaRPr lang="ko-KR" altLang="en-US"/>
+          </a:p>
+        </p:txBody>
+      </p:sp>
+      <p:sp>
+        <p:nvSpPr>
+          <p:cNvPr id="58" name="TextBox 57">
+            <a:extLst>
+              <a:ext uri="{FF2B5EF4-FFF2-40B4-BE49-F238E27FC236}">
+                <a16:creationId xmlns:a16="http://schemas.microsoft.com/office/drawing/2014/main" id="{2A372683-119D-590B-D2D7-10363460371A}"/>
+              </a:ext>
+            </a:extLst>
+          </p:cNvPr>
+          <p:cNvSpPr txBox="1"/>
+          <p:nvPr/>
+        </p:nvSpPr>
+        <p:spPr>
+          <a:xfrm>
+            <a:off x="3400425" y="447675"/>
+            <a:ext cx="2952750" cy="369332"/>
+          </a:xfrm>
+          <a:prstGeom prst="rect">
+            <a:avLst/>
+          </a:prstGeom>
+          <a:noFill/>
+        </p:spPr>
+        <p:txBody>
+          <a:bodyPr wrap="square" rtlCol="0">
+            <a:spAutoFit/>
+          </a:bodyPr>
+          <a:lstStyle/>
+          <a:p>
+            <a:r>
+              <a:rPr lang="en-US" altLang="ko-KR"/>
+              <a:t>Queue : [</a:t>
+            </a:r>
+            <a:r>
+              <a:rPr lang="en-US" altLang="ko-KR">
+                <a:solidFill>
+                  <a:srgbClr val="FF0000"/>
+                </a:solidFill>
+              </a:rPr>
+              <a:t>G4</a:t>
+            </a:r>
+            <a:r>
+              <a:rPr lang="en-US" altLang="ko-KR"/>
+              <a:t>]</a:t>
+            </a:r>
+            <a:endParaRPr lang="ko-KR" altLang="en-US"/>
+          </a:p>
+        </p:txBody>
+      </p:sp>
+      <p:sp>
+        <p:nvSpPr>
+          <p:cNvPr id="61" name="TextBox 60">
+            <a:extLst>
+              <a:ext uri="{FF2B5EF4-FFF2-40B4-BE49-F238E27FC236}">
+                <a16:creationId xmlns:a16="http://schemas.microsoft.com/office/drawing/2014/main" id="{62FDDC78-9569-D1C4-B68C-437406783760}"/>
+              </a:ext>
+            </a:extLst>
+          </p:cNvPr>
+          <p:cNvSpPr txBox="1"/>
+          <p:nvPr/>
+        </p:nvSpPr>
+        <p:spPr>
+          <a:xfrm>
+            <a:off x="8296275" y="447675"/>
+            <a:ext cx="2952750" cy="369332"/>
+          </a:xfrm>
+          <a:prstGeom prst="rect">
+            <a:avLst/>
+          </a:prstGeom>
+          <a:noFill/>
+        </p:spPr>
+        <p:txBody>
+          <a:bodyPr wrap="square" rtlCol="0">
+            <a:spAutoFit/>
+          </a:bodyPr>
+          <a:lstStyle/>
+          <a:p>
+            <a:r>
+              <a:rPr lang="en-US" altLang="ko-KR"/>
+              <a:t>Queue : [G1, G3]</a:t>
+            </a:r>
+            <a:endParaRPr lang="ko-KR" altLang="en-US"/>
+          </a:p>
+        </p:txBody>
+      </p:sp>
+    </p:spTree>
+    <p:extLst>
+      <p:ext uri="{BB962C8B-B14F-4D97-AF65-F5344CB8AC3E}">
+        <p14:creationId xmlns:p14="http://schemas.microsoft.com/office/powerpoint/2010/main" val="62827688"/>
+      </p:ext>
+    </p:extLst>
+  </p:cSld>
+  <p:clrMapOvr>
+    <a:masterClrMapping/>
+  </p:clrMapOvr>
+</p:sld>
+</file>
+
+<file path=ppt/slides/slide29.xml><?xml version="1.0" encoding="utf-8"?>
+<p:sld xmlns:a="http://schemas.openxmlformats.org/drawingml/2006/main" xmlns:r="http://schemas.openxmlformats.org/officeDocument/2006/relationships" xmlns:p="http://schemas.openxmlformats.org/presentationml/2006/main">
+  <p:cSld>
+    <p:spTree>
+      <p:nvGrpSpPr>
+        <p:cNvPr id="1" name="">
+          <a:extLst>
+            <a:ext uri="{FF2B5EF4-FFF2-40B4-BE49-F238E27FC236}">
+              <a16:creationId xmlns:a16="http://schemas.microsoft.com/office/drawing/2014/main" id="{85088603-7EAA-1E2E-97BF-020495B2852F}"/>
+            </a:ext>
+          </a:extLst>
+        </p:cNvPr>
+        <p:cNvGrpSpPr/>
+        <p:nvPr/>
+      </p:nvGrpSpPr>
+      <p:grpSpPr>
+        <a:xfrm>
+          <a:off x="0" y="0"/>
+          <a:ext cx="0" cy="0"/>
+          <a:chOff x="0" y="0"/>
+          <a:chExt cx="0" cy="0"/>
+        </a:xfrm>
+      </p:grpSpPr>
+      <p:sp>
+        <p:nvSpPr>
+          <p:cNvPr id="10" name="직사각형 9">
+            <a:extLst>
+              <a:ext uri="{FF2B5EF4-FFF2-40B4-BE49-F238E27FC236}">
+                <a16:creationId xmlns:a16="http://schemas.microsoft.com/office/drawing/2014/main" id="{22C03903-F4B7-4A4B-6D1C-EAC0CC9EFE21}"/>
+              </a:ext>
+            </a:extLst>
+          </p:cNvPr>
+          <p:cNvSpPr/>
+          <p:nvPr/>
+        </p:nvSpPr>
+        <p:spPr>
+          <a:xfrm>
+            <a:off x="1676400" y="447675"/>
+            <a:ext cx="1504950" cy="5962650"/>
+          </a:xfrm>
+          <a:prstGeom prst="rect">
+            <a:avLst/>
+          </a:prstGeom>
+          <a:solidFill>
+            <a:schemeClr val="bg1"/>
+          </a:solidFill>
+          <a:ln w="28575">
+            <a:solidFill>
+              <a:schemeClr val="tx1"/>
+            </a:solidFill>
+          </a:ln>
+        </p:spPr>
+        <p:style>
+          <a:lnRef idx="2">
+            <a:schemeClr val="accent1">
+              <a:shade val="15000"/>
+            </a:schemeClr>
+          </a:lnRef>
+          <a:fillRef idx="1">
+            <a:schemeClr val="accent1"/>
+          </a:fillRef>
+          <a:effectRef idx="0">
+            <a:schemeClr val="accent1"/>
+          </a:effectRef>
+          <a:fontRef idx="minor">
+            <a:schemeClr val="lt1"/>
+          </a:fontRef>
+        </p:style>
+        <p:txBody>
+          <a:bodyPr rtlCol="0" anchor="ctr"/>
+          <a:lstStyle/>
+          <a:p>
+            <a:pPr algn="ctr"/>
+            <a:r>
+              <a:rPr lang="en-US" altLang="ko-KR" sz="1500">
+                <a:solidFill>
+                  <a:schemeClr val="tx1"/>
+                </a:solidFill>
+              </a:rPr>
+              <a:t>J : 1</a:t>
+            </a:r>
+          </a:p>
+          <a:p>
+            <a:pPr algn="ctr"/>
+            <a:r>
+              <a:rPr lang="en-US" altLang="ko-KR" sz="1500">
+                <a:solidFill>
+                  <a:schemeClr val="tx1"/>
+                </a:solidFill>
+              </a:rPr>
+              <a:t>en : 1</a:t>
+            </a:r>
+          </a:p>
+          <a:p>
+            <a:pPr algn="ctr"/>
+            <a:r>
+              <a:rPr lang="en-US" altLang="ko-KR" sz="1500">
+                <a:solidFill>
+                  <a:schemeClr val="tx1"/>
+                </a:solidFill>
+              </a:rPr>
+              <a:t>K : 1</a:t>
+            </a:r>
+          </a:p>
+          <a:p>
+            <a:pPr algn="ctr"/>
+            <a:endParaRPr lang="en-US" altLang="ko-KR" sz="1500">
+              <a:solidFill>
+                <a:schemeClr val="tx1"/>
+              </a:solidFill>
+            </a:endParaRPr>
+          </a:p>
+          <a:p>
+            <a:pPr algn="ctr"/>
+            <a:r>
+              <a:rPr lang="en-US" altLang="ko-KR" sz="1500">
+                <a:solidFill>
+                  <a:srgbClr val="FF0000"/>
+                </a:solidFill>
+              </a:rPr>
+              <a:t>G1_in_1 : 1</a:t>
+            </a:r>
+          </a:p>
+          <a:p>
+            <a:pPr algn="ctr"/>
+            <a:r>
+              <a:rPr lang="en-US" altLang="ko-KR" sz="1500">
+                <a:solidFill>
+                  <a:schemeClr val="tx1"/>
+                </a:solidFill>
+              </a:rPr>
+              <a:t>G1_in_2 : 1</a:t>
+            </a:r>
+          </a:p>
+          <a:p>
+            <a:pPr algn="ctr"/>
+            <a:r>
+              <a:rPr lang="en-US" altLang="ko-KR" sz="1500">
+                <a:solidFill>
+                  <a:schemeClr val="tx1"/>
+                </a:solidFill>
+              </a:rPr>
+              <a:t>G1_in_3 : 1</a:t>
+            </a:r>
+          </a:p>
+          <a:p>
+            <a:pPr algn="ctr"/>
+            <a:r>
+              <a:rPr lang="en-US" altLang="ko-KR" sz="1500">
+                <a:solidFill>
+                  <a:schemeClr val="tx1"/>
+                </a:solidFill>
+              </a:rPr>
+              <a:t>G1_out</a:t>
+            </a:r>
+            <a:r>
+              <a:rPr lang="ko-KR" altLang="en-US" sz="1500">
+                <a:solidFill>
+                  <a:schemeClr val="tx1"/>
+                </a:solidFill>
+              </a:rPr>
+              <a:t> </a:t>
+            </a:r>
+            <a:r>
+              <a:rPr lang="en-US" altLang="ko-KR" sz="1500">
+                <a:solidFill>
+                  <a:schemeClr val="tx1"/>
+                </a:solidFill>
+              </a:rPr>
+              <a:t>:</a:t>
+            </a:r>
+            <a:r>
+              <a:rPr lang="ko-KR" altLang="en-US" sz="1500">
+                <a:solidFill>
+                  <a:schemeClr val="tx1"/>
+                </a:solidFill>
+              </a:rPr>
+              <a:t> </a:t>
+            </a:r>
+            <a:r>
+              <a:rPr lang="en-US" altLang="ko-KR" sz="1500">
+                <a:solidFill>
+                  <a:schemeClr val="tx1"/>
+                </a:solidFill>
+              </a:rPr>
+              <a:t>1</a:t>
+            </a:r>
+          </a:p>
+          <a:p>
+            <a:pPr algn="ctr"/>
+            <a:endParaRPr lang="en-US" altLang="ko-KR" sz="1500">
+              <a:solidFill>
+                <a:schemeClr val="tx1"/>
+              </a:solidFill>
+            </a:endParaRPr>
+          </a:p>
+          <a:p>
+            <a:pPr algn="ctr"/>
+            <a:r>
+              <a:rPr lang="en-US" altLang="ko-KR" sz="1500">
+                <a:solidFill>
+                  <a:schemeClr val="tx1"/>
+                </a:solidFill>
+              </a:rPr>
+              <a:t>G2_in_1 : 1</a:t>
+            </a:r>
+          </a:p>
+          <a:p>
+            <a:pPr algn="ctr"/>
+            <a:r>
+              <a:rPr lang="en-US" altLang="ko-KR" sz="1500">
+                <a:solidFill>
+                  <a:schemeClr val="tx1"/>
+                </a:solidFill>
+              </a:rPr>
+              <a:t>G2_in_2 : 1</a:t>
+            </a:r>
+          </a:p>
+          <a:p>
+            <a:pPr algn="ctr"/>
+            <a:r>
+              <a:rPr lang="en-US" altLang="ko-KR" sz="1500">
+                <a:solidFill>
+                  <a:schemeClr val="tx1"/>
+                </a:solidFill>
+              </a:rPr>
+              <a:t>G2_in_3 : 1</a:t>
+            </a:r>
+          </a:p>
+          <a:p>
+            <a:pPr algn="ctr"/>
+            <a:r>
+              <a:rPr lang="en-US" altLang="ko-KR" sz="1500">
+                <a:solidFill>
+                  <a:schemeClr val="tx1"/>
+                </a:solidFill>
+              </a:rPr>
+              <a:t>G2_out : 0</a:t>
+            </a:r>
+          </a:p>
+          <a:p>
+            <a:pPr algn="ctr"/>
+            <a:endParaRPr lang="en-US" altLang="ko-KR" sz="1500">
+              <a:solidFill>
+                <a:schemeClr val="tx1"/>
+              </a:solidFill>
+            </a:endParaRPr>
+          </a:p>
+          <a:p>
+            <a:pPr algn="ctr"/>
+            <a:r>
+              <a:rPr lang="en-US" altLang="ko-KR" sz="1500">
+                <a:solidFill>
+                  <a:schemeClr val="tx1"/>
+                </a:solidFill>
+              </a:rPr>
+              <a:t>G3_in_1 : 1</a:t>
+            </a:r>
+          </a:p>
+          <a:p>
+            <a:pPr algn="ctr"/>
+            <a:r>
+              <a:rPr lang="en-US" altLang="ko-KR" sz="1500">
+                <a:solidFill>
+                  <a:schemeClr val="tx1"/>
+                </a:solidFill>
+              </a:rPr>
+              <a:t>G3_in_2 : 1</a:t>
+            </a:r>
+          </a:p>
+          <a:p>
+            <a:pPr algn="ctr"/>
+            <a:r>
+              <a:rPr lang="en-US" altLang="ko-KR" sz="1500">
+                <a:solidFill>
+                  <a:schemeClr val="tx1"/>
+                </a:solidFill>
+              </a:rPr>
+              <a:t>G3_out : 1</a:t>
+            </a:r>
+          </a:p>
+          <a:p>
+            <a:pPr algn="ctr"/>
+            <a:endParaRPr lang="en-US" altLang="ko-KR" sz="1500">
+              <a:solidFill>
+                <a:schemeClr val="tx1"/>
+              </a:solidFill>
+            </a:endParaRPr>
+          </a:p>
+          <a:p>
+            <a:pPr algn="ctr"/>
+            <a:r>
+              <a:rPr lang="en-US" altLang="ko-KR" sz="1500">
+                <a:solidFill>
+                  <a:schemeClr val="tx1"/>
+                </a:solidFill>
+              </a:rPr>
+              <a:t>G4_in_1 : 1</a:t>
+            </a:r>
+          </a:p>
+          <a:p>
+            <a:pPr algn="ctr"/>
+            <a:r>
+              <a:rPr lang="en-US" altLang="ko-KR" sz="1500">
+                <a:solidFill>
+                  <a:schemeClr val="tx1"/>
+                </a:solidFill>
+              </a:rPr>
+              <a:t>G4_in_2 : 0</a:t>
+            </a:r>
+          </a:p>
+          <a:p>
+            <a:pPr algn="ctr"/>
+            <a:r>
+              <a:rPr lang="en-US" altLang="ko-KR" sz="1500">
+                <a:solidFill>
+                  <a:schemeClr val="tx1"/>
+                </a:solidFill>
+              </a:rPr>
+              <a:t>G4_out : 1</a:t>
+            </a:r>
+          </a:p>
+          <a:p>
+            <a:pPr algn="ctr"/>
+            <a:endParaRPr lang="en-US" altLang="ko-KR" sz="1500">
+              <a:solidFill>
+                <a:schemeClr val="tx1"/>
+              </a:solidFill>
+            </a:endParaRPr>
+          </a:p>
+          <a:p>
+            <a:pPr algn="ctr"/>
+            <a:r>
+              <a:rPr lang="en-US" altLang="ko-KR" sz="1500">
+                <a:solidFill>
+                  <a:schemeClr val="tx1"/>
+                </a:solidFill>
+              </a:rPr>
+              <a:t>Q : 1</a:t>
+            </a:r>
+          </a:p>
+          <a:p>
+            <a:pPr algn="ctr"/>
+            <a:r>
+              <a:rPr lang="en-US" altLang="ko-KR" sz="1500">
+                <a:solidFill>
+                  <a:schemeClr val="tx1"/>
+                </a:solidFill>
+              </a:rPr>
+              <a:t>Q’ : 1</a:t>
+            </a:r>
+          </a:p>
+        </p:txBody>
+      </p:sp>
+      <p:sp>
+        <p:nvSpPr>
+          <p:cNvPr id="47" name="직사각형 46">
+            <a:extLst>
+              <a:ext uri="{FF2B5EF4-FFF2-40B4-BE49-F238E27FC236}">
+                <a16:creationId xmlns:a16="http://schemas.microsoft.com/office/drawing/2014/main" id="{794E587F-ABD9-302D-6DED-DD05E874FC66}"/>
+              </a:ext>
+            </a:extLst>
+          </p:cNvPr>
+          <p:cNvSpPr/>
+          <p:nvPr/>
+        </p:nvSpPr>
+        <p:spPr>
+          <a:xfrm>
+            <a:off x="6572250" y="447675"/>
+            <a:ext cx="1504950" cy="5962650"/>
+          </a:xfrm>
+          <a:prstGeom prst="rect">
+            <a:avLst/>
+          </a:prstGeom>
+          <a:solidFill>
+            <a:schemeClr val="bg1"/>
+          </a:solidFill>
+          <a:ln w="28575">
+            <a:solidFill>
+              <a:schemeClr val="tx1"/>
+            </a:solidFill>
+          </a:ln>
+        </p:spPr>
+        <p:style>
+          <a:lnRef idx="2">
+            <a:schemeClr val="accent1">
+              <a:shade val="15000"/>
+            </a:schemeClr>
+          </a:lnRef>
+          <a:fillRef idx="1">
+            <a:schemeClr val="accent1"/>
+          </a:fillRef>
+          <a:effectRef idx="0">
+            <a:schemeClr val="accent1"/>
+          </a:effectRef>
+          <a:fontRef idx="minor">
+            <a:schemeClr val="lt1"/>
+          </a:fontRef>
+        </p:style>
+        <p:txBody>
+          <a:bodyPr rtlCol="0" anchor="ctr"/>
+          <a:lstStyle/>
+          <a:p>
+            <a:pPr algn="ctr"/>
+            <a:r>
+              <a:rPr lang="en-US" altLang="ko-KR" sz="1500">
+                <a:solidFill>
+                  <a:schemeClr val="tx1"/>
+                </a:solidFill>
+              </a:rPr>
+              <a:t>J : 1</a:t>
+            </a:r>
+          </a:p>
+          <a:p>
+            <a:pPr algn="ctr"/>
+            <a:r>
+              <a:rPr lang="en-US" altLang="ko-KR" sz="1500">
+                <a:solidFill>
+                  <a:schemeClr val="tx1"/>
+                </a:solidFill>
+              </a:rPr>
+              <a:t>en : 1</a:t>
+            </a:r>
+          </a:p>
+          <a:p>
+            <a:pPr algn="ctr"/>
+            <a:r>
+              <a:rPr lang="en-US" altLang="ko-KR" sz="1500">
+                <a:solidFill>
+                  <a:schemeClr val="tx1"/>
+                </a:solidFill>
+              </a:rPr>
+              <a:t>K : 1</a:t>
+            </a:r>
+          </a:p>
+          <a:p>
+            <a:pPr algn="ctr"/>
+            <a:endParaRPr lang="en-US" altLang="ko-KR" sz="1500">
+              <a:solidFill>
+                <a:schemeClr val="tx1"/>
+              </a:solidFill>
+            </a:endParaRPr>
+          </a:p>
+          <a:p>
+            <a:pPr algn="ctr"/>
+            <a:r>
+              <a:rPr lang="en-US" altLang="ko-KR" sz="1500">
+                <a:solidFill>
+                  <a:srgbClr val="0000FF"/>
+                </a:solidFill>
+              </a:rPr>
+              <a:t>G1_in_1 : 1</a:t>
+            </a:r>
+          </a:p>
+          <a:p>
+            <a:pPr algn="ctr"/>
+            <a:r>
+              <a:rPr lang="en-US" altLang="ko-KR" sz="1500">
+                <a:solidFill>
+                  <a:schemeClr val="tx1"/>
+                </a:solidFill>
+              </a:rPr>
+              <a:t>G1_in_2 : 1</a:t>
+            </a:r>
+          </a:p>
+          <a:p>
+            <a:pPr algn="ctr"/>
+            <a:r>
+              <a:rPr lang="en-US" altLang="ko-KR" sz="1500">
+                <a:solidFill>
+                  <a:schemeClr val="tx1"/>
+                </a:solidFill>
+              </a:rPr>
+              <a:t>G1_in_3 : 1</a:t>
+            </a:r>
+          </a:p>
+          <a:p>
+            <a:pPr algn="ctr"/>
+            <a:r>
+              <a:rPr lang="en-US" altLang="ko-KR" sz="1500">
+                <a:solidFill>
+                  <a:srgbClr val="FF0000"/>
+                </a:solidFill>
+              </a:rPr>
+              <a:t>G1_out</a:t>
+            </a:r>
+            <a:r>
+              <a:rPr lang="ko-KR" altLang="en-US" sz="1500">
+                <a:solidFill>
+                  <a:srgbClr val="FF0000"/>
+                </a:solidFill>
+              </a:rPr>
+              <a:t> </a:t>
+            </a:r>
+            <a:r>
+              <a:rPr lang="en-US" altLang="ko-KR" sz="1500">
+                <a:solidFill>
+                  <a:srgbClr val="FF0000"/>
+                </a:solidFill>
+              </a:rPr>
+              <a:t>:</a:t>
+            </a:r>
+            <a:r>
+              <a:rPr lang="ko-KR" altLang="en-US" sz="1500">
+                <a:solidFill>
+                  <a:srgbClr val="FF0000"/>
+                </a:solidFill>
+              </a:rPr>
+              <a:t> </a:t>
+            </a:r>
+            <a:r>
+              <a:rPr lang="en-US" altLang="ko-KR" sz="1500">
+                <a:solidFill>
+                  <a:srgbClr val="FF0000"/>
+                </a:solidFill>
+              </a:rPr>
+              <a:t>0</a:t>
+            </a:r>
+          </a:p>
+          <a:p>
+            <a:pPr algn="ctr"/>
+            <a:endParaRPr lang="en-US" altLang="ko-KR" sz="1500">
+              <a:solidFill>
+                <a:schemeClr val="tx1"/>
+              </a:solidFill>
+            </a:endParaRPr>
+          </a:p>
+          <a:p>
+            <a:pPr algn="ctr"/>
+            <a:r>
+              <a:rPr lang="en-US" altLang="ko-KR" sz="1500">
+                <a:solidFill>
+                  <a:schemeClr val="tx1"/>
+                </a:solidFill>
+              </a:rPr>
+              <a:t>G2_in_1 : 1</a:t>
+            </a:r>
+          </a:p>
+          <a:p>
+            <a:pPr algn="ctr"/>
+            <a:r>
+              <a:rPr lang="en-US" altLang="ko-KR" sz="1500">
+                <a:solidFill>
+                  <a:schemeClr val="tx1"/>
+                </a:solidFill>
+              </a:rPr>
+              <a:t>G2_in_2 : 1</a:t>
+            </a:r>
+          </a:p>
+          <a:p>
+            <a:pPr algn="ctr"/>
+            <a:r>
+              <a:rPr lang="en-US" altLang="ko-KR" sz="1500">
+                <a:solidFill>
+                  <a:schemeClr val="tx1"/>
+                </a:solidFill>
+              </a:rPr>
+              <a:t>G2_in_3 : 1</a:t>
+            </a:r>
+          </a:p>
+          <a:p>
+            <a:pPr algn="ctr"/>
+            <a:r>
+              <a:rPr lang="en-US" altLang="ko-KR" sz="1500">
+                <a:solidFill>
+                  <a:schemeClr val="tx1"/>
+                </a:solidFill>
+              </a:rPr>
+              <a:t>G2_out : 0</a:t>
+            </a:r>
+          </a:p>
+          <a:p>
+            <a:pPr algn="ctr"/>
+            <a:endParaRPr lang="en-US" altLang="ko-KR" sz="1500">
+              <a:solidFill>
+                <a:schemeClr val="tx1"/>
+              </a:solidFill>
+            </a:endParaRPr>
+          </a:p>
+          <a:p>
+            <a:pPr algn="ctr"/>
+            <a:r>
+              <a:rPr lang="en-US" altLang="ko-KR" sz="1500">
+                <a:solidFill>
+                  <a:srgbClr val="FF0000"/>
+                </a:solidFill>
+              </a:rPr>
+              <a:t>G3_in_1 : 0</a:t>
+            </a:r>
+          </a:p>
+          <a:p>
+            <a:pPr algn="ctr"/>
+            <a:r>
+              <a:rPr lang="en-US" altLang="ko-KR" sz="1500">
+                <a:solidFill>
+                  <a:schemeClr val="tx1"/>
+                </a:solidFill>
+              </a:rPr>
+              <a:t>G3_in_2 : 1</a:t>
+            </a:r>
+          </a:p>
+          <a:p>
+            <a:pPr algn="ctr"/>
+            <a:r>
+              <a:rPr lang="en-US" altLang="ko-KR" sz="1500">
+                <a:solidFill>
+                  <a:schemeClr val="tx1"/>
+                </a:solidFill>
+              </a:rPr>
+              <a:t>G3_out : 1</a:t>
+            </a:r>
+          </a:p>
+          <a:p>
+            <a:pPr algn="ctr"/>
+            <a:endParaRPr lang="en-US" altLang="ko-KR" sz="1500">
+              <a:solidFill>
+                <a:schemeClr val="tx1"/>
+              </a:solidFill>
+            </a:endParaRPr>
+          </a:p>
+          <a:p>
+            <a:pPr algn="ctr"/>
+            <a:r>
+              <a:rPr lang="en-US" altLang="ko-KR" sz="1500">
+                <a:solidFill>
+                  <a:schemeClr val="tx1"/>
+                </a:solidFill>
+              </a:rPr>
+              <a:t>G4_in_1 : 1</a:t>
+            </a:r>
+          </a:p>
+          <a:p>
+            <a:pPr algn="ctr"/>
+            <a:r>
+              <a:rPr lang="en-US" altLang="ko-KR" sz="1500">
+                <a:solidFill>
+                  <a:schemeClr val="tx1"/>
+                </a:solidFill>
+              </a:rPr>
+              <a:t>G4_in_2 : 0</a:t>
+            </a:r>
+          </a:p>
+          <a:p>
+            <a:pPr algn="ctr"/>
+            <a:r>
+              <a:rPr lang="en-US" altLang="ko-KR" sz="1500">
+                <a:solidFill>
+                  <a:schemeClr val="tx1"/>
+                </a:solidFill>
+              </a:rPr>
+              <a:t>G4_out : 1</a:t>
+            </a:r>
+          </a:p>
+          <a:p>
+            <a:pPr algn="ctr"/>
+            <a:endParaRPr lang="en-US" altLang="ko-KR" sz="1500">
+              <a:solidFill>
+                <a:schemeClr val="tx1"/>
+              </a:solidFill>
+            </a:endParaRPr>
+          </a:p>
+          <a:p>
+            <a:pPr algn="ctr"/>
+            <a:r>
+              <a:rPr lang="en-US" altLang="ko-KR" sz="1500">
+                <a:solidFill>
+                  <a:schemeClr val="tx1"/>
+                </a:solidFill>
+              </a:rPr>
+              <a:t>Q : 1</a:t>
+            </a:r>
+          </a:p>
+          <a:p>
+            <a:pPr algn="ctr"/>
+            <a:r>
+              <a:rPr lang="en-US" altLang="ko-KR" sz="1500">
+                <a:solidFill>
+                  <a:schemeClr val="tx1"/>
+                </a:solidFill>
+              </a:rPr>
+              <a:t>Q’ : 1</a:t>
+            </a:r>
+          </a:p>
+        </p:txBody>
+      </p:sp>
+      <p:cxnSp>
+        <p:nvCxnSpPr>
+          <p:cNvPr id="49" name="직선 연결선 48">
+            <a:extLst>
+              <a:ext uri="{FF2B5EF4-FFF2-40B4-BE49-F238E27FC236}">
+                <a16:creationId xmlns:a16="http://schemas.microsoft.com/office/drawing/2014/main" id="{CB110388-3098-85B3-B382-2B17193436C9}"/>
+              </a:ext>
+            </a:extLst>
+          </p:cNvPr>
+          <p:cNvCxnSpPr>
+            <a:stCxn id="10" idx="3"/>
+            <a:endCxn id="47" idx="1"/>
+          </p:cNvCxnSpPr>
+          <p:nvPr/>
+        </p:nvCxnSpPr>
+        <p:spPr>
+          <a:xfrm>
+            <a:off x="3181350" y="3429000"/>
+            <a:ext cx="3390900" cy="0"/>
+          </a:xfrm>
+          <a:prstGeom prst="line">
+            <a:avLst/>
+          </a:prstGeom>
+          <a:ln w="28575"/>
+        </p:spPr>
+        <p:style>
+          <a:lnRef idx="2">
+            <a:schemeClr val="dk1"/>
+          </a:lnRef>
+          <a:fillRef idx="0">
+            <a:schemeClr val="dk1"/>
+          </a:fillRef>
+          <a:effectRef idx="1">
+            <a:schemeClr val="dk1"/>
+          </a:effectRef>
+          <a:fontRef idx="minor">
+            <a:schemeClr val="tx1"/>
+          </a:fontRef>
+        </p:style>
+      </p:cxnSp>
+      <p:sp>
+        <p:nvSpPr>
+          <p:cNvPr id="57" name="이등변 삼각형 56">
+            <a:extLst>
+              <a:ext uri="{FF2B5EF4-FFF2-40B4-BE49-F238E27FC236}">
+                <a16:creationId xmlns:a16="http://schemas.microsoft.com/office/drawing/2014/main" id="{CC518AB4-3C41-33AB-B1BC-F58C1B678A20}"/>
+              </a:ext>
+            </a:extLst>
+          </p:cNvPr>
+          <p:cNvSpPr/>
+          <p:nvPr/>
+        </p:nvSpPr>
+        <p:spPr>
+          <a:xfrm rot="5400000">
+            <a:off x="6329362" y="3314700"/>
+            <a:ext cx="238125" cy="228600"/>
+          </a:xfrm>
+          <a:prstGeom prst="triangle">
+            <a:avLst/>
+          </a:prstGeom>
+          <a:noFill/>
+          <a:ln w="28575"/>
+        </p:spPr>
+        <p:style>
+          <a:lnRef idx="2">
+            <a:schemeClr val="accent1">
+              <a:shade val="15000"/>
+            </a:schemeClr>
+          </a:lnRef>
+          <a:fillRef idx="1">
+            <a:schemeClr val="accent1"/>
+          </a:fillRef>
+          <a:effectRef idx="0">
+            <a:schemeClr val="accent1"/>
+          </a:effectRef>
+          <a:fontRef idx="minor">
+            <a:schemeClr val="lt1"/>
+          </a:fontRef>
+        </p:style>
+        <p:txBody>
+          <a:bodyPr rtlCol="0" anchor="ctr"/>
+          <a:lstStyle/>
+          <a:p>
+            <a:pPr algn="ctr"/>
+            <a:endParaRPr lang="ko-KR" altLang="en-US"/>
+          </a:p>
+        </p:txBody>
+      </p:sp>
+      <p:sp>
+        <p:nvSpPr>
+          <p:cNvPr id="58" name="TextBox 57">
+            <a:extLst>
+              <a:ext uri="{FF2B5EF4-FFF2-40B4-BE49-F238E27FC236}">
+                <a16:creationId xmlns:a16="http://schemas.microsoft.com/office/drawing/2014/main" id="{BD9E20AB-8A67-7C2E-1E65-77C187B3CC52}"/>
+              </a:ext>
+            </a:extLst>
+          </p:cNvPr>
+          <p:cNvSpPr txBox="1"/>
+          <p:nvPr/>
+        </p:nvSpPr>
+        <p:spPr>
+          <a:xfrm>
+            <a:off x="3400425" y="447675"/>
+            <a:ext cx="2952750" cy="369332"/>
+          </a:xfrm>
+          <a:prstGeom prst="rect">
+            <a:avLst/>
+          </a:prstGeom>
+          <a:noFill/>
+        </p:spPr>
+        <p:txBody>
+          <a:bodyPr wrap="square" rtlCol="0">
+            <a:spAutoFit/>
+          </a:bodyPr>
+          <a:lstStyle/>
+          <a:p>
+            <a:r>
+              <a:rPr lang="en-US" altLang="ko-KR"/>
+              <a:t>Queue : [</a:t>
+            </a:r>
+            <a:r>
+              <a:rPr lang="en-US" altLang="ko-KR">
+                <a:solidFill>
+                  <a:srgbClr val="FF0000"/>
+                </a:solidFill>
+              </a:rPr>
+              <a:t>G1</a:t>
+            </a:r>
+            <a:r>
+              <a:rPr lang="en-US" altLang="ko-KR"/>
+              <a:t>, G3]</a:t>
+            </a:r>
+            <a:endParaRPr lang="ko-KR" altLang="en-US"/>
+          </a:p>
+        </p:txBody>
+      </p:sp>
+      <p:sp>
+        <p:nvSpPr>
+          <p:cNvPr id="61" name="TextBox 60">
+            <a:extLst>
+              <a:ext uri="{FF2B5EF4-FFF2-40B4-BE49-F238E27FC236}">
+                <a16:creationId xmlns:a16="http://schemas.microsoft.com/office/drawing/2014/main" id="{38936D2A-2E81-8A78-7254-AE21FCE86768}"/>
+              </a:ext>
+            </a:extLst>
+          </p:cNvPr>
+          <p:cNvSpPr txBox="1"/>
+          <p:nvPr/>
+        </p:nvSpPr>
+        <p:spPr>
+          <a:xfrm>
+            <a:off x="8296275" y="447675"/>
+            <a:ext cx="2952750" cy="369332"/>
+          </a:xfrm>
+          <a:prstGeom prst="rect">
+            <a:avLst/>
+          </a:prstGeom>
+          <a:noFill/>
+        </p:spPr>
+        <p:txBody>
+          <a:bodyPr wrap="square" rtlCol="0">
+            <a:spAutoFit/>
+          </a:bodyPr>
+          <a:lstStyle/>
+          <a:p>
+            <a:r>
+              <a:rPr lang="en-US" altLang="ko-KR"/>
+              <a:t>Queue : [G3]</a:t>
+            </a:r>
+            <a:endParaRPr lang="ko-KR" altLang="en-US"/>
+          </a:p>
+        </p:txBody>
+      </p:sp>
+    </p:spTree>
+    <p:extLst>
+      <p:ext uri="{BB962C8B-B14F-4D97-AF65-F5344CB8AC3E}">
+        <p14:creationId xmlns:p14="http://schemas.microsoft.com/office/powerpoint/2010/main" val="515952971"/>
+      </p:ext>
+    </p:extLst>
+  </p:cSld>
+  <p:clrMapOvr>
+    <a:masterClrMapping/>
+  </p:clrMapOvr>
+</p:sld>
+</file>
+
 <file path=ppt/slides/slide3.xml><?xml version="1.0" encoding="utf-8"?>
 <p:sld xmlns:a="http://schemas.openxmlformats.org/drawingml/2006/main" xmlns:r="http://schemas.openxmlformats.org/officeDocument/2006/relationships" xmlns:p="http://schemas.openxmlformats.org/presentationml/2006/main">
   <p:cSld>
@@ -11285,6 +18035,1368 @@
     <p:extLst>
       <p:ext uri="{BB962C8B-B14F-4D97-AF65-F5344CB8AC3E}">
         <p14:creationId xmlns:p14="http://schemas.microsoft.com/office/powerpoint/2010/main" val="952587045"/>
+      </p:ext>
+    </p:extLst>
+  </p:cSld>
+  <p:clrMapOvr>
+    <a:masterClrMapping/>
+  </p:clrMapOvr>
+</p:sld>
+</file>
+
+<file path=ppt/slides/slide30.xml><?xml version="1.0" encoding="utf-8"?>
+<p:sld xmlns:a="http://schemas.openxmlformats.org/drawingml/2006/main" xmlns:r="http://schemas.openxmlformats.org/officeDocument/2006/relationships" xmlns:p="http://schemas.openxmlformats.org/presentationml/2006/main">
+  <p:cSld>
+    <p:spTree>
+      <p:nvGrpSpPr>
+        <p:cNvPr id="1" name="">
+          <a:extLst>
+            <a:ext uri="{FF2B5EF4-FFF2-40B4-BE49-F238E27FC236}">
+              <a16:creationId xmlns:a16="http://schemas.microsoft.com/office/drawing/2014/main" id="{B2844610-8200-DECF-2B3B-FD607FF4EDE6}"/>
+            </a:ext>
+          </a:extLst>
+        </p:cNvPr>
+        <p:cNvGrpSpPr/>
+        <p:nvPr/>
+      </p:nvGrpSpPr>
+      <p:grpSpPr>
+        <a:xfrm>
+          <a:off x="0" y="0"/>
+          <a:ext cx="0" cy="0"/>
+          <a:chOff x="0" y="0"/>
+          <a:chExt cx="0" cy="0"/>
+        </a:xfrm>
+      </p:grpSpPr>
+      <p:sp>
+        <p:nvSpPr>
+          <p:cNvPr id="10" name="직사각형 9">
+            <a:extLst>
+              <a:ext uri="{FF2B5EF4-FFF2-40B4-BE49-F238E27FC236}">
+                <a16:creationId xmlns:a16="http://schemas.microsoft.com/office/drawing/2014/main" id="{F551CA3A-B0FD-6509-C8E1-FB6B1E0AE698}"/>
+              </a:ext>
+            </a:extLst>
+          </p:cNvPr>
+          <p:cNvSpPr/>
+          <p:nvPr/>
+        </p:nvSpPr>
+        <p:spPr>
+          <a:xfrm>
+            <a:off x="1676400" y="447675"/>
+            <a:ext cx="1504950" cy="5962650"/>
+          </a:xfrm>
+          <a:prstGeom prst="rect">
+            <a:avLst/>
+          </a:prstGeom>
+          <a:solidFill>
+            <a:schemeClr val="bg1"/>
+          </a:solidFill>
+          <a:ln w="28575">
+            <a:solidFill>
+              <a:schemeClr val="tx1"/>
+            </a:solidFill>
+          </a:ln>
+        </p:spPr>
+        <p:style>
+          <a:lnRef idx="2">
+            <a:schemeClr val="accent1">
+              <a:shade val="15000"/>
+            </a:schemeClr>
+          </a:lnRef>
+          <a:fillRef idx="1">
+            <a:schemeClr val="accent1"/>
+          </a:fillRef>
+          <a:effectRef idx="0">
+            <a:schemeClr val="accent1"/>
+          </a:effectRef>
+          <a:fontRef idx="minor">
+            <a:schemeClr val="lt1"/>
+          </a:fontRef>
+        </p:style>
+        <p:txBody>
+          <a:bodyPr rtlCol="0" anchor="ctr"/>
+          <a:lstStyle/>
+          <a:p>
+            <a:pPr algn="ctr"/>
+            <a:r>
+              <a:rPr lang="en-US" altLang="ko-KR" sz="1500">
+                <a:solidFill>
+                  <a:schemeClr val="tx1"/>
+                </a:solidFill>
+              </a:rPr>
+              <a:t>J : 1</a:t>
+            </a:r>
+          </a:p>
+          <a:p>
+            <a:pPr algn="ctr"/>
+            <a:r>
+              <a:rPr lang="en-US" altLang="ko-KR" sz="1500">
+                <a:solidFill>
+                  <a:schemeClr val="tx1"/>
+                </a:solidFill>
+              </a:rPr>
+              <a:t>en : 1</a:t>
+            </a:r>
+          </a:p>
+          <a:p>
+            <a:pPr algn="ctr"/>
+            <a:r>
+              <a:rPr lang="en-US" altLang="ko-KR" sz="1500">
+                <a:solidFill>
+                  <a:schemeClr val="tx1"/>
+                </a:solidFill>
+              </a:rPr>
+              <a:t>K : 1</a:t>
+            </a:r>
+          </a:p>
+          <a:p>
+            <a:pPr algn="ctr"/>
+            <a:endParaRPr lang="en-US" altLang="ko-KR" sz="1500">
+              <a:solidFill>
+                <a:schemeClr val="tx1"/>
+              </a:solidFill>
+            </a:endParaRPr>
+          </a:p>
+          <a:p>
+            <a:pPr algn="ctr"/>
+            <a:r>
+              <a:rPr lang="en-US" altLang="ko-KR" sz="1500">
+                <a:solidFill>
+                  <a:schemeClr val="tx1"/>
+                </a:solidFill>
+              </a:rPr>
+              <a:t>G1_in_1 : 1</a:t>
+            </a:r>
+          </a:p>
+          <a:p>
+            <a:pPr algn="ctr"/>
+            <a:r>
+              <a:rPr lang="en-US" altLang="ko-KR" sz="1500">
+                <a:solidFill>
+                  <a:schemeClr val="tx1"/>
+                </a:solidFill>
+              </a:rPr>
+              <a:t>G1_in_2 : 1</a:t>
+            </a:r>
+          </a:p>
+          <a:p>
+            <a:pPr algn="ctr"/>
+            <a:r>
+              <a:rPr lang="en-US" altLang="ko-KR" sz="1500">
+                <a:solidFill>
+                  <a:schemeClr val="tx1"/>
+                </a:solidFill>
+              </a:rPr>
+              <a:t>G1_in_3 : 1</a:t>
+            </a:r>
+          </a:p>
+          <a:p>
+            <a:pPr algn="ctr"/>
+            <a:r>
+              <a:rPr lang="en-US" altLang="ko-KR" sz="1500">
+                <a:solidFill>
+                  <a:schemeClr val="tx1"/>
+                </a:solidFill>
+              </a:rPr>
+              <a:t>G1_out</a:t>
+            </a:r>
+            <a:r>
+              <a:rPr lang="ko-KR" altLang="en-US" sz="1500">
+                <a:solidFill>
+                  <a:schemeClr val="tx1"/>
+                </a:solidFill>
+              </a:rPr>
+              <a:t> </a:t>
+            </a:r>
+            <a:r>
+              <a:rPr lang="en-US" altLang="ko-KR" sz="1500">
+                <a:solidFill>
+                  <a:schemeClr val="tx1"/>
+                </a:solidFill>
+              </a:rPr>
+              <a:t>:</a:t>
+            </a:r>
+            <a:r>
+              <a:rPr lang="ko-KR" altLang="en-US" sz="1500">
+                <a:solidFill>
+                  <a:schemeClr val="tx1"/>
+                </a:solidFill>
+              </a:rPr>
+              <a:t> </a:t>
+            </a:r>
+            <a:r>
+              <a:rPr lang="en-US" altLang="ko-KR" sz="1500">
+                <a:solidFill>
+                  <a:schemeClr val="tx1"/>
+                </a:solidFill>
+              </a:rPr>
+              <a:t>0</a:t>
+            </a:r>
+          </a:p>
+          <a:p>
+            <a:pPr algn="ctr"/>
+            <a:endParaRPr lang="en-US" altLang="ko-KR" sz="1500">
+              <a:solidFill>
+                <a:schemeClr val="tx1"/>
+              </a:solidFill>
+            </a:endParaRPr>
+          </a:p>
+          <a:p>
+            <a:pPr algn="ctr"/>
+            <a:r>
+              <a:rPr lang="en-US" altLang="ko-KR" sz="1500">
+                <a:solidFill>
+                  <a:schemeClr val="tx1"/>
+                </a:solidFill>
+              </a:rPr>
+              <a:t>G2_in_1 : 1</a:t>
+            </a:r>
+          </a:p>
+          <a:p>
+            <a:pPr algn="ctr"/>
+            <a:r>
+              <a:rPr lang="en-US" altLang="ko-KR" sz="1500">
+                <a:solidFill>
+                  <a:schemeClr val="tx1"/>
+                </a:solidFill>
+              </a:rPr>
+              <a:t>G2_in_2 : 1</a:t>
+            </a:r>
+          </a:p>
+          <a:p>
+            <a:pPr algn="ctr"/>
+            <a:r>
+              <a:rPr lang="en-US" altLang="ko-KR" sz="1500">
+                <a:solidFill>
+                  <a:schemeClr val="tx1"/>
+                </a:solidFill>
+              </a:rPr>
+              <a:t>G2_in_3 : 1</a:t>
+            </a:r>
+          </a:p>
+          <a:p>
+            <a:pPr algn="ctr"/>
+            <a:r>
+              <a:rPr lang="en-US" altLang="ko-KR" sz="1500">
+                <a:solidFill>
+                  <a:schemeClr val="tx1"/>
+                </a:solidFill>
+              </a:rPr>
+              <a:t>G2_out : 0</a:t>
+            </a:r>
+          </a:p>
+          <a:p>
+            <a:pPr algn="ctr"/>
+            <a:endParaRPr lang="en-US" altLang="ko-KR" sz="1500">
+              <a:solidFill>
+                <a:schemeClr val="tx1"/>
+              </a:solidFill>
+            </a:endParaRPr>
+          </a:p>
+          <a:p>
+            <a:pPr algn="ctr"/>
+            <a:r>
+              <a:rPr lang="en-US" altLang="ko-KR" sz="1500">
+                <a:solidFill>
+                  <a:srgbClr val="FF0000"/>
+                </a:solidFill>
+              </a:rPr>
+              <a:t>G3_in_1 : 0</a:t>
+            </a:r>
+          </a:p>
+          <a:p>
+            <a:pPr algn="ctr"/>
+            <a:r>
+              <a:rPr lang="en-US" altLang="ko-KR" sz="1500">
+                <a:solidFill>
+                  <a:srgbClr val="FF0000"/>
+                </a:solidFill>
+              </a:rPr>
+              <a:t>G3_in_2 : 1</a:t>
+            </a:r>
+          </a:p>
+          <a:p>
+            <a:pPr algn="ctr"/>
+            <a:r>
+              <a:rPr lang="en-US" altLang="ko-KR" sz="1500">
+                <a:solidFill>
+                  <a:schemeClr val="tx1"/>
+                </a:solidFill>
+              </a:rPr>
+              <a:t>G3_out : 1</a:t>
+            </a:r>
+          </a:p>
+          <a:p>
+            <a:pPr algn="ctr"/>
+            <a:endParaRPr lang="en-US" altLang="ko-KR" sz="1500">
+              <a:solidFill>
+                <a:schemeClr val="tx1"/>
+              </a:solidFill>
+            </a:endParaRPr>
+          </a:p>
+          <a:p>
+            <a:pPr algn="ctr"/>
+            <a:r>
+              <a:rPr lang="en-US" altLang="ko-KR" sz="1500">
+                <a:solidFill>
+                  <a:schemeClr val="tx1"/>
+                </a:solidFill>
+              </a:rPr>
+              <a:t>G4_in_1 : 1</a:t>
+            </a:r>
+          </a:p>
+          <a:p>
+            <a:pPr algn="ctr"/>
+            <a:r>
+              <a:rPr lang="en-US" altLang="ko-KR" sz="1500">
+                <a:solidFill>
+                  <a:schemeClr val="tx1"/>
+                </a:solidFill>
+              </a:rPr>
+              <a:t>G4_in_2 : 0</a:t>
+            </a:r>
+          </a:p>
+          <a:p>
+            <a:pPr algn="ctr"/>
+            <a:r>
+              <a:rPr lang="en-US" altLang="ko-KR" sz="1500">
+                <a:solidFill>
+                  <a:schemeClr val="tx1"/>
+                </a:solidFill>
+              </a:rPr>
+              <a:t>G4_out : 1</a:t>
+            </a:r>
+          </a:p>
+          <a:p>
+            <a:pPr algn="ctr"/>
+            <a:endParaRPr lang="en-US" altLang="ko-KR" sz="1500">
+              <a:solidFill>
+                <a:schemeClr val="tx1"/>
+              </a:solidFill>
+            </a:endParaRPr>
+          </a:p>
+          <a:p>
+            <a:pPr algn="ctr"/>
+            <a:r>
+              <a:rPr lang="en-US" altLang="ko-KR" sz="1500">
+                <a:solidFill>
+                  <a:schemeClr val="tx1"/>
+                </a:solidFill>
+              </a:rPr>
+              <a:t>Q : 1</a:t>
+            </a:r>
+          </a:p>
+          <a:p>
+            <a:pPr algn="ctr"/>
+            <a:r>
+              <a:rPr lang="en-US" altLang="ko-KR" sz="1500">
+                <a:solidFill>
+                  <a:schemeClr val="tx1"/>
+                </a:solidFill>
+              </a:rPr>
+              <a:t>Q’ : 1</a:t>
+            </a:r>
+          </a:p>
+        </p:txBody>
+      </p:sp>
+      <p:sp>
+        <p:nvSpPr>
+          <p:cNvPr id="47" name="직사각형 46">
+            <a:extLst>
+              <a:ext uri="{FF2B5EF4-FFF2-40B4-BE49-F238E27FC236}">
+                <a16:creationId xmlns:a16="http://schemas.microsoft.com/office/drawing/2014/main" id="{EBC930F2-6F12-0BE4-C2BB-035B6E60434E}"/>
+              </a:ext>
+            </a:extLst>
+          </p:cNvPr>
+          <p:cNvSpPr/>
+          <p:nvPr/>
+        </p:nvSpPr>
+        <p:spPr>
+          <a:xfrm>
+            <a:off x="6562725" y="447675"/>
+            <a:ext cx="1504950" cy="5962650"/>
+          </a:xfrm>
+          <a:prstGeom prst="rect">
+            <a:avLst/>
+          </a:prstGeom>
+          <a:solidFill>
+            <a:schemeClr val="bg1"/>
+          </a:solidFill>
+          <a:ln w="28575">
+            <a:solidFill>
+              <a:schemeClr val="tx1"/>
+            </a:solidFill>
+          </a:ln>
+        </p:spPr>
+        <p:style>
+          <a:lnRef idx="2">
+            <a:schemeClr val="accent1">
+              <a:shade val="15000"/>
+            </a:schemeClr>
+          </a:lnRef>
+          <a:fillRef idx="1">
+            <a:schemeClr val="accent1"/>
+          </a:fillRef>
+          <a:effectRef idx="0">
+            <a:schemeClr val="accent1"/>
+          </a:effectRef>
+          <a:fontRef idx="minor">
+            <a:schemeClr val="lt1"/>
+          </a:fontRef>
+        </p:style>
+        <p:txBody>
+          <a:bodyPr rtlCol="0" anchor="ctr"/>
+          <a:lstStyle/>
+          <a:p>
+            <a:pPr algn="ctr"/>
+            <a:r>
+              <a:rPr lang="en-US" altLang="ko-KR" sz="1500">
+                <a:solidFill>
+                  <a:schemeClr val="tx1"/>
+                </a:solidFill>
+              </a:rPr>
+              <a:t>J : 1</a:t>
+            </a:r>
+          </a:p>
+          <a:p>
+            <a:pPr algn="ctr"/>
+            <a:r>
+              <a:rPr lang="en-US" altLang="ko-KR" sz="1500">
+                <a:solidFill>
+                  <a:schemeClr val="tx1"/>
+                </a:solidFill>
+              </a:rPr>
+              <a:t>en : 1</a:t>
+            </a:r>
+          </a:p>
+          <a:p>
+            <a:pPr algn="ctr"/>
+            <a:r>
+              <a:rPr lang="en-US" altLang="ko-KR" sz="1500">
+                <a:solidFill>
+                  <a:schemeClr val="tx1"/>
+                </a:solidFill>
+              </a:rPr>
+              <a:t>K : 1</a:t>
+            </a:r>
+          </a:p>
+          <a:p>
+            <a:pPr algn="ctr"/>
+            <a:endParaRPr lang="en-US" altLang="ko-KR" sz="1500">
+              <a:solidFill>
+                <a:schemeClr val="tx1"/>
+              </a:solidFill>
+            </a:endParaRPr>
+          </a:p>
+          <a:p>
+            <a:pPr algn="ctr"/>
+            <a:r>
+              <a:rPr lang="en-US" altLang="ko-KR" sz="1500">
+                <a:solidFill>
+                  <a:schemeClr val="tx1"/>
+                </a:solidFill>
+              </a:rPr>
+              <a:t>G1_in_1 : 1</a:t>
+            </a:r>
+          </a:p>
+          <a:p>
+            <a:pPr algn="ctr"/>
+            <a:r>
+              <a:rPr lang="en-US" altLang="ko-KR" sz="1500">
+                <a:solidFill>
+                  <a:schemeClr val="tx1"/>
+                </a:solidFill>
+              </a:rPr>
+              <a:t>G1_in_2 : 1</a:t>
+            </a:r>
+          </a:p>
+          <a:p>
+            <a:pPr algn="ctr"/>
+            <a:r>
+              <a:rPr lang="en-US" altLang="ko-KR" sz="1500">
+                <a:solidFill>
+                  <a:schemeClr val="tx1"/>
+                </a:solidFill>
+              </a:rPr>
+              <a:t>G1_in_3 : 1</a:t>
+            </a:r>
+          </a:p>
+          <a:p>
+            <a:pPr algn="ctr"/>
+            <a:r>
+              <a:rPr lang="en-US" altLang="ko-KR" sz="1500">
+                <a:solidFill>
+                  <a:schemeClr val="tx1"/>
+                </a:solidFill>
+              </a:rPr>
+              <a:t>G1_out</a:t>
+            </a:r>
+            <a:r>
+              <a:rPr lang="ko-KR" altLang="en-US" sz="1500">
+                <a:solidFill>
+                  <a:schemeClr val="tx1"/>
+                </a:solidFill>
+              </a:rPr>
+              <a:t> </a:t>
+            </a:r>
+            <a:r>
+              <a:rPr lang="en-US" altLang="ko-KR" sz="1500">
+                <a:solidFill>
+                  <a:schemeClr val="tx1"/>
+                </a:solidFill>
+              </a:rPr>
+              <a:t>:</a:t>
+            </a:r>
+            <a:r>
+              <a:rPr lang="ko-KR" altLang="en-US" sz="1500">
+                <a:solidFill>
+                  <a:schemeClr val="tx1"/>
+                </a:solidFill>
+              </a:rPr>
+              <a:t> </a:t>
+            </a:r>
+            <a:r>
+              <a:rPr lang="en-US" altLang="ko-KR" sz="1500">
+                <a:solidFill>
+                  <a:schemeClr val="tx1"/>
+                </a:solidFill>
+              </a:rPr>
+              <a:t>0</a:t>
+            </a:r>
+          </a:p>
+          <a:p>
+            <a:pPr algn="ctr"/>
+            <a:endParaRPr lang="en-US" altLang="ko-KR" sz="1500">
+              <a:solidFill>
+                <a:schemeClr val="tx1"/>
+              </a:solidFill>
+            </a:endParaRPr>
+          </a:p>
+          <a:p>
+            <a:pPr algn="ctr"/>
+            <a:r>
+              <a:rPr lang="en-US" altLang="ko-KR" sz="1500">
+                <a:solidFill>
+                  <a:schemeClr val="tx1"/>
+                </a:solidFill>
+              </a:rPr>
+              <a:t>G2_in_1 : 1</a:t>
+            </a:r>
+          </a:p>
+          <a:p>
+            <a:pPr algn="ctr"/>
+            <a:r>
+              <a:rPr lang="en-US" altLang="ko-KR" sz="1500">
+                <a:solidFill>
+                  <a:schemeClr val="tx1"/>
+                </a:solidFill>
+              </a:rPr>
+              <a:t>G2_in_2 : 1</a:t>
+            </a:r>
+          </a:p>
+          <a:p>
+            <a:pPr algn="ctr"/>
+            <a:r>
+              <a:rPr lang="en-US" altLang="ko-KR" sz="1500">
+                <a:solidFill>
+                  <a:schemeClr val="tx1"/>
+                </a:solidFill>
+              </a:rPr>
+              <a:t>G2_in_3 : 1</a:t>
+            </a:r>
+          </a:p>
+          <a:p>
+            <a:pPr algn="ctr"/>
+            <a:r>
+              <a:rPr lang="en-US" altLang="ko-KR" sz="1500">
+                <a:solidFill>
+                  <a:schemeClr val="tx1"/>
+                </a:solidFill>
+              </a:rPr>
+              <a:t>G2_out : 0</a:t>
+            </a:r>
+          </a:p>
+          <a:p>
+            <a:pPr algn="ctr"/>
+            <a:endParaRPr lang="en-US" altLang="ko-KR" sz="1500">
+              <a:solidFill>
+                <a:schemeClr val="tx1"/>
+              </a:solidFill>
+            </a:endParaRPr>
+          </a:p>
+          <a:p>
+            <a:pPr algn="ctr"/>
+            <a:r>
+              <a:rPr lang="en-US" altLang="ko-KR" sz="1500">
+                <a:solidFill>
+                  <a:srgbClr val="0000FF"/>
+                </a:solidFill>
+              </a:rPr>
+              <a:t>G3_in_1 : 0</a:t>
+            </a:r>
+          </a:p>
+          <a:p>
+            <a:pPr algn="ctr"/>
+            <a:r>
+              <a:rPr lang="en-US" altLang="ko-KR" sz="1500">
+                <a:solidFill>
+                  <a:srgbClr val="0000FF"/>
+                </a:solidFill>
+              </a:rPr>
+              <a:t>G3_in_2 : 1</a:t>
+            </a:r>
+          </a:p>
+          <a:p>
+            <a:pPr algn="ctr"/>
+            <a:r>
+              <a:rPr lang="en-US" altLang="ko-KR" sz="1500">
+                <a:solidFill>
+                  <a:srgbClr val="FF0000"/>
+                </a:solidFill>
+              </a:rPr>
+              <a:t>G3_out : 1</a:t>
+            </a:r>
+          </a:p>
+          <a:p>
+            <a:pPr algn="ctr"/>
+            <a:endParaRPr lang="en-US" altLang="ko-KR" sz="1500">
+              <a:solidFill>
+                <a:schemeClr val="tx1"/>
+              </a:solidFill>
+            </a:endParaRPr>
+          </a:p>
+          <a:p>
+            <a:pPr algn="ctr"/>
+            <a:r>
+              <a:rPr lang="en-US" altLang="ko-KR" sz="1500">
+                <a:solidFill>
+                  <a:srgbClr val="FF0000"/>
+                </a:solidFill>
+              </a:rPr>
+              <a:t>G4_in_1 : 1</a:t>
+            </a:r>
+          </a:p>
+          <a:p>
+            <a:pPr algn="ctr"/>
+            <a:r>
+              <a:rPr lang="en-US" altLang="ko-KR" sz="1500">
+                <a:solidFill>
+                  <a:schemeClr val="tx1"/>
+                </a:solidFill>
+              </a:rPr>
+              <a:t>G4_in_2 : 0</a:t>
+            </a:r>
+          </a:p>
+          <a:p>
+            <a:pPr algn="ctr"/>
+            <a:r>
+              <a:rPr lang="en-US" altLang="ko-KR" sz="1500">
+                <a:solidFill>
+                  <a:schemeClr val="tx1"/>
+                </a:solidFill>
+              </a:rPr>
+              <a:t>G4_out : 1</a:t>
+            </a:r>
+          </a:p>
+          <a:p>
+            <a:pPr algn="ctr"/>
+            <a:endParaRPr lang="en-US" altLang="ko-KR" sz="1500">
+              <a:solidFill>
+                <a:schemeClr val="tx1"/>
+              </a:solidFill>
+            </a:endParaRPr>
+          </a:p>
+          <a:p>
+            <a:pPr algn="ctr"/>
+            <a:r>
+              <a:rPr lang="en-US" altLang="ko-KR" sz="1500">
+                <a:solidFill>
+                  <a:srgbClr val="FF0000"/>
+                </a:solidFill>
+              </a:rPr>
+              <a:t>Q : 1</a:t>
+            </a:r>
+          </a:p>
+          <a:p>
+            <a:pPr algn="ctr"/>
+            <a:r>
+              <a:rPr lang="en-US" altLang="ko-KR" sz="1500">
+                <a:solidFill>
+                  <a:schemeClr val="tx1"/>
+                </a:solidFill>
+              </a:rPr>
+              <a:t>Q’ : 1</a:t>
+            </a:r>
+          </a:p>
+        </p:txBody>
+      </p:sp>
+      <p:cxnSp>
+        <p:nvCxnSpPr>
+          <p:cNvPr id="49" name="직선 연결선 48">
+            <a:extLst>
+              <a:ext uri="{FF2B5EF4-FFF2-40B4-BE49-F238E27FC236}">
+                <a16:creationId xmlns:a16="http://schemas.microsoft.com/office/drawing/2014/main" id="{0E3B1101-22DD-6926-649F-87FA6FBB4BDD}"/>
+              </a:ext>
+            </a:extLst>
+          </p:cNvPr>
+          <p:cNvCxnSpPr>
+            <a:stCxn id="10" idx="3"/>
+            <a:endCxn id="47" idx="1"/>
+          </p:cNvCxnSpPr>
+          <p:nvPr/>
+        </p:nvCxnSpPr>
+        <p:spPr>
+          <a:xfrm>
+            <a:off x="3181350" y="3429000"/>
+            <a:ext cx="3381375" cy="0"/>
+          </a:xfrm>
+          <a:prstGeom prst="line">
+            <a:avLst/>
+          </a:prstGeom>
+          <a:ln w="28575"/>
+        </p:spPr>
+        <p:style>
+          <a:lnRef idx="2">
+            <a:schemeClr val="dk1"/>
+          </a:lnRef>
+          <a:fillRef idx="0">
+            <a:schemeClr val="dk1"/>
+          </a:fillRef>
+          <a:effectRef idx="1">
+            <a:schemeClr val="dk1"/>
+          </a:effectRef>
+          <a:fontRef idx="minor">
+            <a:schemeClr val="tx1"/>
+          </a:fontRef>
+        </p:style>
+      </p:cxnSp>
+      <p:sp>
+        <p:nvSpPr>
+          <p:cNvPr id="57" name="이등변 삼각형 56">
+            <a:extLst>
+              <a:ext uri="{FF2B5EF4-FFF2-40B4-BE49-F238E27FC236}">
+                <a16:creationId xmlns:a16="http://schemas.microsoft.com/office/drawing/2014/main" id="{7D5C3E27-921E-44CA-CCAC-C838A968371E}"/>
+              </a:ext>
+            </a:extLst>
+          </p:cNvPr>
+          <p:cNvSpPr/>
+          <p:nvPr/>
+        </p:nvSpPr>
+        <p:spPr>
+          <a:xfrm rot="5400000">
+            <a:off x="6329362" y="3314700"/>
+            <a:ext cx="238125" cy="228600"/>
+          </a:xfrm>
+          <a:prstGeom prst="triangle">
+            <a:avLst/>
+          </a:prstGeom>
+          <a:noFill/>
+          <a:ln w="28575"/>
+        </p:spPr>
+        <p:style>
+          <a:lnRef idx="2">
+            <a:schemeClr val="accent1">
+              <a:shade val="15000"/>
+            </a:schemeClr>
+          </a:lnRef>
+          <a:fillRef idx="1">
+            <a:schemeClr val="accent1"/>
+          </a:fillRef>
+          <a:effectRef idx="0">
+            <a:schemeClr val="accent1"/>
+          </a:effectRef>
+          <a:fontRef idx="minor">
+            <a:schemeClr val="lt1"/>
+          </a:fontRef>
+        </p:style>
+        <p:txBody>
+          <a:bodyPr rtlCol="0" anchor="ctr"/>
+          <a:lstStyle/>
+          <a:p>
+            <a:pPr algn="ctr"/>
+            <a:endParaRPr lang="ko-KR" altLang="en-US"/>
+          </a:p>
+        </p:txBody>
+      </p:sp>
+      <p:sp>
+        <p:nvSpPr>
+          <p:cNvPr id="58" name="TextBox 57">
+            <a:extLst>
+              <a:ext uri="{FF2B5EF4-FFF2-40B4-BE49-F238E27FC236}">
+                <a16:creationId xmlns:a16="http://schemas.microsoft.com/office/drawing/2014/main" id="{EF0BE8BD-F11D-F1D0-7411-3329AE497975}"/>
+              </a:ext>
+            </a:extLst>
+          </p:cNvPr>
+          <p:cNvSpPr txBox="1"/>
+          <p:nvPr/>
+        </p:nvSpPr>
+        <p:spPr>
+          <a:xfrm>
+            <a:off x="3400425" y="447675"/>
+            <a:ext cx="2952750" cy="369332"/>
+          </a:xfrm>
+          <a:prstGeom prst="rect">
+            <a:avLst/>
+          </a:prstGeom>
+          <a:noFill/>
+        </p:spPr>
+        <p:txBody>
+          <a:bodyPr wrap="square" rtlCol="0">
+            <a:spAutoFit/>
+          </a:bodyPr>
+          <a:lstStyle/>
+          <a:p>
+            <a:r>
+              <a:rPr lang="en-US" altLang="ko-KR"/>
+              <a:t>Queue : [</a:t>
+            </a:r>
+            <a:r>
+              <a:rPr lang="en-US" altLang="ko-KR">
+                <a:solidFill>
+                  <a:srgbClr val="FF0000"/>
+                </a:solidFill>
+              </a:rPr>
+              <a:t>G3</a:t>
+            </a:r>
+            <a:r>
+              <a:rPr lang="en-US" altLang="ko-KR"/>
+              <a:t>]</a:t>
+            </a:r>
+            <a:endParaRPr lang="ko-KR" altLang="en-US"/>
+          </a:p>
+        </p:txBody>
+      </p:sp>
+      <p:sp>
+        <p:nvSpPr>
+          <p:cNvPr id="61" name="TextBox 60">
+            <a:extLst>
+              <a:ext uri="{FF2B5EF4-FFF2-40B4-BE49-F238E27FC236}">
+                <a16:creationId xmlns:a16="http://schemas.microsoft.com/office/drawing/2014/main" id="{4522816E-583A-9950-1B32-94943DCED5BD}"/>
+              </a:ext>
+            </a:extLst>
+          </p:cNvPr>
+          <p:cNvSpPr txBox="1"/>
+          <p:nvPr/>
+        </p:nvSpPr>
+        <p:spPr>
+          <a:xfrm>
+            <a:off x="8296275" y="447675"/>
+            <a:ext cx="2952750" cy="369332"/>
+          </a:xfrm>
+          <a:prstGeom prst="rect">
+            <a:avLst/>
+          </a:prstGeom>
+          <a:noFill/>
+        </p:spPr>
+        <p:txBody>
+          <a:bodyPr wrap="square" rtlCol="0">
+            <a:spAutoFit/>
+          </a:bodyPr>
+          <a:lstStyle/>
+          <a:p>
+            <a:r>
+              <a:rPr lang="en-US" altLang="ko-KR"/>
+              <a:t>Queue : []</a:t>
+            </a:r>
+            <a:endParaRPr lang="ko-KR" altLang="en-US"/>
+          </a:p>
+        </p:txBody>
+      </p:sp>
+      <p:sp>
+        <p:nvSpPr>
+          <p:cNvPr id="3" name="TextBox 2">
+            <a:extLst>
+              <a:ext uri="{FF2B5EF4-FFF2-40B4-BE49-F238E27FC236}">
+                <a16:creationId xmlns:a16="http://schemas.microsoft.com/office/drawing/2014/main" id="{28E0E606-DED4-E9D1-9F87-D28F69402174}"/>
+              </a:ext>
+            </a:extLst>
+          </p:cNvPr>
+          <p:cNvSpPr txBox="1"/>
+          <p:nvPr/>
+        </p:nvSpPr>
+        <p:spPr>
+          <a:xfrm>
+            <a:off x="8496300" y="3095625"/>
+            <a:ext cx="2507418" cy="369332"/>
+          </a:xfrm>
+          <a:prstGeom prst="rect">
+            <a:avLst/>
+          </a:prstGeom>
+          <a:noFill/>
+        </p:spPr>
+        <p:txBody>
+          <a:bodyPr wrap="none" rtlCol="0">
+            <a:spAutoFit/>
+          </a:bodyPr>
+          <a:lstStyle/>
+          <a:p>
+            <a:r>
+              <a:rPr lang="ko-KR" altLang="en-US"/>
+              <a:t>불변</a:t>
+            </a:r>
+            <a:r>
+              <a:rPr lang="en-US" altLang="ko-KR"/>
+              <a:t>, Queue</a:t>
+            </a:r>
+            <a:r>
+              <a:rPr lang="ko-KR" altLang="en-US"/>
+              <a:t>에 </a:t>
+            </a:r>
+            <a:r>
+              <a:rPr lang="en-US" altLang="ko-KR"/>
+              <a:t>push</a:t>
+            </a:r>
+            <a:r>
+              <a:rPr lang="ko-KR" altLang="en-US"/>
+              <a:t> </a:t>
+            </a:r>
+            <a:r>
+              <a:rPr lang="en-US" altLang="ko-KR"/>
+              <a:t>X</a:t>
+            </a:r>
+          </a:p>
+        </p:txBody>
+      </p:sp>
+    </p:spTree>
+    <p:extLst>
+      <p:ext uri="{BB962C8B-B14F-4D97-AF65-F5344CB8AC3E}">
+        <p14:creationId xmlns:p14="http://schemas.microsoft.com/office/powerpoint/2010/main" val="1448545913"/>
+      </p:ext>
+    </p:extLst>
+  </p:cSld>
+  <p:clrMapOvr>
+    <a:masterClrMapping/>
+  </p:clrMapOvr>
+</p:sld>
+</file>
+
+<file path=ppt/slides/slide31.xml><?xml version="1.0" encoding="utf-8"?>
+<p:sld xmlns:a="http://schemas.openxmlformats.org/drawingml/2006/main" xmlns:r="http://schemas.openxmlformats.org/officeDocument/2006/relationships" xmlns:p="http://schemas.openxmlformats.org/presentationml/2006/main">
+  <p:cSld>
+    <p:spTree>
+      <p:nvGrpSpPr>
+        <p:cNvPr id="1" name="">
+          <a:extLst>
+            <a:ext uri="{FF2B5EF4-FFF2-40B4-BE49-F238E27FC236}">
+              <a16:creationId xmlns:a16="http://schemas.microsoft.com/office/drawing/2014/main" id="{45E1C66F-EA69-5C04-FB5B-4F75A88C4ED1}"/>
+            </a:ext>
+          </a:extLst>
+        </p:cNvPr>
+        <p:cNvGrpSpPr/>
+        <p:nvPr/>
+      </p:nvGrpSpPr>
+      <p:grpSpPr>
+        <a:xfrm>
+          <a:off x="0" y="0"/>
+          <a:ext cx="0" cy="0"/>
+          <a:chOff x="0" y="0"/>
+          <a:chExt cx="0" cy="0"/>
+        </a:xfrm>
+      </p:grpSpPr>
+      <p:sp>
+        <p:nvSpPr>
+          <p:cNvPr id="10" name="직사각형 9">
+            <a:extLst>
+              <a:ext uri="{FF2B5EF4-FFF2-40B4-BE49-F238E27FC236}">
+                <a16:creationId xmlns:a16="http://schemas.microsoft.com/office/drawing/2014/main" id="{8FE61E2F-BFE8-E736-621D-32A1314F74AC}"/>
+              </a:ext>
+            </a:extLst>
+          </p:cNvPr>
+          <p:cNvSpPr/>
+          <p:nvPr/>
+        </p:nvSpPr>
+        <p:spPr>
+          <a:xfrm>
+            <a:off x="6096000" y="352425"/>
+            <a:ext cx="1504950" cy="5962650"/>
+          </a:xfrm>
+          <a:prstGeom prst="rect">
+            <a:avLst/>
+          </a:prstGeom>
+          <a:solidFill>
+            <a:schemeClr val="bg1"/>
+          </a:solidFill>
+          <a:ln w="28575">
+            <a:solidFill>
+              <a:schemeClr val="tx1"/>
+            </a:solidFill>
+          </a:ln>
+        </p:spPr>
+        <p:style>
+          <a:lnRef idx="2">
+            <a:schemeClr val="accent1">
+              <a:shade val="15000"/>
+            </a:schemeClr>
+          </a:lnRef>
+          <a:fillRef idx="1">
+            <a:schemeClr val="accent1"/>
+          </a:fillRef>
+          <a:effectRef idx="0">
+            <a:schemeClr val="accent1"/>
+          </a:effectRef>
+          <a:fontRef idx="minor">
+            <a:schemeClr val="lt1"/>
+          </a:fontRef>
+        </p:style>
+        <p:txBody>
+          <a:bodyPr rtlCol="0" anchor="ctr"/>
+          <a:lstStyle/>
+          <a:p>
+            <a:pPr algn="ctr"/>
+            <a:r>
+              <a:rPr lang="en-US" altLang="ko-KR" sz="1500">
+                <a:solidFill>
+                  <a:schemeClr val="tx1"/>
+                </a:solidFill>
+              </a:rPr>
+              <a:t>J : 1</a:t>
+            </a:r>
+          </a:p>
+          <a:p>
+            <a:pPr algn="ctr"/>
+            <a:r>
+              <a:rPr lang="en-US" altLang="ko-KR" sz="1500">
+                <a:solidFill>
+                  <a:schemeClr val="tx1"/>
+                </a:solidFill>
+              </a:rPr>
+              <a:t>en : 1</a:t>
+            </a:r>
+          </a:p>
+          <a:p>
+            <a:pPr algn="ctr"/>
+            <a:r>
+              <a:rPr lang="en-US" altLang="ko-KR" sz="1500">
+                <a:solidFill>
+                  <a:schemeClr val="tx1"/>
+                </a:solidFill>
+              </a:rPr>
+              <a:t>K : 1</a:t>
+            </a:r>
+          </a:p>
+          <a:p>
+            <a:pPr algn="ctr"/>
+            <a:endParaRPr lang="en-US" altLang="ko-KR" sz="1500">
+              <a:solidFill>
+                <a:schemeClr val="tx1"/>
+              </a:solidFill>
+            </a:endParaRPr>
+          </a:p>
+          <a:p>
+            <a:pPr algn="ctr"/>
+            <a:r>
+              <a:rPr lang="en-US" altLang="ko-KR" sz="1500">
+                <a:solidFill>
+                  <a:schemeClr val="tx1"/>
+                </a:solidFill>
+              </a:rPr>
+              <a:t>G1_in_1 : 1</a:t>
+            </a:r>
+          </a:p>
+          <a:p>
+            <a:pPr algn="ctr"/>
+            <a:r>
+              <a:rPr lang="en-US" altLang="ko-KR" sz="1500">
+                <a:solidFill>
+                  <a:schemeClr val="tx1"/>
+                </a:solidFill>
+              </a:rPr>
+              <a:t>G1_in_2 : 1</a:t>
+            </a:r>
+          </a:p>
+          <a:p>
+            <a:pPr algn="ctr"/>
+            <a:r>
+              <a:rPr lang="en-US" altLang="ko-KR" sz="1500">
+                <a:solidFill>
+                  <a:schemeClr val="tx1"/>
+                </a:solidFill>
+              </a:rPr>
+              <a:t>G1_in_3 : 1</a:t>
+            </a:r>
+          </a:p>
+          <a:p>
+            <a:pPr algn="ctr"/>
+            <a:r>
+              <a:rPr lang="en-US" altLang="ko-KR" sz="1500">
+                <a:solidFill>
+                  <a:schemeClr val="tx1"/>
+                </a:solidFill>
+              </a:rPr>
+              <a:t>G1_out</a:t>
+            </a:r>
+            <a:r>
+              <a:rPr lang="ko-KR" altLang="en-US" sz="1500">
+                <a:solidFill>
+                  <a:schemeClr val="tx1"/>
+                </a:solidFill>
+              </a:rPr>
+              <a:t> </a:t>
+            </a:r>
+            <a:r>
+              <a:rPr lang="en-US" altLang="ko-KR" sz="1500">
+                <a:solidFill>
+                  <a:schemeClr val="tx1"/>
+                </a:solidFill>
+              </a:rPr>
+              <a:t>:</a:t>
+            </a:r>
+            <a:r>
+              <a:rPr lang="ko-KR" altLang="en-US" sz="1500">
+                <a:solidFill>
+                  <a:schemeClr val="tx1"/>
+                </a:solidFill>
+              </a:rPr>
+              <a:t> </a:t>
+            </a:r>
+            <a:r>
+              <a:rPr lang="en-US" altLang="ko-KR" sz="1500">
+                <a:solidFill>
+                  <a:schemeClr val="tx1"/>
+                </a:solidFill>
+              </a:rPr>
+              <a:t>0</a:t>
+            </a:r>
+          </a:p>
+          <a:p>
+            <a:pPr algn="ctr"/>
+            <a:endParaRPr lang="en-US" altLang="ko-KR" sz="1500">
+              <a:solidFill>
+                <a:schemeClr val="tx1"/>
+              </a:solidFill>
+            </a:endParaRPr>
+          </a:p>
+          <a:p>
+            <a:pPr algn="ctr"/>
+            <a:r>
+              <a:rPr lang="en-US" altLang="ko-KR" sz="1500">
+                <a:solidFill>
+                  <a:schemeClr val="tx1"/>
+                </a:solidFill>
+              </a:rPr>
+              <a:t>G2_in_1 : 1</a:t>
+            </a:r>
+          </a:p>
+          <a:p>
+            <a:pPr algn="ctr"/>
+            <a:r>
+              <a:rPr lang="en-US" altLang="ko-KR" sz="1500">
+                <a:solidFill>
+                  <a:schemeClr val="tx1"/>
+                </a:solidFill>
+              </a:rPr>
+              <a:t>G2_in_2 : 1</a:t>
+            </a:r>
+          </a:p>
+          <a:p>
+            <a:pPr algn="ctr"/>
+            <a:r>
+              <a:rPr lang="en-US" altLang="ko-KR" sz="1500">
+                <a:solidFill>
+                  <a:schemeClr val="tx1"/>
+                </a:solidFill>
+              </a:rPr>
+              <a:t>G2_in_3 : 1</a:t>
+            </a:r>
+          </a:p>
+          <a:p>
+            <a:pPr algn="ctr"/>
+            <a:r>
+              <a:rPr lang="en-US" altLang="ko-KR" sz="1500">
+                <a:solidFill>
+                  <a:schemeClr val="tx1"/>
+                </a:solidFill>
+              </a:rPr>
+              <a:t>G2_out : 0</a:t>
+            </a:r>
+          </a:p>
+          <a:p>
+            <a:pPr algn="ctr"/>
+            <a:endParaRPr lang="en-US" altLang="ko-KR" sz="1500">
+              <a:solidFill>
+                <a:schemeClr val="tx1"/>
+              </a:solidFill>
+            </a:endParaRPr>
+          </a:p>
+          <a:p>
+            <a:pPr algn="ctr"/>
+            <a:r>
+              <a:rPr lang="en-US" altLang="ko-KR" sz="1500">
+                <a:solidFill>
+                  <a:schemeClr val="tx1"/>
+                </a:solidFill>
+              </a:rPr>
+              <a:t>G3_in_1 : 0</a:t>
+            </a:r>
+          </a:p>
+          <a:p>
+            <a:pPr algn="ctr"/>
+            <a:r>
+              <a:rPr lang="en-US" altLang="ko-KR" sz="1500">
+                <a:solidFill>
+                  <a:schemeClr val="tx1"/>
+                </a:solidFill>
+              </a:rPr>
+              <a:t>G3_in_2 : 1</a:t>
+            </a:r>
+          </a:p>
+          <a:p>
+            <a:pPr algn="ctr"/>
+            <a:r>
+              <a:rPr lang="en-US" altLang="ko-KR" sz="1500">
+                <a:solidFill>
+                  <a:schemeClr val="tx1"/>
+                </a:solidFill>
+              </a:rPr>
+              <a:t>G3_out : 1</a:t>
+            </a:r>
+          </a:p>
+          <a:p>
+            <a:pPr algn="ctr"/>
+            <a:endParaRPr lang="en-US" altLang="ko-KR" sz="1500">
+              <a:solidFill>
+                <a:schemeClr val="tx1"/>
+              </a:solidFill>
+            </a:endParaRPr>
+          </a:p>
+          <a:p>
+            <a:pPr algn="ctr"/>
+            <a:r>
+              <a:rPr lang="en-US" altLang="ko-KR" sz="1500">
+                <a:solidFill>
+                  <a:schemeClr val="tx1"/>
+                </a:solidFill>
+              </a:rPr>
+              <a:t>G4_in_1 : 1</a:t>
+            </a:r>
+          </a:p>
+          <a:p>
+            <a:pPr algn="ctr"/>
+            <a:r>
+              <a:rPr lang="en-US" altLang="ko-KR" sz="1500">
+                <a:solidFill>
+                  <a:schemeClr val="tx1"/>
+                </a:solidFill>
+              </a:rPr>
+              <a:t>G4_in_2 : 0</a:t>
+            </a:r>
+          </a:p>
+          <a:p>
+            <a:pPr algn="ctr"/>
+            <a:r>
+              <a:rPr lang="en-US" altLang="ko-KR" sz="1500">
+                <a:solidFill>
+                  <a:schemeClr val="tx1"/>
+                </a:solidFill>
+              </a:rPr>
+              <a:t>G4_out : 1</a:t>
+            </a:r>
+          </a:p>
+          <a:p>
+            <a:pPr algn="ctr"/>
+            <a:endParaRPr lang="en-US" altLang="ko-KR" sz="1500">
+              <a:solidFill>
+                <a:schemeClr val="tx1"/>
+              </a:solidFill>
+            </a:endParaRPr>
+          </a:p>
+          <a:p>
+            <a:pPr algn="ctr"/>
+            <a:r>
+              <a:rPr lang="en-US" altLang="ko-KR" sz="1500">
+                <a:solidFill>
+                  <a:schemeClr val="tx1"/>
+                </a:solidFill>
+              </a:rPr>
+              <a:t>Q : 1</a:t>
+            </a:r>
+          </a:p>
+          <a:p>
+            <a:pPr algn="ctr"/>
+            <a:r>
+              <a:rPr lang="en-US" altLang="ko-KR" sz="1500">
+                <a:solidFill>
+                  <a:schemeClr val="tx1"/>
+                </a:solidFill>
+              </a:rPr>
+              <a:t>Q’ : 1</a:t>
+            </a:r>
+          </a:p>
+        </p:txBody>
+      </p:sp>
+      <p:sp>
+        <p:nvSpPr>
+          <p:cNvPr id="3" name="TextBox 2">
+            <a:extLst>
+              <a:ext uri="{FF2B5EF4-FFF2-40B4-BE49-F238E27FC236}">
+                <a16:creationId xmlns:a16="http://schemas.microsoft.com/office/drawing/2014/main" id="{B51CBA06-5A9A-6199-A2BB-E5FE47ABAEBD}"/>
+              </a:ext>
+            </a:extLst>
+          </p:cNvPr>
+          <p:cNvSpPr txBox="1"/>
+          <p:nvPr/>
+        </p:nvSpPr>
+        <p:spPr>
+          <a:xfrm>
+            <a:off x="4248150" y="3149084"/>
+            <a:ext cx="1404552" cy="369332"/>
+          </a:xfrm>
+          <a:prstGeom prst="rect">
+            <a:avLst/>
+          </a:prstGeom>
+          <a:noFill/>
+        </p:spPr>
+        <p:txBody>
+          <a:bodyPr wrap="none" rtlCol="0">
+            <a:spAutoFit/>
+          </a:bodyPr>
+          <a:lstStyle/>
+          <a:p>
+            <a:r>
+              <a:rPr lang="ko-KR" altLang="en-US"/>
+              <a:t>최종 상태 </a:t>
+            </a:r>
+            <a:r>
+              <a:rPr lang="en-US" altLang="ko-KR"/>
+              <a:t>: </a:t>
+            </a:r>
+            <a:endParaRPr lang="ko-KR" altLang="en-US"/>
+          </a:p>
+        </p:txBody>
+      </p:sp>
+    </p:spTree>
+    <p:extLst>
+      <p:ext uri="{BB962C8B-B14F-4D97-AF65-F5344CB8AC3E}">
+        <p14:creationId xmlns:p14="http://schemas.microsoft.com/office/powerpoint/2010/main" val="1012063977"/>
+      </p:ext>
+    </p:extLst>
+  </p:cSld>
+  <p:clrMapOvr>
+    <a:masterClrMapping/>
+  </p:clrMapOvr>
+</p:sld>
+</file>
+
+<file path=ppt/slides/slide32.xml><?xml version="1.0" encoding="utf-8"?>
+<p:sld xmlns:a="http://schemas.openxmlformats.org/drawingml/2006/main" xmlns:r="http://schemas.openxmlformats.org/officeDocument/2006/relationships" xmlns:p="http://schemas.openxmlformats.org/presentationml/2006/main">
+  <p:cSld>
+    <p:spTree>
+      <p:nvGrpSpPr>
+        <p:cNvPr id="1" name=""/>
+        <p:cNvGrpSpPr/>
+        <p:nvPr/>
+      </p:nvGrpSpPr>
+      <p:grpSpPr>
+        <a:xfrm>
+          <a:off x="0" y="0"/>
+          <a:ext cx="0" cy="0"/>
+          <a:chOff x="0" y="0"/>
+          <a:chExt cx="0" cy="0"/>
+        </a:xfrm>
+      </p:grpSpPr>
+    </p:spTree>
+    <p:extLst>
+      <p:ext uri="{BB962C8B-B14F-4D97-AF65-F5344CB8AC3E}">
+        <p14:creationId xmlns:p14="http://schemas.microsoft.com/office/powerpoint/2010/main" val="4211065875"/>
       </p:ext>
     </p:extLst>
   </p:cSld>
